--- a/exports/pptx/lessons/middle-module-10-herbs-aushadhi/day-07-pudina.pptx
+++ b/exports/pptx/lessons/middle-module-10-herbs-aushadhi/day-07-pudina.pptx
@@ -16,9 +16,18 @@
     <p:sldId id="264" r:id="rId10"/>
     <p:sldId id="265" r:id="rId11"/>
     <p:sldId id="266" r:id="rId12"/>
+    <p:sldId id="267" r:id="rId13"/>
+    <p:sldId id="268" r:id="rId14"/>
+    <p:sldId id="269" r:id="rId15"/>
+    <p:sldId id="270" r:id="rId16"/>
+    <p:sldId id="271" r:id="rId17"/>
+    <p:sldId id="272" r:id="rId18"/>
+    <p:sldId id="273" r:id="rId19"/>
+    <p:sldId id="274" r:id="rId20"/>
+    <p:sldId id="275" r:id="rId21"/>
   </p:sldIdLst>
   <p:notesMasterIdLst>
-    <p:notesMasterId r:id="rId13"/>
+    <p:notesMasterId r:id="rId22"/>
   </p:notesMasterIdLst>
   <p:sldSz cx="9144000" cy="5143500"/>
   <p:notesSz cx="5143500" cy="9144000"/>
@@ -730,6 +739,710 @@
 </p:notes>
 </file>
 
+<file path=ppt/notesSlides/notesSlide12.xml><?xml version="1.0" encoding="utf-8"?>
+<p:notes xmlns:a="http://schemas.openxmlformats.org/drawingml/2006/main" xmlns:r="http://schemas.openxmlformats.org/officeDocument/2006/relationships" xmlns:p="http://schemas.openxmlformats.org/presentationml/2006/main">
+  <p:cSld>
+    <p:spTree>
+      <p:nvGrpSpPr>
+        <p:cNvPr id="1" name=""/>
+        <p:cNvGrpSpPr/>
+        <p:nvPr/>
+      </p:nvGrpSpPr>
+      <p:grpSpPr>
+        <a:xfrm>
+          <a:off x="0" y="0"/>
+          <a:ext cx="0" cy="0"/>
+          <a:chOff x="0" y="0"/>
+          <a:chExt cx="0" cy="0"/>
+        </a:xfrm>
+      </p:grpSpPr>
+      <p:sp>
+        <p:nvSpPr>
+          <p:cNvPr id="2" name="Slide Image Placeholder 1"/>
+          <p:cNvSpPr>
+            <a:spLocks noGrp="1" noRot="1" noChangeAspect="1"/>
+          </p:cNvSpPr>
+          <p:nvPr>
+            <p:ph type="sldImg"/>
+          </p:nvPr>
+        </p:nvSpPr>
+        <p:spPr/>
+      </p:sp>
+      <p:sp>
+        <p:nvSpPr>
+          <p:cNvPr id="3" name="Notes Placeholder 2"/>
+          <p:cNvSpPr>
+            <a:spLocks noGrp="1"/>
+          </p:cNvSpPr>
+          <p:nvPr>
+            <p:ph type="body" idx="1"/>
+          </p:nvPr>
+        </p:nvSpPr>
+        <p:spPr/>
+        <p:txBody>
+          <a:bodyPr/>
+          <a:lstStyle/>
+          <a:p>
+            <a:r>
+              <a:rPr lang="en-US" dirty="0"/>
+              <a:t/>
+            </a:r>
+            <a:endParaRPr lang="en-US" dirty="0"/>
+          </a:p>
+        </p:txBody>
+      </p:sp>
+      <p:sp>
+        <p:nvSpPr>
+          <p:cNvPr id="4" name="Slide Number Placeholder 3"/>
+          <p:cNvSpPr>
+            <a:spLocks noGrp="1"/>
+          </p:cNvSpPr>
+          <p:nvPr>
+            <p:ph type="sldNum" sz="quarter" idx="10"/>
+          </p:nvPr>
+        </p:nvSpPr>
+        <p:spPr/>
+        <p:txBody>
+          <a:bodyPr/>
+          <a:lstStyle/>
+          <a:p>
+            <a:fld id="{F7021451-1387-4CA6-816F-3879F97B5CBC}" type="slidenum">
+              <a:rPr lang="en-US"/>
+              <a:t>12</a:t>
+            </a:fld>
+            <a:endParaRPr lang="en-US"/>
+          </a:p>
+        </p:txBody>
+      </p:sp>
+    </p:spTree>
+    <p:extLst>
+      <p:ext uri="{BB962C8B-B14F-4D97-AF65-F5344CB8AC3E}">
+        <p14:creationId xmlns:p14="http://schemas.microsoft.com/office/powerpoint/2010/main" val="1024086991"/>
+      </p:ext>
+    </p:extLst>
+  </p:cSld>
+  <p:clrMapOvr>
+    <a:masterClrMapping/>
+  </p:clrMapOvr>
+</p:notes>
+</file>
+
+<file path=ppt/notesSlides/notesSlide13.xml><?xml version="1.0" encoding="utf-8"?>
+<p:notes xmlns:a="http://schemas.openxmlformats.org/drawingml/2006/main" xmlns:r="http://schemas.openxmlformats.org/officeDocument/2006/relationships" xmlns:p="http://schemas.openxmlformats.org/presentationml/2006/main">
+  <p:cSld>
+    <p:spTree>
+      <p:nvGrpSpPr>
+        <p:cNvPr id="1" name=""/>
+        <p:cNvGrpSpPr/>
+        <p:nvPr/>
+      </p:nvGrpSpPr>
+      <p:grpSpPr>
+        <a:xfrm>
+          <a:off x="0" y="0"/>
+          <a:ext cx="0" cy="0"/>
+          <a:chOff x="0" y="0"/>
+          <a:chExt cx="0" cy="0"/>
+        </a:xfrm>
+      </p:grpSpPr>
+      <p:sp>
+        <p:nvSpPr>
+          <p:cNvPr id="2" name="Slide Image Placeholder 1"/>
+          <p:cNvSpPr>
+            <a:spLocks noGrp="1" noRot="1" noChangeAspect="1"/>
+          </p:cNvSpPr>
+          <p:nvPr>
+            <p:ph type="sldImg"/>
+          </p:nvPr>
+        </p:nvSpPr>
+        <p:spPr/>
+      </p:sp>
+      <p:sp>
+        <p:nvSpPr>
+          <p:cNvPr id="3" name="Notes Placeholder 2"/>
+          <p:cNvSpPr>
+            <a:spLocks noGrp="1"/>
+          </p:cNvSpPr>
+          <p:nvPr>
+            <p:ph type="body" idx="1"/>
+          </p:nvPr>
+        </p:nvSpPr>
+        <p:spPr/>
+        <p:txBody>
+          <a:bodyPr/>
+          <a:lstStyle/>
+          <a:p>
+            <a:r>
+              <a:rPr lang="en-US" dirty="0"/>
+              <a:t/>
+            </a:r>
+            <a:endParaRPr lang="en-US" dirty="0"/>
+          </a:p>
+        </p:txBody>
+      </p:sp>
+      <p:sp>
+        <p:nvSpPr>
+          <p:cNvPr id="4" name="Slide Number Placeholder 3"/>
+          <p:cNvSpPr>
+            <a:spLocks noGrp="1"/>
+          </p:cNvSpPr>
+          <p:nvPr>
+            <p:ph type="sldNum" sz="quarter" idx="10"/>
+          </p:nvPr>
+        </p:nvSpPr>
+        <p:spPr/>
+        <p:txBody>
+          <a:bodyPr/>
+          <a:lstStyle/>
+          <a:p>
+            <a:fld id="{F7021451-1387-4CA6-816F-3879F97B5CBC}" type="slidenum">
+              <a:rPr lang="en-US"/>
+              <a:t>13</a:t>
+            </a:fld>
+            <a:endParaRPr lang="en-US"/>
+          </a:p>
+        </p:txBody>
+      </p:sp>
+    </p:spTree>
+    <p:extLst>
+      <p:ext uri="{BB962C8B-B14F-4D97-AF65-F5344CB8AC3E}">
+        <p14:creationId xmlns:p14="http://schemas.microsoft.com/office/powerpoint/2010/main" val="1024086991"/>
+      </p:ext>
+    </p:extLst>
+  </p:cSld>
+  <p:clrMapOvr>
+    <a:masterClrMapping/>
+  </p:clrMapOvr>
+</p:notes>
+</file>
+
+<file path=ppt/notesSlides/notesSlide14.xml><?xml version="1.0" encoding="utf-8"?>
+<p:notes xmlns:a="http://schemas.openxmlformats.org/drawingml/2006/main" xmlns:r="http://schemas.openxmlformats.org/officeDocument/2006/relationships" xmlns:p="http://schemas.openxmlformats.org/presentationml/2006/main">
+  <p:cSld>
+    <p:spTree>
+      <p:nvGrpSpPr>
+        <p:cNvPr id="1" name=""/>
+        <p:cNvGrpSpPr/>
+        <p:nvPr/>
+      </p:nvGrpSpPr>
+      <p:grpSpPr>
+        <a:xfrm>
+          <a:off x="0" y="0"/>
+          <a:ext cx="0" cy="0"/>
+          <a:chOff x="0" y="0"/>
+          <a:chExt cx="0" cy="0"/>
+        </a:xfrm>
+      </p:grpSpPr>
+      <p:sp>
+        <p:nvSpPr>
+          <p:cNvPr id="2" name="Slide Image Placeholder 1"/>
+          <p:cNvSpPr>
+            <a:spLocks noGrp="1" noRot="1" noChangeAspect="1"/>
+          </p:cNvSpPr>
+          <p:nvPr>
+            <p:ph type="sldImg"/>
+          </p:nvPr>
+        </p:nvSpPr>
+        <p:spPr/>
+      </p:sp>
+      <p:sp>
+        <p:nvSpPr>
+          <p:cNvPr id="3" name="Notes Placeholder 2"/>
+          <p:cNvSpPr>
+            <a:spLocks noGrp="1"/>
+          </p:cNvSpPr>
+          <p:nvPr>
+            <p:ph type="body" idx="1"/>
+          </p:nvPr>
+        </p:nvSpPr>
+        <p:spPr/>
+        <p:txBody>
+          <a:bodyPr/>
+          <a:lstStyle/>
+          <a:p>
+            <a:r>
+              <a:rPr lang="en-US" dirty="0"/>
+              <a:t/>
+            </a:r>
+            <a:endParaRPr lang="en-US" dirty="0"/>
+          </a:p>
+        </p:txBody>
+      </p:sp>
+      <p:sp>
+        <p:nvSpPr>
+          <p:cNvPr id="4" name="Slide Number Placeholder 3"/>
+          <p:cNvSpPr>
+            <a:spLocks noGrp="1"/>
+          </p:cNvSpPr>
+          <p:nvPr>
+            <p:ph type="sldNum" sz="quarter" idx="10"/>
+          </p:nvPr>
+        </p:nvSpPr>
+        <p:spPr/>
+        <p:txBody>
+          <a:bodyPr/>
+          <a:lstStyle/>
+          <a:p>
+            <a:fld id="{F7021451-1387-4CA6-816F-3879F97B5CBC}" type="slidenum">
+              <a:rPr lang="en-US"/>
+              <a:t>14</a:t>
+            </a:fld>
+            <a:endParaRPr lang="en-US"/>
+          </a:p>
+        </p:txBody>
+      </p:sp>
+    </p:spTree>
+    <p:extLst>
+      <p:ext uri="{BB962C8B-B14F-4D97-AF65-F5344CB8AC3E}">
+        <p14:creationId xmlns:p14="http://schemas.microsoft.com/office/powerpoint/2010/main" val="1024086991"/>
+      </p:ext>
+    </p:extLst>
+  </p:cSld>
+  <p:clrMapOvr>
+    <a:masterClrMapping/>
+  </p:clrMapOvr>
+</p:notes>
+</file>
+
+<file path=ppt/notesSlides/notesSlide15.xml><?xml version="1.0" encoding="utf-8"?>
+<p:notes xmlns:a="http://schemas.openxmlformats.org/drawingml/2006/main" xmlns:r="http://schemas.openxmlformats.org/officeDocument/2006/relationships" xmlns:p="http://schemas.openxmlformats.org/presentationml/2006/main">
+  <p:cSld>
+    <p:spTree>
+      <p:nvGrpSpPr>
+        <p:cNvPr id="1" name=""/>
+        <p:cNvGrpSpPr/>
+        <p:nvPr/>
+      </p:nvGrpSpPr>
+      <p:grpSpPr>
+        <a:xfrm>
+          <a:off x="0" y="0"/>
+          <a:ext cx="0" cy="0"/>
+          <a:chOff x="0" y="0"/>
+          <a:chExt cx="0" cy="0"/>
+        </a:xfrm>
+      </p:grpSpPr>
+      <p:sp>
+        <p:nvSpPr>
+          <p:cNvPr id="2" name="Slide Image Placeholder 1"/>
+          <p:cNvSpPr>
+            <a:spLocks noGrp="1" noRot="1" noChangeAspect="1"/>
+          </p:cNvSpPr>
+          <p:nvPr>
+            <p:ph type="sldImg"/>
+          </p:nvPr>
+        </p:nvSpPr>
+        <p:spPr/>
+      </p:sp>
+      <p:sp>
+        <p:nvSpPr>
+          <p:cNvPr id="3" name="Notes Placeholder 2"/>
+          <p:cNvSpPr>
+            <a:spLocks noGrp="1"/>
+          </p:cNvSpPr>
+          <p:nvPr>
+            <p:ph type="body" idx="1"/>
+          </p:nvPr>
+        </p:nvSpPr>
+        <p:spPr/>
+        <p:txBody>
+          <a:bodyPr/>
+          <a:lstStyle/>
+          <a:p>
+            <a:r>
+              <a:rPr lang="en-US" dirty="0"/>
+              <a:t/>
+            </a:r>
+            <a:endParaRPr lang="en-US" dirty="0"/>
+          </a:p>
+        </p:txBody>
+      </p:sp>
+      <p:sp>
+        <p:nvSpPr>
+          <p:cNvPr id="4" name="Slide Number Placeholder 3"/>
+          <p:cNvSpPr>
+            <a:spLocks noGrp="1"/>
+          </p:cNvSpPr>
+          <p:nvPr>
+            <p:ph type="sldNum" sz="quarter" idx="10"/>
+          </p:nvPr>
+        </p:nvSpPr>
+        <p:spPr/>
+        <p:txBody>
+          <a:bodyPr/>
+          <a:lstStyle/>
+          <a:p>
+            <a:fld id="{F7021451-1387-4CA6-816F-3879F97B5CBC}" type="slidenum">
+              <a:rPr lang="en-US"/>
+              <a:t>15</a:t>
+            </a:fld>
+            <a:endParaRPr lang="en-US"/>
+          </a:p>
+        </p:txBody>
+      </p:sp>
+    </p:spTree>
+    <p:extLst>
+      <p:ext uri="{BB962C8B-B14F-4D97-AF65-F5344CB8AC3E}">
+        <p14:creationId xmlns:p14="http://schemas.microsoft.com/office/powerpoint/2010/main" val="1024086991"/>
+      </p:ext>
+    </p:extLst>
+  </p:cSld>
+  <p:clrMapOvr>
+    <a:masterClrMapping/>
+  </p:clrMapOvr>
+</p:notes>
+</file>
+
+<file path=ppt/notesSlides/notesSlide16.xml><?xml version="1.0" encoding="utf-8"?>
+<p:notes xmlns:a="http://schemas.openxmlformats.org/drawingml/2006/main" xmlns:r="http://schemas.openxmlformats.org/officeDocument/2006/relationships" xmlns:p="http://schemas.openxmlformats.org/presentationml/2006/main">
+  <p:cSld>
+    <p:spTree>
+      <p:nvGrpSpPr>
+        <p:cNvPr id="1" name=""/>
+        <p:cNvGrpSpPr/>
+        <p:nvPr/>
+      </p:nvGrpSpPr>
+      <p:grpSpPr>
+        <a:xfrm>
+          <a:off x="0" y="0"/>
+          <a:ext cx="0" cy="0"/>
+          <a:chOff x="0" y="0"/>
+          <a:chExt cx="0" cy="0"/>
+        </a:xfrm>
+      </p:grpSpPr>
+      <p:sp>
+        <p:nvSpPr>
+          <p:cNvPr id="2" name="Slide Image Placeholder 1"/>
+          <p:cNvSpPr>
+            <a:spLocks noGrp="1" noRot="1" noChangeAspect="1"/>
+          </p:cNvSpPr>
+          <p:nvPr>
+            <p:ph type="sldImg"/>
+          </p:nvPr>
+        </p:nvSpPr>
+        <p:spPr/>
+      </p:sp>
+      <p:sp>
+        <p:nvSpPr>
+          <p:cNvPr id="3" name="Notes Placeholder 2"/>
+          <p:cNvSpPr>
+            <a:spLocks noGrp="1"/>
+          </p:cNvSpPr>
+          <p:nvPr>
+            <p:ph type="body" idx="1"/>
+          </p:nvPr>
+        </p:nvSpPr>
+        <p:spPr/>
+        <p:txBody>
+          <a:bodyPr/>
+          <a:lstStyle/>
+          <a:p>
+            <a:r>
+              <a:rPr lang="en-US" dirty="0"/>
+              <a:t/>
+            </a:r>
+            <a:endParaRPr lang="en-US" dirty="0"/>
+          </a:p>
+        </p:txBody>
+      </p:sp>
+      <p:sp>
+        <p:nvSpPr>
+          <p:cNvPr id="4" name="Slide Number Placeholder 3"/>
+          <p:cNvSpPr>
+            <a:spLocks noGrp="1"/>
+          </p:cNvSpPr>
+          <p:nvPr>
+            <p:ph type="sldNum" sz="quarter" idx="10"/>
+          </p:nvPr>
+        </p:nvSpPr>
+        <p:spPr/>
+        <p:txBody>
+          <a:bodyPr/>
+          <a:lstStyle/>
+          <a:p>
+            <a:fld id="{F7021451-1387-4CA6-816F-3879F97B5CBC}" type="slidenum">
+              <a:rPr lang="en-US"/>
+              <a:t>16</a:t>
+            </a:fld>
+            <a:endParaRPr lang="en-US"/>
+          </a:p>
+        </p:txBody>
+      </p:sp>
+    </p:spTree>
+    <p:extLst>
+      <p:ext uri="{BB962C8B-B14F-4D97-AF65-F5344CB8AC3E}">
+        <p14:creationId xmlns:p14="http://schemas.microsoft.com/office/powerpoint/2010/main" val="1024086991"/>
+      </p:ext>
+    </p:extLst>
+  </p:cSld>
+  <p:clrMapOvr>
+    <a:masterClrMapping/>
+  </p:clrMapOvr>
+</p:notes>
+</file>
+
+<file path=ppt/notesSlides/notesSlide17.xml><?xml version="1.0" encoding="utf-8"?>
+<p:notes xmlns:a="http://schemas.openxmlformats.org/drawingml/2006/main" xmlns:r="http://schemas.openxmlformats.org/officeDocument/2006/relationships" xmlns:p="http://schemas.openxmlformats.org/presentationml/2006/main">
+  <p:cSld>
+    <p:spTree>
+      <p:nvGrpSpPr>
+        <p:cNvPr id="1" name=""/>
+        <p:cNvGrpSpPr/>
+        <p:nvPr/>
+      </p:nvGrpSpPr>
+      <p:grpSpPr>
+        <a:xfrm>
+          <a:off x="0" y="0"/>
+          <a:ext cx="0" cy="0"/>
+          <a:chOff x="0" y="0"/>
+          <a:chExt cx="0" cy="0"/>
+        </a:xfrm>
+      </p:grpSpPr>
+      <p:sp>
+        <p:nvSpPr>
+          <p:cNvPr id="2" name="Slide Image Placeholder 1"/>
+          <p:cNvSpPr>
+            <a:spLocks noGrp="1" noRot="1" noChangeAspect="1"/>
+          </p:cNvSpPr>
+          <p:nvPr>
+            <p:ph type="sldImg"/>
+          </p:nvPr>
+        </p:nvSpPr>
+        <p:spPr/>
+      </p:sp>
+      <p:sp>
+        <p:nvSpPr>
+          <p:cNvPr id="3" name="Notes Placeholder 2"/>
+          <p:cNvSpPr>
+            <a:spLocks noGrp="1"/>
+          </p:cNvSpPr>
+          <p:nvPr>
+            <p:ph type="body" idx="1"/>
+          </p:nvPr>
+        </p:nvSpPr>
+        <p:spPr/>
+        <p:txBody>
+          <a:bodyPr/>
+          <a:lstStyle/>
+          <a:p>
+            <a:r>
+              <a:rPr lang="en-US" dirty="0"/>
+              <a:t/>
+            </a:r>
+            <a:endParaRPr lang="en-US" dirty="0"/>
+          </a:p>
+        </p:txBody>
+      </p:sp>
+      <p:sp>
+        <p:nvSpPr>
+          <p:cNvPr id="4" name="Slide Number Placeholder 3"/>
+          <p:cNvSpPr>
+            <a:spLocks noGrp="1"/>
+          </p:cNvSpPr>
+          <p:nvPr>
+            <p:ph type="sldNum" sz="quarter" idx="10"/>
+          </p:nvPr>
+        </p:nvSpPr>
+        <p:spPr/>
+        <p:txBody>
+          <a:bodyPr/>
+          <a:lstStyle/>
+          <a:p>
+            <a:fld id="{F7021451-1387-4CA6-816F-3879F97B5CBC}" type="slidenum">
+              <a:rPr lang="en-US"/>
+              <a:t>17</a:t>
+            </a:fld>
+            <a:endParaRPr lang="en-US"/>
+          </a:p>
+        </p:txBody>
+      </p:sp>
+    </p:spTree>
+    <p:extLst>
+      <p:ext uri="{BB962C8B-B14F-4D97-AF65-F5344CB8AC3E}">
+        <p14:creationId xmlns:p14="http://schemas.microsoft.com/office/powerpoint/2010/main" val="1024086991"/>
+      </p:ext>
+    </p:extLst>
+  </p:cSld>
+  <p:clrMapOvr>
+    <a:masterClrMapping/>
+  </p:clrMapOvr>
+</p:notes>
+</file>
+
+<file path=ppt/notesSlides/notesSlide18.xml><?xml version="1.0" encoding="utf-8"?>
+<p:notes xmlns:a="http://schemas.openxmlformats.org/drawingml/2006/main" xmlns:r="http://schemas.openxmlformats.org/officeDocument/2006/relationships" xmlns:p="http://schemas.openxmlformats.org/presentationml/2006/main">
+  <p:cSld>
+    <p:spTree>
+      <p:nvGrpSpPr>
+        <p:cNvPr id="1" name=""/>
+        <p:cNvGrpSpPr/>
+        <p:nvPr/>
+      </p:nvGrpSpPr>
+      <p:grpSpPr>
+        <a:xfrm>
+          <a:off x="0" y="0"/>
+          <a:ext cx="0" cy="0"/>
+          <a:chOff x="0" y="0"/>
+          <a:chExt cx="0" cy="0"/>
+        </a:xfrm>
+      </p:grpSpPr>
+      <p:sp>
+        <p:nvSpPr>
+          <p:cNvPr id="2" name="Slide Image Placeholder 1"/>
+          <p:cNvSpPr>
+            <a:spLocks noGrp="1" noRot="1" noChangeAspect="1"/>
+          </p:cNvSpPr>
+          <p:nvPr>
+            <p:ph type="sldImg"/>
+          </p:nvPr>
+        </p:nvSpPr>
+        <p:spPr/>
+      </p:sp>
+      <p:sp>
+        <p:nvSpPr>
+          <p:cNvPr id="3" name="Notes Placeholder 2"/>
+          <p:cNvSpPr>
+            <a:spLocks noGrp="1"/>
+          </p:cNvSpPr>
+          <p:nvPr>
+            <p:ph type="body" idx="1"/>
+          </p:nvPr>
+        </p:nvSpPr>
+        <p:spPr/>
+        <p:txBody>
+          <a:bodyPr/>
+          <a:lstStyle/>
+          <a:p>
+            <a:r>
+              <a:rPr lang="en-US" dirty="0"/>
+              <a:t/>
+            </a:r>
+            <a:endParaRPr lang="en-US" dirty="0"/>
+          </a:p>
+        </p:txBody>
+      </p:sp>
+      <p:sp>
+        <p:nvSpPr>
+          <p:cNvPr id="4" name="Slide Number Placeholder 3"/>
+          <p:cNvSpPr>
+            <a:spLocks noGrp="1"/>
+          </p:cNvSpPr>
+          <p:nvPr>
+            <p:ph type="sldNum" sz="quarter" idx="10"/>
+          </p:nvPr>
+        </p:nvSpPr>
+        <p:spPr/>
+        <p:txBody>
+          <a:bodyPr/>
+          <a:lstStyle/>
+          <a:p>
+            <a:fld id="{F7021451-1387-4CA6-816F-3879F97B5CBC}" type="slidenum">
+              <a:rPr lang="en-US"/>
+              <a:t>18</a:t>
+            </a:fld>
+            <a:endParaRPr lang="en-US"/>
+          </a:p>
+        </p:txBody>
+      </p:sp>
+    </p:spTree>
+    <p:extLst>
+      <p:ext uri="{BB962C8B-B14F-4D97-AF65-F5344CB8AC3E}">
+        <p14:creationId xmlns:p14="http://schemas.microsoft.com/office/powerpoint/2010/main" val="1024086991"/>
+      </p:ext>
+    </p:extLst>
+  </p:cSld>
+  <p:clrMapOvr>
+    <a:masterClrMapping/>
+  </p:clrMapOvr>
+</p:notes>
+</file>
+
+<file path=ppt/notesSlides/notesSlide19.xml><?xml version="1.0" encoding="utf-8"?>
+<p:notes xmlns:a="http://schemas.openxmlformats.org/drawingml/2006/main" xmlns:r="http://schemas.openxmlformats.org/officeDocument/2006/relationships" xmlns:p="http://schemas.openxmlformats.org/presentationml/2006/main">
+  <p:cSld>
+    <p:spTree>
+      <p:nvGrpSpPr>
+        <p:cNvPr id="1" name=""/>
+        <p:cNvGrpSpPr/>
+        <p:nvPr/>
+      </p:nvGrpSpPr>
+      <p:grpSpPr>
+        <a:xfrm>
+          <a:off x="0" y="0"/>
+          <a:ext cx="0" cy="0"/>
+          <a:chOff x="0" y="0"/>
+          <a:chExt cx="0" cy="0"/>
+        </a:xfrm>
+      </p:grpSpPr>
+      <p:sp>
+        <p:nvSpPr>
+          <p:cNvPr id="2" name="Slide Image Placeholder 1"/>
+          <p:cNvSpPr>
+            <a:spLocks noGrp="1" noRot="1" noChangeAspect="1"/>
+          </p:cNvSpPr>
+          <p:nvPr>
+            <p:ph type="sldImg"/>
+          </p:nvPr>
+        </p:nvSpPr>
+        <p:spPr/>
+      </p:sp>
+      <p:sp>
+        <p:nvSpPr>
+          <p:cNvPr id="3" name="Notes Placeholder 2"/>
+          <p:cNvSpPr>
+            <a:spLocks noGrp="1"/>
+          </p:cNvSpPr>
+          <p:nvPr>
+            <p:ph type="body" idx="1"/>
+          </p:nvPr>
+        </p:nvSpPr>
+        <p:spPr/>
+        <p:txBody>
+          <a:bodyPr/>
+          <a:lstStyle/>
+          <a:p>
+            <a:r>
+              <a:rPr lang="en-US" dirty="0"/>
+              <a:t/>
+            </a:r>
+            <a:endParaRPr lang="en-US" dirty="0"/>
+          </a:p>
+        </p:txBody>
+      </p:sp>
+      <p:sp>
+        <p:nvSpPr>
+          <p:cNvPr id="4" name="Slide Number Placeholder 3"/>
+          <p:cNvSpPr>
+            <a:spLocks noGrp="1"/>
+          </p:cNvSpPr>
+          <p:nvPr>
+            <p:ph type="sldNum" sz="quarter" idx="10"/>
+          </p:nvPr>
+        </p:nvSpPr>
+        <p:spPr/>
+        <p:txBody>
+          <a:bodyPr/>
+          <a:lstStyle/>
+          <a:p>
+            <a:fld id="{F7021451-1387-4CA6-816F-3879F97B5CBC}" type="slidenum">
+              <a:rPr lang="en-US"/>
+              <a:t>19</a:t>
+            </a:fld>
+            <a:endParaRPr lang="en-US"/>
+          </a:p>
+        </p:txBody>
+      </p:sp>
+    </p:spTree>
+    <p:extLst>
+      <p:ext uri="{BB962C8B-B14F-4D97-AF65-F5344CB8AC3E}">
+        <p14:creationId xmlns:p14="http://schemas.microsoft.com/office/powerpoint/2010/main" val="1024086991"/>
+      </p:ext>
+    </p:extLst>
+  </p:cSld>
+  <p:clrMapOvr>
+    <a:masterClrMapping/>
+  </p:clrMapOvr>
+</p:notes>
+</file>
+
 <file path=ppt/notesSlides/notesSlide2.xml><?xml version="1.0" encoding="utf-8"?>
 <p:notes xmlns:a="http://schemas.openxmlformats.org/drawingml/2006/main" xmlns:r="http://schemas.openxmlformats.org/officeDocument/2006/relationships" xmlns:p="http://schemas.openxmlformats.org/presentationml/2006/main">
   <p:cSld>
@@ -800,6 +1513,94 @@
             <a:fld id="{F7021451-1387-4CA6-816F-3879F97B5CBC}" type="slidenum">
               <a:rPr lang="en-US"/>
               <a:t>2</a:t>
+            </a:fld>
+            <a:endParaRPr lang="en-US"/>
+          </a:p>
+        </p:txBody>
+      </p:sp>
+    </p:spTree>
+    <p:extLst>
+      <p:ext uri="{BB962C8B-B14F-4D97-AF65-F5344CB8AC3E}">
+        <p14:creationId xmlns:p14="http://schemas.microsoft.com/office/powerpoint/2010/main" val="1024086991"/>
+      </p:ext>
+    </p:extLst>
+  </p:cSld>
+  <p:clrMapOvr>
+    <a:masterClrMapping/>
+  </p:clrMapOvr>
+</p:notes>
+</file>
+
+<file path=ppt/notesSlides/notesSlide20.xml><?xml version="1.0" encoding="utf-8"?>
+<p:notes xmlns:a="http://schemas.openxmlformats.org/drawingml/2006/main" xmlns:r="http://schemas.openxmlformats.org/officeDocument/2006/relationships" xmlns:p="http://schemas.openxmlformats.org/presentationml/2006/main">
+  <p:cSld>
+    <p:spTree>
+      <p:nvGrpSpPr>
+        <p:cNvPr id="1" name=""/>
+        <p:cNvGrpSpPr/>
+        <p:nvPr/>
+      </p:nvGrpSpPr>
+      <p:grpSpPr>
+        <a:xfrm>
+          <a:off x="0" y="0"/>
+          <a:ext cx="0" cy="0"/>
+          <a:chOff x="0" y="0"/>
+          <a:chExt cx="0" cy="0"/>
+        </a:xfrm>
+      </p:grpSpPr>
+      <p:sp>
+        <p:nvSpPr>
+          <p:cNvPr id="2" name="Slide Image Placeholder 1"/>
+          <p:cNvSpPr>
+            <a:spLocks noGrp="1" noRot="1" noChangeAspect="1"/>
+          </p:cNvSpPr>
+          <p:nvPr>
+            <p:ph type="sldImg"/>
+          </p:nvPr>
+        </p:nvSpPr>
+        <p:spPr/>
+      </p:sp>
+      <p:sp>
+        <p:nvSpPr>
+          <p:cNvPr id="3" name="Notes Placeholder 2"/>
+          <p:cNvSpPr>
+            <a:spLocks noGrp="1"/>
+          </p:cNvSpPr>
+          <p:nvPr>
+            <p:ph type="body" idx="1"/>
+          </p:nvPr>
+        </p:nvSpPr>
+        <p:spPr/>
+        <p:txBody>
+          <a:bodyPr/>
+          <a:lstStyle/>
+          <a:p>
+            <a:r>
+              <a:rPr lang="en-US" dirty="0"/>
+              <a:t/>
+            </a:r>
+            <a:endParaRPr lang="en-US" dirty="0"/>
+          </a:p>
+        </p:txBody>
+      </p:sp>
+      <p:sp>
+        <p:nvSpPr>
+          <p:cNvPr id="4" name="Slide Number Placeholder 3"/>
+          <p:cNvSpPr>
+            <a:spLocks noGrp="1"/>
+          </p:cNvSpPr>
+          <p:nvPr>
+            <p:ph type="sldNum" sz="quarter" idx="10"/>
+          </p:nvPr>
+        </p:nvSpPr>
+        <p:spPr/>
+        <p:txBody>
+          <a:bodyPr/>
+          <a:lstStyle/>
+          <a:p>
+            <a:fld id="{F7021451-1387-4CA6-816F-3879F97B5CBC}" type="slidenum">
+              <a:rPr lang="en-US"/>
+              <a:t>20</a:t>
             </a:fld>
             <a:endParaRPr lang="en-US"/>
           </a:p>
@@ -2051,286 +2852,6 @@
         </p:nvSpPr>
         <p:spPr>
           <a:xfrm>
-            <a:off x="406301" y="1223963"/>
-            <a:ext cx="8498026" cy="274290"/>
-          </a:xfrm>
-          <a:prstGeom prst="rect">
-            <a:avLst/>
-          </a:prstGeom>
-          <a:noFill/>
-          <a:ln/>
-        </p:spPr>
-        <p:txBody>
-          <a:bodyPr wrap="square" lIns="0" tIns="0" rIns="0" bIns="0" rtlCol="0" anchor="t"/>
-          <a:lstStyle/>
-          <a:p>
-            <a:pPr algn="l" indent="0" marL="0">
-              <a:lnSpc>
-                <a:spcPts val="2160"/>
-              </a:lnSpc>
-              <a:spcBef>
-                <a:spcPts val="600"/>
-              </a:spcBef>
-              <a:spcAft>
-                <a:spcPts val="800"/>
-              </a:spcAft>
-              <a:buNone/>
-            </a:pPr>
-            <a:r>
-              <a:rPr lang="en-US" sz="1800" b="1" dirty="0">
-                <a:solidFill>
-                  <a:srgbClr val="FE4447"/>
-                </a:solidFill>
-                <a:latin typeface="Georgia" pitchFamily="34" charset="0"/>
-                <a:ea typeface="Georgia" pitchFamily="34" charset="-122"/>
-                <a:cs typeface="Georgia" pitchFamily="34" charset="-120"/>
-              </a:rPr>
-              <a:t>Learning objective</a:t>
-            </a:r>
-            <a:endParaRPr lang="en-US" sz="1800" dirty="0"/>
-          </a:p>
-        </p:txBody>
-      </p:sp>
-      <p:sp>
-        <p:nvSpPr>
-          <p:cNvPr id="6" name="Text 4"/>
-          <p:cNvSpPr/>
-          <p:nvPr/>
-        </p:nvSpPr>
-        <p:spPr>
-          <a:xfrm>
-            <a:off x="406301" y="1637854"/>
-            <a:ext cx="8498026" cy="639812"/>
-          </a:xfrm>
-          <a:prstGeom prst="rect">
-            <a:avLst/>
-          </a:prstGeom>
-          <a:noFill/>
-          <a:ln/>
-        </p:spPr>
-        <p:txBody>
-          <a:bodyPr wrap="square" lIns="0" tIns="0" rIns="0" bIns="0" rtlCol="0" anchor="t"/>
-          <a:lstStyle/>
-          <a:p>
-            <a:pPr algn="l" indent="0" marL="0">
-              <a:lnSpc>
-                <a:spcPts val="1680"/>
-              </a:lnSpc>
-              <a:spcBef>
-                <a:spcPts val="300"/>
-              </a:spcBef>
-              <a:spcAft>
-                <a:spcPts val="300"/>
-              </a:spcAft>
-              <a:buNone/>
-            </a:pPr>
-            <a:r>
-              <a:rPr lang="en-US" sz="1200" dirty="0">
-                <a:solidFill>
-                  <a:srgbClr val="1C2833"/>
-                </a:solidFill>
-                <a:latin typeface="Arial" pitchFamily="34" charset="0"/>
-                <a:ea typeface="Arial" pitchFamily="34" charset="-122"/>
-                <a:cs typeface="Arial" pitchFamily="34" charset="-120"/>
-              </a:rPr>
-              <a:t>By the end of this lesson, students can identify </a:t>
-            </a:r>
-            <a:pPr algn="l" indent="0" marL="0">
-              <a:lnSpc>
-                <a:spcPts val="1680"/>
-              </a:lnSpc>
-              <a:spcBef>
-                <a:spcPts val="300"/>
-              </a:spcBef>
-              <a:spcAft>
-                <a:spcPts val="300"/>
-              </a:spcAft>
-              <a:buNone/>
-            </a:pPr>
-            <a:r>
-              <a:rPr lang="en-US" sz="1200" i="1" dirty="0">
-                <a:solidFill>
-                  <a:srgbClr val="1C2833"/>
-                </a:solidFill>
-                <a:latin typeface="Arial" pitchFamily="34" charset="0"/>
-                <a:ea typeface="Arial" pitchFamily="34" charset="-122"/>
-                <a:cs typeface="Arial" pitchFamily="34" charset="-120"/>
-              </a:rPr>
-              <a:t>pudīnā</a:t>
-            </a:r>
-            <a:pPr algn="l" indent="0" marL="0">
-              <a:lnSpc>
-                <a:spcPts val="1680"/>
-              </a:lnSpc>
-              <a:spcBef>
-                <a:spcPts val="300"/>
-              </a:spcBef>
-              <a:spcAft>
-                <a:spcPts val="300"/>
-              </a:spcAft>
-              <a:buNone/>
-            </a:pPr>
-            <a:r>
-              <a:rPr lang="en-US" sz="1200" dirty="0">
-                <a:solidFill>
-                  <a:srgbClr val="1C2833"/>
-                </a:solidFill>
-                <a:latin typeface="Arial" pitchFamily="34" charset="0"/>
-                <a:ea typeface="Arial" pitchFamily="34" charset="-122"/>
-                <a:cs typeface="Arial" pitchFamily="34" charset="-120"/>
-              </a:rPr>
-              <a:t> (</a:t>
-            </a:r>
-            <a:pPr algn="l" indent="0" marL="0">
-              <a:lnSpc>
-                <a:spcPts val="1680"/>
-              </a:lnSpc>
-              <a:spcBef>
-                <a:spcPts val="300"/>
-              </a:spcBef>
-              <a:spcAft>
-                <a:spcPts val="300"/>
-              </a:spcAft>
-              <a:buNone/>
-            </a:pPr>
-            <a:r>
-              <a:rPr lang="en-US" sz="1200" i="1" dirty="0">
-                <a:solidFill>
-                  <a:srgbClr val="1C2833"/>
-                </a:solidFill>
-                <a:latin typeface="Arial" pitchFamily="34" charset="0"/>
-                <a:ea typeface="Arial" pitchFamily="34" charset="-122"/>
-                <a:cs typeface="Arial" pitchFamily="34" charset="-120"/>
-              </a:rPr>
-              <a:t>Mentha</a:t>
-            </a:r>
-            <a:pPr algn="l" indent="0" marL="0">
-              <a:lnSpc>
-                <a:spcPts val="1680"/>
-              </a:lnSpc>
-              <a:spcBef>
-                <a:spcPts val="300"/>
-              </a:spcBef>
-              <a:spcAft>
-                <a:spcPts val="300"/>
-              </a:spcAft>
-              <a:buNone/>
-            </a:pPr>
-            <a:r>
-              <a:rPr lang="en-US" sz="1200" dirty="0">
-                <a:solidFill>
-                  <a:srgbClr val="1C2833"/>
-                </a:solidFill>
-                <a:latin typeface="Arial" pitchFamily="34" charset="0"/>
-                <a:ea typeface="Arial" pitchFamily="34" charset="-122"/>
-                <a:cs typeface="Arial" pitchFamily="34" charset="-120"/>
-              </a:rPr>
-              <a:t> species) by leaf shape and the characteristic cooling smell, name </a:t>
-            </a:r>
-            <a:pPr algn="l" indent="0" marL="0">
-              <a:lnSpc>
-                <a:spcPts val="1680"/>
-              </a:lnSpc>
-              <a:spcBef>
-                <a:spcPts val="300"/>
-              </a:spcBef>
-              <a:spcAft>
-                <a:spcPts val="300"/>
-              </a:spcAft>
-              <a:buNone/>
-            </a:pPr>
-            <a:r>
-              <a:rPr lang="en-US" sz="1200" b="1" dirty="0">
-                <a:solidFill>
-                  <a:srgbClr val="1C2833"/>
-                </a:solidFill>
-                <a:latin typeface="Arial" pitchFamily="34" charset="0"/>
-                <a:ea typeface="Arial" pitchFamily="34" charset="-122"/>
-                <a:cs typeface="Arial" pitchFamily="34" charset="-120"/>
-              </a:rPr>
-              <a:t>menthol</a:t>
-            </a:r>
-            <a:pPr algn="l" indent="0" marL="0">
-              <a:lnSpc>
-                <a:spcPts val="1680"/>
-              </a:lnSpc>
-              <a:spcBef>
-                <a:spcPts val="300"/>
-              </a:spcBef>
-              <a:spcAft>
-                <a:spcPts val="300"/>
-              </a:spcAft>
-              <a:buNone/>
-            </a:pPr>
-            <a:r>
-              <a:rPr lang="en-US" sz="1200" dirty="0">
-                <a:solidFill>
-                  <a:srgbClr val="1C2833"/>
-                </a:solidFill>
-                <a:latin typeface="Arial" pitchFamily="34" charset="0"/>
-                <a:ea typeface="Arial" pitchFamily="34" charset="-122"/>
-                <a:cs typeface="Arial" pitchFamily="34" charset="-120"/>
-              </a:rPr>
-              <a:t> as the principal volatile, distinguish two common varieties (spearmint vs peppermint), and explain that mint is classified as </a:t>
-            </a:r>
-            <a:pPr algn="l" indent="0" marL="0">
-              <a:lnSpc>
-                <a:spcPts val="1680"/>
-              </a:lnSpc>
-              <a:spcBef>
-                <a:spcPts val="300"/>
-              </a:spcBef>
-              <a:spcAft>
-                <a:spcPts val="300"/>
-              </a:spcAft>
-              <a:buNone/>
-            </a:pPr>
-            <a:r>
-              <a:rPr lang="en-US" sz="1200" i="1" dirty="0">
-                <a:solidFill>
-                  <a:srgbClr val="1C2833"/>
-                </a:solidFill>
-                <a:latin typeface="Arial" pitchFamily="34" charset="0"/>
-                <a:ea typeface="Arial" pitchFamily="34" charset="-122"/>
-                <a:cs typeface="Arial" pitchFamily="34" charset="-120"/>
-              </a:rPr>
-              <a:t>śīta</a:t>
-            </a:r>
-            <a:pPr algn="l" indent="0" marL="0">
-              <a:lnSpc>
-                <a:spcPts val="1680"/>
-              </a:lnSpc>
-              <a:spcBef>
-                <a:spcPts val="300"/>
-              </a:spcBef>
-              <a:spcAft>
-                <a:spcPts val="300"/>
-              </a:spcAft>
-              <a:buNone/>
-            </a:pPr>
-            <a:r>
-              <a:rPr lang="en-US" sz="1200" dirty="0">
-                <a:solidFill>
-                  <a:srgbClr val="1C2833"/>
-                </a:solidFill>
-                <a:latin typeface="Arial" pitchFamily="34" charset="0"/>
-                <a:ea typeface="Arial" pitchFamily="34" charset="-122"/>
-                <a:cs typeface="Arial" pitchFamily="34" charset="-120"/>
-              </a:rPr>
-              <a:t> (cooling) in Ayurveda — a classification that aligns with its measurable physiological effect.</a:t>
-            </a:r>
-            <a:endParaRPr lang="en-US" sz="1200" dirty="0"/>
-          </a:p>
-        </p:txBody>
-      </p:sp>
-      <p:sp>
-        <p:nvSpPr>
-          <p:cNvPr id="7" name="Text 5"/>
-          <p:cNvSpPr/>
-          <p:nvPr/>
-        </p:nvSpPr>
-        <p:spPr>
-          <a:xfrm>
             <a:off x="406301" y="4434929"/>
             <a:ext cx="8498026" cy="213271"/>
           </a:xfrm>
@@ -2475,7 +2996,7 @@
                 <a:ea typeface="Georgia" pitchFamily="34" charset="-122"/>
                 <a:cs typeface="Georgia" pitchFamily="34" charset="-120"/>
               </a:rPr>
-              <a:t>Teacher notes</a:t>
+              <a:t>Core (20 min) (cont.)</a:t>
             </a:r>
             <a:endParaRPr lang="en-US" sz="1800" dirty="0"/>
           </a:p>
@@ -2490,7 +3011,7 @@
         <p:spPr>
           <a:xfrm>
             <a:off x="406301" y="870942"/>
-            <a:ext cx="8498026" cy="1066354"/>
+            <a:ext cx="8498026" cy="426541"/>
           </a:xfrm>
           <a:prstGeom prst="rect">
             <a:avLst/>
@@ -2523,7 +3044,7 @@
                 <a:ea typeface="Arial" pitchFamily="34" charset="-122"/>
                 <a:cs typeface="Arial" pitchFamily="34" charset="-120"/>
               </a:rPr>
-              <a:t>– The </a:t>
+              <a:t>This is one of the cleanest connections between </a:t>
             </a:r>
             <a:pPr algn="l" indent="0" marL="0">
               <a:lnSpc>
@@ -2546,7 +3067,7 @@
                 <a:ea typeface="Arial" pitchFamily="34" charset="-122"/>
                 <a:cs typeface="Arial" pitchFamily="34" charset="-120"/>
               </a:rPr>
-              <a:t>TRPM8 mechanism</a:t>
+              <a:t>traditional classification</a:t>
             </a:r>
             <a:pPr algn="l" indent="0" marL="0">
               <a:lnSpc>
@@ -2569,7 +3090,191 @@
                 <a:ea typeface="Arial" pitchFamily="34" charset="-122"/>
                 <a:cs typeface="Arial" pitchFamily="34" charset="-120"/>
               </a:rPr>
-              <a:t> is the single most rewarding teaching moment of this module for a science-leaning student. The bridge from "cooling herb" (tradition) to "TRPM8 activation" (Nobel-winning science) is satisfying and intellectually honest. – If anyone in your class connects "menthol cooling = chilli burning = same kind of receptor trick," that's the inferential leap to highlight publicly. Praise it. – A few students may bring up vapour rubs / chest balms used in childhood. Acknowledge the use; note the infant caution; don't sermonise.</a:t>
+              <a:t> (</a:t>
+            </a:r>
+            <a:pPr algn="l" indent="0" marL="0">
+              <a:lnSpc>
+                <a:spcPts val="1680"/>
+              </a:lnSpc>
+              <a:spcBef>
+                <a:spcPts val="300"/>
+              </a:spcBef>
+              <a:spcAft>
+                <a:spcPts val="300"/>
+              </a:spcAft>
+              <a:buNone/>
+            </a:pPr>
+            <a:r>
+              <a:rPr lang="en-US" sz="1200" i="1" dirty="0">
+                <a:solidFill>
+                  <a:srgbClr val="1C2833"/>
+                </a:solidFill>
+                <a:latin typeface="Arial" pitchFamily="34" charset="0"/>
+                <a:ea typeface="Arial" pitchFamily="34" charset="-122"/>
+                <a:cs typeface="Arial" pitchFamily="34" charset="-120"/>
+              </a:rPr>
+              <a:t>śīta</a:t>
+            </a:r>
+            <a:pPr algn="l" indent="0" marL="0">
+              <a:lnSpc>
+                <a:spcPts val="1680"/>
+              </a:lnSpc>
+              <a:spcBef>
+                <a:spcPts val="300"/>
+              </a:spcBef>
+              <a:spcAft>
+                <a:spcPts val="300"/>
+              </a:spcAft>
+              <a:buNone/>
+            </a:pPr>
+            <a:r>
+              <a:rPr lang="en-US" sz="1200" dirty="0">
+                <a:solidFill>
+                  <a:srgbClr val="1C2833"/>
+                </a:solidFill>
+                <a:latin typeface="Arial" pitchFamily="34" charset="0"/>
+                <a:ea typeface="Arial" pitchFamily="34" charset="-122"/>
+                <a:cs typeface="Arial" pitchFamily="34" charset="-120"/>
+              </a:rPr>
+              <a:t> — cooling) and </a:t>
+            </a:r>
+            <a:pPr algn="l" indent="0" marL="0">
+              <a:lnSpc>
+                <a:spcPts val="1680"/>
+              </a:lnSpc>
+              <a:spcBef>
+                <a:spcPts val="300"/>
+              </a:spcBef>
+              <a:spcAft>
+                <a:spcPts val="300"/>
+              </a:spcAft>
+              <a:buNone/>
+            </a:pPr>
+            <a:r>
+              <a:rPr lang="en-US" sz="1200" b="1" dirty="0">
+                <a:solidFill>
+                  <a:srgbClr val="1C2833"/>
+                </a:solidFill>
+                <a:latin typeface="Arial" pitchFamily="34" charset="0"/>
+                <a:ea typeface="Arial" pitchFamily="34" charset="-122"/>
+                <a:cs typeface="Arial" pitchFamily="34" charset="-120"/>
+              </a:rPr>
+              <a:t>modern molecular pharmacology</a:t>
+            </a:r>
+            <a:pPr algn="l" indent="0" marL="0">
+              <a:lnSpc>
+                <a:spcPts val="1680"/>
+              </a:lnSpc>
+              <a:spcBef>
+                <a:spcPts val="300"/>
+              </a:spcBef>
+              <a:spcAft>
+                <a:spcPts val="300"/>
+              </a:spcAft>
+              <a:buNone/>
+            </a:pPr>
+            <a:r>
+              <a:rPr lang="en-US" sz="1200" dirty="0">
+                <a:solidFill>
+                  <a:srgbClr val="1C2833"/>
+                </a:solidFill>
+                <a:latin typeface="Arial" pitchFamily="34" charset="0"/>
+                <a:ea typeface="Arial" pitchFamily="34" charset="-122"/>
+                <a:cs typeface="Arial" pitchFamily="34" charset="-120"/>
+              </a:rPr>
+              <a:t> (TRPM8 activation). The tradition got the </a:t>
+            </a:r>
+            <a:pPr algn="l" indent="0" marL="0">
+              <a:lnSpc>
+                <a:spcPts val="1680"/>
+              </a:lnSpc>
+              <a:spcBef>
+                <a:spcPts val="300"/>
+              </a:spcBef>
+              <a:spcAft>
+                <a:spcPts val="300"/>
+              </a:spcAft>
+              <a:buNone/>
+            </a:pPr>
+            <a:r>
+              <a:rPr lang="en-US" sz="1200" i="1" dirty="0">
+                <a:solidFill>
+                  <a:srgbClr val="1C2833"/>
+                </a:solidFill>
+                <a:latin typeface="Arial" pitchFamily="34" charset="0"/>
+                <a:ea typeface="Arial" pitchFamily="34" charset="-122"/>
+                <a:cs typeface="Arial" pitchFamily="34" charset="-120"/>
+              </a:rPr>
+              <a:t>effect</a:t>
+            </a:r>
+            <a:pPr algn="l" indent="0" marL="0">
+              <a:lnSpc>
+                <a:spcPts val="1680"/>
+              </a:lnSpc>
+              <a:spcBef>
+                <a:spcPts val="300"/>
+              </a:spcBef>
+              <a:spcAft>
+                <a:spcPts val="300"/>
+              </a:spcAft>
+              <a:buNone/>
+            </a:pPr>
+            <a:r>
+              <a:rPr lang="en-US" sz="1200" dirty="0">
+                <a:solidFill>
+                  <a:srgbClr val="1C2833"/>
+                </a:solidFill>
+                <a:latin typeface="Arial" pitchFamily="34" charset="0"/>
+                <a:ea typeface="Arial" pitchFamily="34" charset="-122"/>
+                <a:cs typeface="Arial" pitchFamily="34" charset="-120"/>
+              </a:rPr>
+              <a:t> right; modern science explained the </a:t>
+            </a:r>
+            <a:pPr algn="l" indent="0" marL="0">
+              <a:lnSpc>
+                <a:spcPts val="1680"/>
+              </a:lnSpc>
+              <a:spcBef>
+                <a:spcPts val="300"/>
+              </a:spcBef>
+              <a:spcAft>
+                <a:spcPts val="300"/>
+              </a:spcAft>
+              <a:buNone/>
+            </a:pPr>
+            <a:r>
+              <a:rPr lang="en-US" sz="1200" i="1" dirty="0">
+                <a:solidFill>
+                  <a:srgbClr val="1C2833"/>
+                </a:solidFill>
+                <a:latin typeface="Arial" pitchFamily="34" charset="0"/>
+                <a:ea typeface="Arial" pitchFamily="34" charset="-122"/>
+                <a:cs typeface="Arial" pitchFamily="34" charset="-120"/>
+              </a:rPr>
+              <a:t>mechanism</a:t>
+            </a:r>
+            <a:pPr algn="l" indent="0" marL="0">
+              <a:lnSpc>
+                <a:spcPts val="1680"/>
+              </a:lnSpc>
+              <a:spcBef>
+                <a:spcPts val="300"/>
+              </a:spcBef>
+              <a:spcAft>
+                <a:spcPts val="300"/>
+              </a:spcAft>
+              <a:buNone/>
+            </a:pPr>
+            <a:r>
+              <a:rPr lang="en-US" sz="1200" dirty="0">
+                <a:solidFill>
+                  <a:srgbClr val="1C2833"/>
+                </a:solidFill>
+                <a:latin typeface="Arial" pitchFamily="34" charset="0"/>
+                <a:ea typeface="Arial" pitchFamily="34" charset="-122"/>
+                <a:cs typeface="Arial" pitchFamily="34" charset="-120"/>
+              </a:rPr>
+              <a:t>.</a:t>
             </a:r>
             <a:endParaRPr lang="en-US" sz="1200" dirty="0"/>
           </a:p>
@@ -2727,7 +3432,7 @@
                 <a:ea typeface="Georgia" pitchFamily="34" charset="-122"/>
                 <a:cs typeface="Georgia" pitchFamily="34" charset="-120"/>
               </a:rPr>
-              <a:t>Citation(s) used in this lesson</a:t>
+              <a:t>Core (20 min) (cont.)</a:t>
             </a:r>
             <a:endParaRPr lang="en-US" sz="1800" dirty="0"/>
           </a:p>
@@ -2741,55 +3446,7 @@
         </p:nvSpPr>
         <p:spPr>
           <a:xfrm>
-            <a:off x="406301" y="870942"/>
-            <a:ext cx="8498026" cy="853083"/>
-          </a:xfrm>
-          <a:prstGeom prst="rect">
-            <a:avLst/>
-          </a:prstGeom>
-          <a:noFill/>
-          <a:ln/>
-        </p:spPr>
-        <p:txBody>
-          <a:bodyPr wrap="square" lIns="0" tIns="0" rIns="0" bIns="0" rtlCol="0" anchor="t"/>
-          <a:lstStyle/>
-          <a:p>
-            <a:pPr algn="l" indent="0" marL="0">
-              <a:lnSpc>
-                <a:spcPts val="1680"/>
-              </a:lnSpc>
-              <a:spcBef>
-                <a:spcPts val="300"/>
-              </a:spcBef>
-              <a:spcAft>
-                <a:spcPts val="300"/>
-              </a:spcAft>
-              <a:buNone/>
-            </a:pPr>
-            <a:r>
-              <a:rPr lang="en-US" sz="1200" dirty="0">
-                <a:solidFill>
-                  <a:srgbClr val="1C2833"/>
-                </a:solidFill>
-                <a:latin typeface="Arial" pitchFamily="34" charset="0"/>
-                <a:ea typeface="Arial" pitchFamily="34" charset="-122"/>
-                <a:cs typeface="Arial" pitchFamily="34" charset="-120"/>
-              </a:rPr>
-              <a:t>– Menthol activation of TRPM8: established in molecular pharmacology. David Julius and colleagues identified TRPM8 as the cold/menthol receptor (Julius lab, UCSF; 2021 Nobel Prize work). Reference is at the lab level only; specific paper not cited. – Peppermint oil for IBS: multiple systematic reviews exist. Teachers can search "peppermint oil IBS systematic review" in PubMed.</a:t>
-            </a:r>
-            <a:endParaRPr lang="en-US" sz="1200" dirty="0"/>
-          </a:p>
-        </p:txBody>
-      </p:sp>
-      <p:sp>
-        <p:nvSpPr>
-          <p:cNvPr id="5" name="Text 3"/>
-          <p:cNvSpPr/>
-          <p:nvPr/>
-        </p:nvSpPr>
-        <p:spPr>
-          <a:xfrm>
-            <a:off x="634901" y="1812875"/>
+            <a:off x="634901" y="883593"/>
             <a:ext cx="8102798" cy="281880"/>
           </a:xfrm>
           <a:prstGeom prst="rect">
@@ -2813,6 +3470,578 @@
               <a:buChar char="•"/>
             </a:pPr>
             <a:r>
+              <a:rPr lang="en-US" sz="1200" b="1" dirty="0">
+                <a:solidFill>
+                  <a:srgbClr val="1C2833"/>
+                </a:solidFill>
+                <a:latin typeface="Arial" pitchFamily="34" charset="0"/>
+                <a:ea typeface="Arial" pitchFamily="34" charset="-122"/>
+                <a:cs typeface="Arial" pitchFamily="34" charset="-120"/>
+              </a:rPr>
+              <a:t>What mint does — well-supported.</a:t>
+            </a:r>
+            <a:endParaRPr lang="en-US" sz="1200" dirty="0"/>
+          </a:p>
+        </p:txBody>
+      </p:sp>
+      <p:sp>
+        <p:nvSpPr>
+          <p:cNvPr id="5" name="Text 3"/>
+          <p:cNvSpPr/>
+          <p:nvPr/>
+        </p:nvSpPr>
+        <p:spPr>
+          <a:xfrm>
+            <a:off x="634901" y="1266974"/>
+            <a:ext cx="8102798" cy="1424583"/>
+          </a:xfrm>
+          <a:prstGeom prst="rect">
+            <a:avLst/>
+          </a:prstGeom>
+          <a:noFill/>
+          <a:ln/>
+        </p:spPr>
+        <p:txBody>
+          <a:bodyPr wrap="square" lIns="0" tIns="0" rIns="0" bIns="0" rtlCol="0" anchor="t"/>
+          <a:lstStyle/>
+          <a:p>
+            <a:pPr algn="l" marL="342900" indent="-342900">
+              <a:lnSpc>
+                <a:spcPts val="1620"/>
+              </a:lnSpc>
+              <a:spcAft>
+                <a:spcPts val="300"/>
+              </a:spcAft>
+              <a:buSzPct val="100000"/>
+              <a:buChar char="•"/>
+            </a:pPr>
+            <a:r>
+              <a:rPr lang="en-US" sz="1200" b="1" dirty="0">
+                <a:solidFill>
+                  <a:srgbClr val="1C2833"/>
+                </a:solidFill>
+                <a:latin typeface="Arial" pitchFamily="34" charset="0"/>
+                <a:ea typeface="Arial" pitchFamily="34" charset="-122"/>
+                <a:cs typeface="Arial" pitchFamily="34" charset="-120"/>
+              </a:rPr>
+              <a:t>Cooling sensation</a:t>
+            </a:r>
+            <a:pPr algn="l" indent="0" marL="0">
+              <a:lnSpc>
+                <a:spcPts val="1620"/>
+              </a:lnSpc>
+              <a:spcAft>
+                <a:spcPts val="300"/>
+              </a:spcAft>
+              <a:buNone/>
+            </a:pPr>
+            <a:r>
+              <a:rPr lang="en-US" sz="1200" dirty="0">
+                <a:solidFill>
+                  <a:srgbClr val="1C2833"/>
+                </a:solidFill>
+                <a:latin typeface="Arial" pitchFamily="34" charset="0"/>
+                <a:ea typeface="Arial" pitchFamily="34" charset="-122"/>
+                <a:cs typeface="Arial" pitchFamily="34" charset="-120"/>
+              </a:rPr>
+              <a:t> (TRPM8) — definitively established.</a:t>
+            </a:r>
+            <a:endParaRPr lang="en-US" sz="1200" dirty="0"/>
+          </a:p>
+          <a:p>
+            <a:pPr algn="l" marL="342900" indent="-342900">
+              <a:lnSpc>
+                <a:spcPts val="1620"/>
+              </a:lnSpc>
+              <a:spcAft>
+                <a:spcPts val="300"/>
+              </a:spcAft>
+              <a:buSzPct val="100000"/>
+              <a:buChar char="•"/>
+            </a:pPr>
+            <a:r>
+              <a:rPr lang="en-US" sz="1200" b="1" dirty="0">
+                <a:solidFill>
+                  <a:srgbClr val="1C2833"/>
+                </a:solidFill>
+                <a:latin typeface="Arial" pitchFamily="34" charset="0"/>
+                <a:ea typeface="Arial" pitchFamily="34" charset="-122"/>
+                <a:cs typeface="Arial" pitchFamily="34" charset="-120"/>
+              </a:rPr>
+              <a:t>Digestive support</a:t>
+            </a:r>
+            <a:pPr algn="l" indent="0" marL="0">
+              <a:lnSpc>
+                <a:spcPts val="1620"/>
+              </a:lnSpc>
+              <a:spcAft>
+                <a:spcPts val="300"/>
+              </a:spcAft>
+              <a:buNone/>
+            </a:pPr>
+            <a:r>
+              <a:rPr lang="en-US" sz="1200" dirty="0">
+                <a:solidFill>
+                  <a:srgbClr val="1C2833"/>
+                </a:solidFill>
+                <a:latin typeface="Arial" pitchFamily="34" charset="0"/>
+                <a:ea typeface="Arial" pitchFamily="34" charset="-122"/>
+                <a:cs typeface="Arial" pitchFamily="34" charset="-120"/>
+              </a:rPr>
+              <a:t> — peppermint oil capsules have </a:t>
+            </a:r>
+            <a:pPr algn="l" indent="0" marL="0">
+              <a:lnSpc>
+                <a:spcPts val="1620"/>
+              </a:lnSpc>
+              <a:spcAft>
+                <a:spcPts val="300"/>
+              </a:spcAft>
+              <a:buNone/>
+            </a:pPr>
+            <a:r>
+              <a:rPr lang="en-US" sz="1200" b="1" dirty="0">
+                <a:solidFill>
+                  <a:srgbClr val="1C2833"/>
+                </a:solidFill>
+                <a:latin typeface="Arial" pitchFamily="34" charset="0"/>
+                <a:ea typeface="Arial" pitchFamily="34" charset="-122"/>
+                <a:cs typeface="Arial" pitchFamily="34" charset="-120"/>
+              </a:rPr>
+              <a:t>good clinical evidence</a:t>
+            </a:r>
+            <a:pPr algn="l" indent="0" marL="0">
+              <a:lnSpc>
+                <a:spcPts val="1620"/>
+              </a:lnSpc>
+              <a:spcAft>
+                <a:spcPts val="300"/>
+              </a:spcAft>
+              <a:buNone/>
+            </a:pPr>
+            <a:r>
+              <a:rPr lang="en-US" sz="1200" dirty="0">
+                <a:solidFill>
+                  <a:srgbClr val="1C2833"/>
+                </a:solidFill>
+                <a:latin typeface="Arial" pitchFamily="34" charset="0"/>
+                <a:ea typeface="Arial" pitchFamily="34" charset="-122"/>
+                <a:cs typeface="Arial" pitchFamily="34" charset="-120"/>
+              </a:rPr>
+              <a:t> for relieving symptoms of Irritable Bowel Syndrome (IBS) when prescribed by a doctor. Mechanism: relaxation of gut smooth muscle.</a:t>
+            </a:r>
+            <a:endParaRPr lang="en-US" sz="1200" dirty="0"/>
+          </a:p>
+          <a:p>
+            <a:pPr algn="l" marL="342900" indent="-342900">
+              <a:lnSpc>
+                <a:spcPts val="1620"/>
+              </a:lnSpc>
+              <a:spcAft>
+                <a:spcPts val="300"/>
+              </a:spcAft>
+              <a:buSzPct val="100000"/>
+              <a:buChar char="•"/>
+            </a:pPr>
+            <a:r>
+              <a:rPr lang="en-US" sz="1200" b="1" dirty="0">
+                <a:solidFill>
+                  <a:srgbClr val="1C2833"/>
+                </a:solidFill>
+                <a:latin typeface="Arial" pitchFamily="34" charset="0"/>
+                <a:ea typeface="Arial" pitchFamily="34" charset="-122"/>
+                <a:cs typeface="Arial" pitchFamily="34" charset="-120"/>
+              </a:rPr>
+              <a:t>Breath freshness</a:t>
+            </a:r>
+            <a:pPr algn="l" indent="0" marL="0">
+              <a:lnSpc>
+                <a:spcPts val="1620"/>
+              </a:lnSpc>
+              <a:spcAft>
+                <a:spcPts val="300"/>
+              </a:spcAft>
+              <a:buNone/>
+            </a:pPr>
+            <a:r>
+              <a:rPr lang="en-US" sz="1200" dirty="0">
+                <a:solidFill>
+                  <a:srgbClr val="1C2833"/>
+                </a:solidFill>
+                <a:latin typeface="Arial" pitchFamily="34" charset="0"/>
+                <a:ea typeface="Arial" pitchFamily="34" charset="-122"/>
+                <a:cs typeface="Arial" pitchFamily="34" charset="-120"/>
+              </a:rPr>
+              <a:t> — antibacterial activity in the mouth.</a:t>
+            </a:r>
+            <a:endParaRPr lang="en-US" sz="1200" dirty="0"/>
+          </a:p>
+          <a:p>
+            <a:pPr algn="l" marL="342900" indent="-342900">
+              <a:lnSpc>
+                <a:spcPts val="1620"/>
+              </a:lnSpc>
+              <a:spcAft>
+                <a:spcPts val="300"/>
+              </a:spcAft>
+              <a:buSzPct val="100000"/>
+              <a:buChar char="•"/>
+            </a:pPr>
+            <a:r>
+              <a:rPr lang="en-US" sz="1200" b="1" dirty="0">
+                <a:solidFill>
+                  <a:srgbClr val="1C2833"/>
+                </a:solidFill>
+                <a:latin typeface="Arial" pitchFamily="34" charset="0"/>
+                <a:ea typeface="Arial" pitchFamily="34" charset="-122"/>
+                <a:cs typeface="Arial" pitchFamily="34" charset="-120"/>
+              </a:rPr>
+              <a:t>Headache relief</a:t>
+            </a:r>
+            <a:pPr algn="l" indent="0" marL="0">
+              <a:lnSpc>
+                <a:spcPts val="1620"/>
+              </a:lnSpc>
+              <a:spcAft>
+                <a:spcPts val="300"/>
+              </a:spcAft>
+              <a:buNone/>
+            </a:pPr>
+            <a:r>
+              <a:rPr lang="en-US" sz="1200" dirty="0">
+                <a:solidFill>
+                  <a:srgbClr val="1C2833"/>
+                </a:solidFill>
+                <a:latin typeface="Arial" pitchFamily="34" charset="0"/>
+                <a:ea typeface="Arial" pitchFamily="34" charset="-122"/>
+                <a:cs typeface="Arial" pitchFamily="34" charset="-120"/>
+              </a:rPr>
+              <a:t> when applied to the temples (the cooling sensation distracts from pain). Topical use of dilute menthol; not the same as ingesting essential oil.</a:t>
+            </a:r>
+            <a:endParaRPr lang="en-US" sz="1200" dirty="0"/>
+          </a:p>
+        </p:txBody>
+      </p:sp>
+      <p:sp>
+        <p:nvSpPr>
+          <p:cNvPr id="6" name="Text 4"/>
+          <p:cNvSpPr/>
+          <p:nvPr/>
+        </p:nvSpPr>
+        <p:spPr>
+          <a:xfrm>
+            <a:off x="406301" y="4434929"/>
+            <a:ext cx="8498026" cy="213271"/>
+          </a:xfrm>
+          <a:prstGeom prst="rect">
+            <a:avLst/>
+          </a:prstGeom>
+          <a:noFill/>
+          <a:ln/>
+        </p:spPr>
+        <p:txBody>
+          <a:bodyPr wrap="square" lIns="0" tIns="0" rIns="0" bIns="0" rtlCol="0" anchor="t"/>
+          <a:lstStyle/>
+          <a:p>
+            <a:pPr algn="l" indent="0" marL="0">
+              <a:lnSpc>
+                <a:spcPts val="1680"/>
+              </a:lnSpc>
+              <a:spcBef>
+                <a:spcPts val="300"/>
+              </a:spcBef>
+              <a:spcAft>
+                <a:spcPts val="300"/>
+              </a:spcAft>
+              <a:buNone/>
+            </a:pPr>
+            <a:r>
+              <a:rPr lang="en-US" sz="1200" dirty="0">
+                <a:solidFill>
+                  <a:srgbClr val="1C2833"/>
+                </a:solidFill>
+                <a:latin typeface="Arial" pitchFamily="34" charset="0"/>
+                <a:ea typeface="Arial" pitchFamily="34" charset="-122"/>
+                <a:cs typeface="Arial" pitchFamily="34" charset="-120"/>
+              </a:rPr>
+              <a:t>Middle ·  · IKS Curriculum</a:t>
+            </a:r>
+            <a:endParaRPr lang="en-US" sz="1200" dirty="0"/>
+          </a:p>
+        </p:txBody>
+      </p:sp>
+    </p:spTree>
+  </p:cSld>
+  <p:clrMapOvr>
+    <a:masterClrMapping/>
+  </p:clrMapOvr>
+</p:sld>
+</file>
+
+<file path=ppt/slides/slide12.xml><?xml version="1.0" encoding="utf-8"?>
+<p:sld xmlns:a="http://schemas.openxmlformats.org/drawingml/2006/main" xmlns:r="http://schemas.openxmlformats.org/officeDocument/2006/relationships" xmlns:p="http://schemas.openxmlformats.org/presentationml/2006/main">
+  <p:cSld name="Slide 12">
+    <p:bg>
+      <p:bgPr>
+        <a:solidFill>
+          <a:srgbClr val="FFFFFF"/>
+        </a:solidFill>
+      </p:bgPr>
+    </p:bg>
+    <p:spTree>
+      <p:nvGrpSpPr>
+        <p:cNvPr id="1" name=""/>
+        <p:cNvGrpSpPr/>
+        <p:nvPr/>
+      </p:nvGrpSpPr>
+      <p:grpSpPr>
+        <a:xfrm>
+          <a:off x="0" y="0"/>
+          <a:ext cx="0" cy="0"/>
+          <a:chOff x="0" y="0"/>
+          <a:chExt cx="0" cy="0"/>
+        </a:xfrm>
+      </p:grpSpPr>
+      <p:sp>
+        <p:nvSpPr>
+          <p:cNvPr id="2" name="Text 0"/>
+          <p:cNvSpPr/>
+          <p:nvPr/>
+        </p:nvSpPr>
+        <p:spPr>
+          <a:xfrm>
+            <a:off x="0" y="0"/>
+            <a:ext cx="9144000" cy="101501"/>
+          </a:xfrm>
+          <a:prstGeom prst="rect">
+            <a:avLst/>
+          </a:prstGeom>
+          <a:solidFill>
+            <a:srgbClr val="277884"/>
+          </a:solidFill>
+          <a:ln/>
+        </p:spPr>
+        <p:txBody>
+          <a:bodyPr wrap="square" rtlCol="0" anchor="ctr"/>
+          <a:lstStyle/>
+          <a:p>
+            <a:pPr indent="0" marL="0">
+              <a:buNone/>
+            </a:pPr>
+            <a:endParaRPr lang="en-US" dirty="0"/>
+          </a:p>
+        </p:txBody>
+      </p:sp>
+      <p:sp>
+        <p:nvSpPr>
+          <p:cNvPr id="3" name="Text 1"/>
+          <p:cNvSpPr/>
+          <p:nvPr/>
+        </p:nvSpPr>
+        <p:spPr>
+          <a:xfrm>
+            <a:off x="406301" y="457051"/>
+            <a:ext cx="8498026" cy="274290"/>
+          </a:xfrm>
+          <a:prstGeom prst="rect">
+            <a:avLst/>
+          </a:prstGeom>
+          <a:noFill/>
+          <a:ln/>
+        </p:spPr>
+        <p:txBody>
+          <a:bodyPr wrap="square" lIns="0" tIns="0" rIns="0" bIns="0" rtlCol="0" anchor="t"/>
+          <a:lstStyle/>
+          <a:p>
+            <a:pPr algn="l" indent="0" marL="0">
+              <a:lnSpc>
+                <a:spcPts val="2160"/>
+              </a:lnSpc>
+              <a:spcBef>
+                <a:spcPts val="600"/>
+              </a:spcBef>
+              <a:spcAft>
+                <a:spcPts val="800"/>
+              </a:spcAft>
+              <a:buNone/>
+            </a:pPr>
+            <a:r>
+              <a:rPr lang="en-US" sz="1800" b="1" dirty="0">
+                <a:solidFill>
+                  <a:srgbClr val="FE4447"/>
+                </a:solidFill>
+                <a:latin typeface="Georgia" pitchFamily="34" charset="0"/>
+                <a:ea typeface="Georgia" pitchFamily="34" charset="-122"/>
+                <a:cs typeface="Georgia" pitchFamily="34" charset="-120"/>
+              </a:rPr>
+              <a:t>Core (20 min) (cont.)</a:t>
+            </a:r>
+            <a:endParaRPr lang="en-US" sz="1800" dirty="0"/>
+          </a:p>
+        </p:txBody>
+      </p:sp>
+      <p:sp>
+        <p:nvSpPr>
+          <p:cNvPr id="4" name="Text 2"/>
+          <p:cNvSpPr/>
+          <p:nvPr/>
+        </p:nvSpPr>
+        <p:spPr>
+          <a:xfrm>
+            <a:off x="634901" y="883593"/>
+            <a:ext cx="8102798" cy="281880"/>
+          </a:xfrm>
+          <a:prstGeom prst="rect">
+            <a:avLst/>
+          </a:prstGeom>
+          <a:noFill/>
+          <a:ln/>
+        </p:spPr>
+        <p:txBody>
+          <a:bodyPr wrap="square" lIns="0" tIns="0" rIns="0" bIns="0" rtlCol="0" anchor="t"/>
+          <a:lstStyle/>
+          <a:p>
+            <a:pPr algn="l" marL="342900" indent="-342900">
+              <a:lnSpc>
+                <a:spcPts val="1620"/>
+              </a:lnSpc>
+              <a:spcAft>
+                <a:spcPts val="300"/>
+              </a:spcAft>
+              <a:buSzPct val="100000"/>
+              <a:buChar char="•"/>
+            </a:pPr>
+            <a:r>
+              <a:rPr lang="en-US" sz="1200" b="1" dirty="0">
+                <a:solidFill>
+                  <a:srgbClr val="1C2833"/>
+                </a:solidFill>
+                <a:latin typeface="Arial" pitchFamily="34" charset="0"/>
+                <a:ea typeface="Arial" pitchFamily="34" charset="-122"/>
+                <a:cs typeface="Arial" pitchFamily="34" charset="-120"/>
+              </a:rPr>
+              <a:t>Cautions.</a:t>
+            </a:r>
+            <a:endParaRPr lang="en-US" sz="1200" dirty="0"/>
+          </a:p>
+        </p:txBody>
+      </p:sp>
+      <p:sp>
+        <p:nvSpPr>
+          <p:cNvPr id="5" name="Text 3"/>
+          <p:cNvSpPr/>
+          <p:nvPr/>
+        </p:nvSpPr>
+        <p:spPr>
+          <a:xfrm>
+            <a:off x="634901" y="1266974"/>
+            <a:ext cx="8102798" cy="975122"/>
+          </a:xfrm>
+          <a:prstGeom prst="rect">
+            <a:avLst/>
+          </a:prstGeom>
+          <a:noFill/>
+          <a:ln/>
+        </p:spPr>
+        <p:txBody>
+          <a:bodyPr wrap="square" lIns="0" tIns="0" rIns="0" bIns="0" rtlCol="0" anchor="t"/>
+          <a:lstStyle/>
+          <a:p>
+            <a:pPr algn="l" marL="342900" indent="-342900">
+              <a:lnSpc>
+                <a:spcPts val="1620"/>
+              </a:lnSpc>
+              <a:spcAft>
+                <a:spcPts val="300"/>
+              </a:spcAft>
+              <a:buSzPct val="100000"/>
+              <a:buChar char="•"/>
+            </a:pPr>
+            <a:r>
+              <a:rPr lang="en-US" sz="1200" b="1" dirty="0">
+                <a:solidFill>
+                  <a:srgbClr val="1C2833"/>
+                </a:solidFill>
+                <a:latin typeface="Arial" pitchFamily="34" charset="0"/>
+                <a:ea typeface="Arial" pitchFamily="34" charset="-122"/>
+                <a:cs typeface="Arial" pitchFamily="34" charset="-120"/>
+              </a:rPr>
+              <a:t>Babies and small children</a:t>
+            </a:r>
+            <a:pPr algn="l" indent="0" marL="0">
+              <a:lnSpc>
+                <a:spcPts val="1620"/>
+              </a:lnSpc>
+              <a:spcAft>
+                <a:spcPts val="300"/>
+              </a:spcAft>
+              <a:buNone/>
+            </a:pPr>
+            <a:r>
+              <a:rPr lang="en-US" sz="1200" dirty="0">
+                <a:solidFill>
+                  <a:srgbClr val="1C2833"/>
+                </a:solidFill>
+                <a:latin typeface="Arial" pitchFamily="34" charset="0"/>
+                <a:ea typeface="Arial" pitchFamily="34" charset="-122"/>
+                <a:cs typeface="Arial" pitchFamily="34" charset="-120"/>
+              </a:rPr>
+              <a:t> — undiluted menthol-containing products on the chest or face can cause breathing reflexes. Do not give menthol balms to infants.</a:t>
+            </a:r>
+            <a:endParaRPr lang="en-US" sz="1200" dirty="0"/>
+          </a:p>
+          <a:p>
+            <a:pPr algn="l" marL="342900" indent="-342900">
+              <a:lnSpc>
+                <a:spcPts val="1620"/>
+              </a:lnSpc>
+              <a:spcAft>
+                <a:spcPts val="300"/>
+              </a:spcAft>
+              <a:buSzPct val="100000"/>
+              <a:buChar char="•"/>
+            </a:pPr>
+            <a:r>
+              <a:rPr lang="en-US" sz="1200" b="1" dirty="0">
+                <a:solidFill>
+                  <a:srgbClr val="1C2833"/>
+                </a:solidFill>
+                <a:latin typeface="Arial" pitchFamily="34" charset="0"/>
+                <a:ea typeface="Arial" pitchFamily="34" charset="-122"/>
+                <a:cs typeface="Arial" pitchFamily="34" charset="-120"/>
+              </a:rPr>
+              <a:t>Peppermint oil capsules</a:t>
+            </a:r>
+            <a:pPr algn="l" indent="0" marL="0">
+              <a:lnSpc>
+                <a:spcPts val="1620"/>
+              </a:lnSpc>
+              <a:spcAft>
+                <a:spcPts val="300"/>
+              </a:spcAft>
+              <a:buNone/>
+            </a:pPr>
+            <a:r>
+              <a:rPr lang="en-US" sz="1200" dirty="0">
+                <a:solidFill>
+                  <a:srgbClr val="1C2833"/>
+                </a:solidFill>
+                <a:latin typeface="Arial" pitchFamily="34" charset="0"/>
+                <a:ea typeface="Arial" pitchFamily="34" charset="-122"/>
+                <a:cs typeface="Arial" pitchFamily="34" charset="-120"/>
+              </a:rPr>
+              <a:t> — these are </a:t>
+            </a:r>
+            <a:pPr algn="l" indent="0" marL="0">
+              <a:lnSpc>
+                <a:spcPts val="1620"/>
+              </a:lnSpc>
+              <a:spcAft>
+                <a:spcPts val="300"/>
+              </a:spcAft>
+              <a:buNone/>
+            </a:pPr>
+            <a:r>
               <a:rPr lang="en-US" sz="1200" i="1" dirty="0">
                 <a:solidFill>
                   <a:srgbClr val="1C2833"/>
@@ -2821,6 +4050,354 @@
                 <a:ea typeface="Arial" pitchFamily="34" charset="-122"/>
                 <a:cs typeface="Arial" pitchFamily="34" charset="-120"/>
               </a:rPr>
+              <a:t>medications</a:t>
+            </a:r>
+            <a:pPr algn="l" indent="0" marL="0">
+              <a:lnSpc>
+                <a:spcPts val="1620"/>
+              </a:lnSpc>
+              <a:spcAft>
+                <a:spcPts val="300"/>
+              </a:spcAft>
+              <a:buNone/>
+            </a:pPr>
+            <a:r>
+              <a:rPr lang="en-US" sz="1200" dirty="0">
+                <a:solidFill>
+                  <a:srgbClr val="1C2833"/>
+                </a:solidFill>
+                <a:latin typeface="Arial" pitchFamily="34" charset="0"/>
+                <a:ea typeface="Arial" pitchFamily="34" charset="-122"/>
+                <a:cs typeface="Arial" pitchFamily="34" charset="-120"/>
+              </a:rPr>
+              <a:t>, not snacks. The IBS evidence is for </a:t>
+            </a:r>
+            <a:pPr algn="l" indent="0" marL="0">
+              <a:lnSpc>
+                <a:spcPts val="1620"/>
+              </a:lnSpc>
+              <a:spcAft>
+                <a:spcPts val="300"/>
+              </a:spcAft>
+              <a:buNone/>
+            </a:pPr>
+            <a:r>
+              <a:rPr lang="en-US" sz="1200" i="1" dirty="0">
+                <a:solidFill>
+                  <a:srgbClr val="1C2833"/>
+                </a:solidFill>
+                <a:latin typeface="Arial" pitchFamily="34" charset="0"/>
+                <a:ea typeface="Arial" pitchFamily="34" charset="-122"/>
+                <a:cs typeface="Arial" pitchFamily="34" charset="-120"/>
+              </a:rPr>
+              <a:t>prescribed</a:t>
+            </a:r>
+            <a:pPr algn="l" indent="0" marL="0">
+              <a:lnSpc>
+                <a:spcPts val="1620"/>
+              </a:lnSpc>
+              <a:spcAft>
+                <a:spcPts val="300"/>
+              </a:spcAft>
+              <a:buNone/>
+            </a:pPr>
+            <a:r>
+              <a:rPr lang="en-US" sz="1200" dirty="0">
+                <a:solidFill>
+                  <a:srgbClr val="1C2833"/>
+                </a:solidFill>
+                <a:latin typeface="Arial" pitchFamily="34" charset="0"/>
+                <a:ea typeface="Arial" pitchFamily="34" charset="-122"/>
+                <a:cs typeface="Arial" pitchFamily="34" charset="-120"/>
+              </a:rPr>
+              <a:t> dosing.</a:t>
+            </a:r>
+            <a:endParaRPr lang="en-US" sz="1200" dirty="0"/>
+          </a:p>
+          <a:p>
+            <a:pPr algn="l" marL="342900" indent="-342900">
+              <a:lnSpc>
+                <a:spcPts val="1620"/>
+              </a:lnSpc>
+              <a:spcAft>
+                <a:spcPts val="300"/>
+              </a:spcAft>
+              <a:buSzPct val="100000"/>
+              <a:buChar char="•"/>
+            </a:pPr>
+            <a:r>
+              <a:rPr lang="en-US" sz="1200" b="1" dirty="0">
+                <a:solidFill>
+                  <a:srgbClr val="1C2833"/>
+                </a:solidFill>
+                <a:latin typeface="Arial" pitchFamily="34" charset="0"/>
+                <a:ea typeface="Arial" pitchFamily="34" charset="-122"/>
+                <a:cs typeface="Arial" pitchFamily="34" charset="-120"/>
+              </a:rPr>
+              <a:t>Acid reflux</a:t>
+            </a:r>
+            <a:pPr algn="l" indent="0" marL="0">
+              <a:lnSpc>
+                <a:spcPts val="1620"/>
+              </a:lnSpc>
+              <a:spcAft>
+                <a:spcPts val="300"/>
+              </a:spcAft>
+              <a:buNone/>
+            </a:pPr>
+            <a:r>
+              <a:rPr lang="en-US" sz="1200" dirty="0">
+                <a:solidFill>
+                  <a:srgbClr val="1C2833"/>
+                </a:solidFill>
+                <a:latin typeface="Arial" pitchFamily="34" charset="0"/>
+                <a:ea typeface="Arial" pitchFamily="34" charset="-122"/>
+                <a:cs typeface="Arial" pitchFamily="34" charset="-120"/>
+              </a:rPr>
+              <a:t> — peppermint can relax the lower oesophageal sphincter, making reflux worse for some people.</a:t>
+            </a:r>
+            <a:endParaRPr lang="en-US" sz="1200" dirty="0"/>
+          </a:p>
+        </p:txBody>
+      </p:sp>
+      <p:sp>
+        <p:nvSpPr>
+          <p:cNvPr id="6" name="Text 4"/>
+          <p:cNvSpPr/>
+          <p:nvPr/>
+        </p:nvSpPr>
+        <p:spPr>
+          <a:xfrm>
+            <a:off x="406301" y="4434929"/>
+            <a:ext cx="8498026" cy="213271"/>
+          </a:xfrm>
+          <a:prstGeom prst="rect">
+            <a:avLst/>
+          </a:prstGeom>
+          <a:noFill/>
+          <a:ln/>
+        </p:spPr>
+        <p:txBody>
+          <a:bodyPr wrap="square" lIns="0" tIns="0" rIns="0" bIns="0" rtlCol="0" anchor="t"/>
+          <a:lstStyle/>
+          <a:p>
+            <a:pPr algn="l" indent="0" marL="0">
+              <a:lnSpc>
+                <a:spcPts val="1680"/>
+              </a:lnSpc>
+              <a:spcBef>
+                <a:spcPts val="300"/>
+              </a:spcBef>
+              <a:spcAft>
+                <a:spcPts val="300"/>
+              </a:spcAft>
+              <a:buNone/>
+            </a:pPr>
+            <a:r>
+              <a:rPr lang="en-US" sz="1200" dirty="0">
+                <a:solidFill>
+                  <a:srgbClr val="1C2833"/>
+                </a:solidFill>
+                <a:latin typeface="Arial" pitchFamily="34" charset="0"/>
+                <a:ea typeface="Arial" pitchFamily="34" charset="-122"/>
+                <a:cs typeface="Arial" pitchFamily="34" charset="-120"/>
+              </a:rPr>
+              <a:t>Middle ·  · IKS Curriculum</a:t>
+            </a:r>
+            <a:endParaRPr lang="en-US" sz="1200" dirty="0"/>
+          </a:p>
+        </p:txBody>
+      </p:sp>
+    </p:spTree>
+  </p:cSld>
+  <p:clrMapOvr>
+    <a:masterClrMapping/>
+  </p:clrMapOvr>
+</p:sld>
+</file>
+
+<file path=ppt/slides/slide13.xml><?xml version="1.0" encoding="utf-8"?>
+<p:sld xmlns:a="http://schemas.openxmlformats.org/drawingml/2006/main" xmlns:r="http://schemas.openxmlformats.org/officeDocument/2006/relationships" xmlns:p="http://schemas.openxmlformats.org/presentationml/2006/main">
+  <p:cSld name="Slide 13">
+    <p:bg>
+      <p:bgPr>
+        <a:solidFill>
+          <a:srgbClr val="FFFFFF"/>
+        </a:solidFill>
+      </p:bgPr>
+    </p:bg>
+    <p:spTree>
+      <p:nvGrpSpPr>
+        <p:cNvPr id="1" name=""/>
+        <p:cNvGrpSpPr/>
+        <p:nvPr/>
+      </p:nvGrpSpPr>
+      <p:grpSpPr>
+        <a:xfrm>
+          <a:off x="0" y="0"/>
+          <a:ext cx="0" cy="0"/>
+          <a:chOff x="0" y="0"/>
+          <a:chExt cx="0" cy="0"/>
+        </a:xfrm>
+      </p:grpSpPr>
+      <p:sp>
+        <p:nvSpPr>
+          <p:cNvPr id="2" name="Text 0"/>
+          <p:cNvSpPr/>
+          <p:nvPr/>
+        </p:nvSpPr>
+        <p:spPr>
+          <a:xfrm>
+            <a:off x="0" y="0"/>
+            <a:ext cx="9144000" cy="101501"/>
+          </a:xfrm>
+          <a:prstGeom prst="rect">
+            <a:avLst/>
+          </a:prstGeom>
+          <a:solidFill>
+            <a:srgbClr val="277884"/>
+          </a:solidFill>
+          <a:ln/>
+        </p:spPr>
+        <p:txBody>
+          <a:bodyPr wrap="square" rtlCol="0" anchor="ctr"/>
+          <a:lstStyle/>
+          <a:p>
+            <a:pPr indent="0" marL="0">
+              <a:buNone/>
+            </a:pPr>
+            <a:endParaRPr lang="en-US" dirty="0"/>
+          </a:p>
+        </p:txBody>
+      </p:sp>
+      <p:sp>
+        <p:nvSpPr>
+          <p:cNvPr id="3" name="Text 1"/>
+          <p:cNvSpPr/>
+          <p:nvPr/>
+        </p:nvSpPr>
+        <p:spPr>
+          <a:xfrm>
+            <a:off x="406301" y="457051"/>
+            <a:ext cx="8498026" cy="274290"/>
+          </a:xfrm>
+          <a:prstGeom prst="rect">
+            <a:avLst/>
+          </a:prstGeom>
+          <a:noFill/>
+          <a:ln/>
+        </p:spPr>
+        <p:txBody>
+          <a:bodyPr wrap="square" lIns="0" tIns="0" rIns="0" bIns="0" rtlCol="0" anchor="t"/>
+          <a:lstStyle/>
+          <a:p>
+            <a:pPr algn="l" indent="0" marL="0">
+              <a:lnSpc>
+                <a:spcPts val="2160"/>
+              </a:lnSpc>
+              <a:spcBef>
+                <a:spcPts val="600"/>
+              </a:spcBef>
+              <a:spcAft>
+                <a:spcPts val="800"/>
+              </a:spcAft>
+              <a:buNone/>
+            </a:pPr>
+            <a:r>
+              <a:rPr lang="en-US" sz="1800" b="1" dirty="0">
+                <a:solidFill>
+                  <a:srgbClr val="FE4447"/>
+                </a:solidFill>
+                <a:latin typeface="Georgia" pitchFamily="34" charset="0"/>
+                <a:ea typeface="Georgia" pitchFamily="34" charset="-122"/>
+                <a:cs typeface="Georgia" pitchFamily="34" charset="-120"/>
+              </a:rPr>
+              <a:t>Core (20 min) (cont.)</a:t>
+            </a:r>
+            <a:endParaRPr lang="en-US" sz="1800" dirty="0"/>
+          </a:p>
+        </p:txBody>
+      </p:sp>
+      <p:sp>
+        <p:nvSpPr>
+          <p:cNvPr id="4" name="Text 2"/>
+          <p:cNvSpPr/>
+          <p:nvPr/>
+        </p:nvSpPr>
+        <p:spPr>
+          <a:xfrm>
+            <a:off x="634901" y="883593"/>
+            <a:ext cx="8102798" cy="487561"/>
+          </a:xfrm>
+          <a:prstGeom prst="rect">
+            <a:avLst/>
+          </a:prstGeom>
+          <a:noFill/>
+          <a:ln/>
+        </p:spPr>
+        <p:txBody>
+          <a:bodyPr wrap="square" lIns="0" tIns="0" rIns="0" bIns="0" rtlCol="0" anchor="t"/>
+          <a:lstStyle/>
+          <a:p>
+            <a:pPr algn="l" marL="342900" indent="-342900">
+              <a:lnSpc>
+                <a:spcPts val="1620"/>
+              </a:lnSpc>
+              <a:spcAft>
+                <a:spcPts val="300"/>
+              </a:spcAft>
+              <a:buSzPct val="100000"/>
+              <a:buChar char="•"/>
+            </a:pPr>
+            <a:r>
+              <a:rPr lang="en-US" sz="1200" b="1" dirty="0">
+                <a:solidFill>
+                  <a:srgbClr val="1C2833"/>
+                </a:solidFill>
+                <a:latin typeface="Arial" pitchFamily="34" charset="0"/>
+                <a:ea typeface="Arial" pitchFamily="34" charset="-122"/>
+                <a:cs typeface="Arial" pitchFamily="34" charset="-120"/>
+              </a:rPr>
+              <a:t>Traditional Ayurvedic frame.</a:t>
+            </a:r>
+            <a:pPr algn="l" indent="0" marL="0">
+              <a:lnSpc>
+                <a:spcPts val="1620"/>
+              </a:lnSpc>
+              <a:spcAft>
+                <a:spcPts val="300"/>
+              </a:spcAft>
+              <a:buNone/>
+            </a:pPr>
+            <a:r>
+              <a:rPr lang="en-US" sz="1200" dirty="0">
+                <a:solidFill>
+                  <a:srgbClr val="1C2833"/>
+                </a:solidFill>
+                <a:latin typeface="Arial" pitchFamily="34" charset="0"/>
+                <a:ea typeface="Arial" pitchFamily="34" charset="-122"/>
+                <a:cs typeface="Arial" pitchFamily="34" charset="-120"/>
+              </a:rPr>
+              <a:t> </a:t>
+            </a:r>
+            <a:pPr algn="l" indent="0" marL="0">
+              <a:lnSpc>
+                <a:spcPts val="1620"/>
+              </a:lnSpc>
+              <a:spcAft>
+                <a:spcPts val="300"/>
+              </a:spcAft>
+              <a:buNone/>
+            </a:pPr>
+            <a:r>
+              <a:rPr lang="en-US" sz="1200" i="1" dirty="0">
+                <a:solidFill>
+                  <a:srgbClr val="1C2833"/>
+                </a:solidFill>
+                <a:latin typeface="Arial" pitchFamily="34" charset="0"/>
+                <a:ea typeface="Arial" pitchFamily="34" charset="-122"/>
+                <a:cs typeface="Arial" pitchFamily="34" charset="-120"/>
+              </a:rPr>
               <a:t>Pudīnā</a:t>
             </a:r>
             <a:pPr algn="l" indent="0" marL="0">
@@ -2841,7 +4418,7 @@
                 <a:ea typeface="Arial" pitchFamily="34" charset="-122"/>
                 <a:cs typeface="Arial" pitchFamily="34" charset="-120"/>
               </a:rPr>
-              <a:t> as </a:t>
+              <a:t> is </a:t>
             </a:r>
             <a:pPr algn="l" indent="0" marL="0">
               <a:lnSpc>
@@ -2861,6 +4438,46 @@
                 <a:ea typeface="Arial" pitchFamily="34" charset="-122"/>
                 <a:cs typeface="Arial" pitchFamily="34" charset="-120"/>
               </a:rPr>
+              <a:t>kaṭu</a:t>
+            </a:r>
+            <a:pPr algn="l" indent="0" marL="0">
+              <a:lnSpc>
+                <a:spcPts val="1620"/>
+              </a:lnSpc>
+              <a:spcAft>
+                <a:spcPts val="300"/>
+              </a:spcAft>
+              <a:buNone/>
+            </a:pPr>
+            <a:r>
+              <a:rPr lang="en-US" sz="1200" dirty="0">
+                <a:solidFill>
+                  <a:srgbClr val="1C2833"/>
+                </a:solidFill>
+                <a:latin typeface="Arial" pitchFamily="34" charset="0"/>
+                <a:ea typeface="Arial" pitchFamily="34" charset="-122"/>
+                <a:cs typeface="Arial" pitchFamily="34" charset="-120"/>
+              </a:rPr>
+              <a:t> (pungent) in taste but </a:t>
+            </a:r>
+            <a:pPr algn="l" indent="0" marL="0">
+              <a:lnSpc>
+                <a:spcPts val="1620"/>
+              </a:lnSpc>
+              <a:spcAft>
+                <a:spcPts val="300"/>
+              </a:spcAft>
+              <a:buNone/>
+            </a:pPr>
+            <a:r>
+              <a:rPr lang="en-US" sz="1200" i="1" dirty="0">
+                <a:solidFill>
+                  <a:srgbClr val="1C2833"/>
+                </a:solidFill>
+                <a:latin typeface="Arial" pitchFamily="34" charset="0"/>
+                <a:ea typeface="Arial" pitchFamily="34" charset="-122"/>
+                <a:cs typeface="Arial" pitchFamily="34" charset="-120"/>
+              </a:rPr>
               <a:t>śīta</a:t>
             </a:r>
             <a:pPr algn="l" indent="0" marL="0">
@@ -2881,7 +4498,87 @@
                 <a:ea typeface="Arial" pitchFamily="34" charset="-122"/>
                 <a:cs typeface="Arial" pitchFamily="34" charset="-120"/>
               </a:rPr>
-              <a:t> — standard Ayurvedic nighantu reference; chapter-level only.</a:t>
+              <a:t> (cooling) in </a:t>
+            </a:r>
+            <a:pPr algn="l" indent="0" marL="0">
+              <a:lnSpc>
+                <a:spcPts val="1620"/>
+              </a:lnSpc>
+              <a:spcAft>
+                <a:spcPts val="300"/>
+              </a:spcAft>
+              <a:buNone/>
+            </a:pPr>
+            <a:r>
+              <a:rPr lang="en-US" sz="1200" i="1" dirty="0">
+                <a:solidFill>
+                  <a:srgbClr val="1C2833"/>
+                </a:solidFill>
+                <a:latin typeface="Arial" pitchFamily="34" charset="0"/>
+                <a:ea typeface="Arial" pitchFamily="34" charset="-122"/>
+                <a:cs typeface="Arial" pitchFamily="34" charset="-120"/>
+              </a:rPr>
+              <a:t>vīrya</a:t>
+            </a:r>
+            <a:pPr algn="l" indent="0" marL="0">
+              <a:lnSpc>
+                <a:spcPts val="1620"/>
+              </a:lnSpc>
+              <a:spcAft>
+                <a:spcPts val="300"/>
+              </a:spcAft>
+              <a:buNone/>
+            </a:pPr>
+            <a:r>
+              <a:rPr lang="en-US" sz="1200" dirty="0">
+                <a:solidFill>
+                  <a:srgbClr val="1C2833"/>
+                </a:solidFill>
+                <a:latin typeface="Arial" pitchFamily="34" charset="0"/>
+                <a:ea typeface="Arial" pitchFamily="34" charset="-122"/>
+                <a:cs typeface="Arial" pitchFamily="34" charset="-120"/>
+              </a:rPr>
+              <a:t>. Used in summer drinks (mint nimbu pani), in chutneys (with coriander and lime), and in some preparations for cooling </a:t>
+            </a:r>
+            <a:pPr algn="l" indent="0" marL="0">
+              <a:lnSpc>
+                <a:spcPts val="1620"/>
+              </a:lnSpc>
+              <a:spcAft>
+                <a:spcPts val="300"/>
+              </a:spcAft>
+              <a:buNone/>
+            </a:pPr>
+            <a:r>
+              <a:rPr lang="en-US" sz="1200" i="1" dirty="0">
+                <a:solidFill>
+                  <a:srgbClr val="1C2833"/>
+                </a:solidFill>
+                <a:latin typeface="Arial" pitchFamily="34" charset="0"/>
+                <a:ea typeface="Arial" pitchFamily="34" charset="-122"/>
+                <a:cs typeface="Arial" pitchFamily="34" charset="-120"/>
+              </a:rPr>
+              <a:t>pitta</a:t>
+            </a:r>
+            <a:pPr algn="l" indent="0" marL="0">
+              <a:lnSpc>
+                <a:spcPts val="1620"/>
+              </a:lnSpc>
+              <a:spcAft>
+                <a:spcPts val="300"/>
+              </a:spcAft>
+              <a:buNone/>
+            </a:pPr>
+            <a:r>
+              <a:rPr lang="en-US" sz="1200" dirty="0">
+                <a:solidFill>
+                  <a:srgbClr val="1C2833"/>
+                </a:solidFill>
+                <a:latin typeface="Arial" pitchFamily="34" charset="0"/>
+                <a:ea typeface="Arial" pitchFamily="34" charset="-122"/>
+                <a:cs typeface="Arial" pitchFamily="34" charset="-120"/>
+              </a:rPr>
+              <a:t> imbalances.</a:t>
             </a:r>
             <a:endParaRPr lang="en-US" sz="1200" dirty="0"/>
           </a:p>
@@ -2889,7 +4586,1675 @@
       </p:sp>
       <p:sp>
         <p:nvSpPr>
+          <p:cNvPr id="5" name="Text 3"/>
+          <p:cNvSpPr/>
+          <p:nvPr/>
+        </p:nvSpPr>
+        <p:spPr>
+          <a:xfrm>
+            <a:off x="406301" y="4434929"/>
+            <a:ext cx="8498026" cy="213271"/>
+          </a:xfrm>
+          <a:prstGeom prst="rect">
+            <a:avLst/>
+          </a:prstGeom>
+          <a:noFill/>
+          <a:ln/>
+        </p:spPr>
+        <p:txBody>
+          <a:bodyPr wrap="square" lIns="0" tIns="0" rIns="0" bIns="0" rtlCol="0" anchor="t"/>
+          <a:lstStyle/>
+          <a:p>
+            <a:pPr algn="l" indent="0" marL="0">
+              <a:lnSpc>
+                <a:spcPts val="1680"/>
+              </a:lnSpc>
+              <a:spcBef>
+                <a:spcPts val="300"/>
+              </a:spcBef>
+              <a:spcAft>
+                <a:spcPts val="300"/>
+              </a:spcAft>
+              <a:buNone/>
+            </a:pPr>
+            <a:r>
+              <a:rPr lang="en-US" sz="1200" dirty="0">
+                <a:solidFill>
+                  <a:srgbClr val="1C2833"/>
+                </a:solidFill>
+                <a:latin typeface="Arial" pitchFamily="34" charset="0"/>
+                <a:ea typeface="Arial" pitchFamily="34" charset="-122"/>
+                <a:cs typeface="Arial" pitchFamily="34" charset="-120"/>
+              </a:rPr>
+              <a:t>Middle ·  · IKS Curriculum</a:t>
+            </a:r>
+            <a:endParaRPr lang="en-US" sz="1200" dirty="0"/>
+          </a:p>
+        </p:txBody>
+      </p:sp>
+    </p:spTree>
+  </p:cSld>
+  <p:clrMapOvr>
+    <a:masterClrMapping/>
+  </p:clrMapOvr>
+</p:sld>
+</file>
+
+<file path=ppt/slides/slide14.xml><?xml version="1.0" encoding="utf-8"?>
+<p:sld xmlns:a="http://schemas.openxmlformats.org/drawingml/2006/main" xmlns:r="http://schemas.openxmlformats.org/officeDocument/2006/relationships" xmlns:p="http://schemas.openxmlformats.org/presentationml/2006/main">
+  <p:cSld name="Slide 14">
+    <p:bg>
+      <p:bgPr>
+        <a:solidFill>
+          <a:srgbClr val="FFFFFF"/>
+        </a:solidFill>
+      </p:bgPr>
+    </p:bg>
+    <p:spTree>
+      <p:nvGrpSpPr>
+        <p:cNvPr id="1" name=""/>
+        <p:cNvGrpSpPr/>
+        <p:nvPr/>
+      </p:nvGrpSpPr>
+      <p:grpSpPr>
+        <a:xfrm>
+          <a:off x="0" y="0"/>
+          <a:ext cx="0" cy="0"/>
+          <a:chOff x="0" y="0"/>
+          <a:chExt cx="0" cy="0"/>
+        </a:xfrm>
+      </p:grpSpPr>
+      <p:sp>
+        <p:nvSpPr>
+          <p:cNvPr id="2" name="Text 0"/>
+          <p:cNvSpPr/>
+          <p:nvPr/>
+        </p:nvSpPr>
+        <p:spPr>
+          <a:xfrm>
+            <a:off x="0" y="0"/>
+            <a:ext cx="9144000" cy="101501"/>
+          </a:xfrm>
+          <a:prstGeom prst="rect">
+            <a:avLst/>
+          </a:prstGeom>
+          <a:solidFill>
+            <a:srgbClr val="277884"/>
+          </a:solidFill>
+          <a:ln/>
+        </p:spPr>
+        <p:txBody>
+          <a:bodyPr wrap="square" rtlCol="0" anchor="ctr"/>
+          <a:lstStyle/>
+          <a:p>
+            <a:pPr indent="0" marL="0">
+              <a:buNone/>
+            </a:pPr>
+            <a:endParaRPr lang="en-US" dirty="0"/>
+          </a:p>
+        </p:txBody>
+      </p:sp>
+      <p:sp>
+        <p:nvSpPr>
+          <p:cNvPr id="3" name="Text 1"/>
+          <p:cNvSpPr/>
+          <p:nvPr/>
+        </p:nvSpPr>
+        <p:spPr>
+          <a:xfrm>
+            <a:off x="406301" y="457051"/>
+            <a:ext cx="8498026" cy="274290"/>
+          </a:xfrm>
+          <a:prstGeom prst="rect">
+            <a:avLst/>
+          </a:prstGeom>
+          <a:noFill/>
+          <a:ln/>
+        </p:spPr>
+        <p:txBody>
+          <a:bodyPr wrap="square" lIns="0" tIns="0" rIns="0" bIns="0" rtlCol="0" anchor="t"/>
+          <a:lstStyle/>
+          <a:p>
+            <a:pPr algn="l" indent="0" marL="0">
+              <a:lnSpc>
+                <a:spcPts val="2160"/>
+              </a:lnSpc>
+              <a:spcBef>
+                <a:spcPts val="600"/>
+              </a:spcBef>
+              <a:spcAft>
+                <a:spcPts val="800"/>
+              </a:spcAft>
+              <a:buNone/>
+            </a:pPr>
+            <a:r>
+              <a:rPr lang="en-US" sz="1800" b="1" dirty="0">
+                <a:solidFill>
+                  <a:srgbClr val="FE4447"/>
+                </a:solidFill>
+                <a:latin typeface="Georgia" pitchFamily="34" charset="0"/>
+                <a:ea typeface="Georgia" pitchFamily="34" charset="-122"/>
+                <a:cs typeface="Georgia" pitchFamily="34" charset="-120"/>
+              </a:rPr>
+              <a:t>Activity (15 min) — Variety taste-id challenge</a:t>
+            </a:r>
+            <a:endParaRPr lang="en-US" sz="1800" dirty="0"/>
+          </a:p>
+        </p:txBody>
+      </p:sp>
+      <p:sp>
+        <p:nvSpPr>
+          <p:cNvPr id="4" name="Text 2"/>
+          <p:cNvSpPr/>
+          <p:nvPr/>
+        </p:nvSpPr>
+        <p:spPr>
+          <a:xfrm>
+            <a:off x="406301" y="870942"/>
+            <a:ext cx="8498026" cy="213271"/>
+          </a:xfrm>
+          <a:prstGeom prst="rect">
+            <a:avLst/>
+          </a:prstGeom>
+          <a:noFill/>
+          <a:ln/>
+        </p:spPr>
+        <p:txBody>
+          <a:bodyPr wrap="square" lIns="0" tIns="0" rIns="0" bIns="0" rtlCol="0" anchor="t"/>
+          <a:lstStyle/>
+          <a:p>
+            <a:pPr algn="l" indent="0" marL="0">
+              <a:lnSpc>
+                <a:spcPts val="1680"/>
+              </a:lnSpc>
+              <a:spcBef>
+                <a:spcPts val="300"/>
+              </a:spcBef>
+              <a:spcAft>
+                <a:spcPts val="300"/>
+              </a:spcAft>
+              <a:buNone/>
+            </a:pPr>
+            <a:r>
+              <a:rPr lang="en-US" sz="1200" dirty="0">
+                <a:solidFill>
+                  <a:srgbClr val="1C2833"/>
+                </a:solidFill>
+                <a:latin typeface="Arial" pitchFamily="34" charset="0"/>
+                <a:ea typeface="Arial" pitchFamily="34" charset="-122"/>
+                <a:cs typeface="Arial" pitchFamily="34" charset="-120"/>
+              </a:rPr>
+              <a:t>(Skip if cooking/tasting is not permitted at your school. Replace with a sketch-by-variety exercise.)</a:t>
+            </a:r>
+            <a:endParaRPr lang="en-US" sz="1200" dirty="0"/>
+          </a:p>
+        </p:txBody>
+      </p:sp>
+      <p:sp>
+        <p:nvSpPr>
+          <p:cNvPr id="5" name="Text 3"/>
+          <p:cNvSpPr/>
+          <p:nvPr/>
+        </p:nvSpPr>
+        <p:spPr>
+          <a:xfrm>
+            <a:off x="634901" y="1173063"/>
+            <a:ext cx="8102798" cy="975122"/>
+          </a:xfrm>
+          <a:prstGeom prst="rect">
+            <a:avLst/>
+          </a:prstGeom>
+          <a:noFill/>
+          <a:ln/>
+        </p:spPr>
+        <p:txBody>
+          <a:bodyPr wrap="square" lIns="0" tIns="0" rIns="0" bIns="0" rtlCol="0" anchor="t"/>
+          <a:lstStyle/>
+          <a:p>
+            <a:pPr algn="l" marL="342900" indent="-342900">
+              <a:lnSpc>
+                <a:spcPts val="1620"/>
+              </a:lnSpc>
+              <a:spcAft>
+                <a:spcPts val="300"/>
+              </a:spcAft>
+              <a:buSzPct val="100000"/>
+              <a:buChar char="•"/>
+            </a:pPr>
+            <a:r>
+              <a:rPr lang="en-US" sz="1200" dirty="0">
+                <a:solidFill>
+                  <a:srgbClr val="1C2833"/>
+                </a:solidFill>
+                <a:latin typeface="Arial" pitchFamily="34" charset="0"/>
+                <a:ea typeface="Arial" pitchFamily="34" charset="-122"/>
+                <a:cs typeface="Arial" pitchFamily="34" charset="-120"/>
+              </a:rPr>
+              <a:t>Set up two cups: spearmint chutney (from prepared chutney, very small portion per student) vs a peppermint candy crushed in water (tiny amount).</a:t>
+            </a:r>
+            <a:endParaRPr lang="en-US" sz="1200" dirty="0"/>
+          </a:p>
+          <a:p>
+            <a:pPr algn="l" marL="342900" indent="-342900">
+              <a:lnSpc>
+                <a:spcPts val="1620"/>
+              </a:lnSpc>
+              <a:spcAft>
+                <a:spcPts val="300"/>
+              </a:spcAft>
+              <a:buSzPct val="100000"/>
+              <a:buChar char="•"/>
+            </a:pPr>
+            <a:r>
+              <a:rPr lang="en-US" sz="1200" dirty="0">
+                <a:solidFill>
+                  <a:srgbClr val="1C2833"/>
+                </a:solidFill>
+                <a:latin typeface="Arial" pitchFamily="34" charset="0"/>
+                <a:ea typeface="Arial" pitchFamily="34" charset="-122"/>
+                <a:cs typeface="Arial" pitchFamily="34" charset="-120"/>
+              </a:rPr>
+              <a:t>Each pair tries to identify which is which by taste alone.</a:t>
+            </a:r>
+            <a:endParaRPr lang="en-US" sz="1200" dirty="0"/>
+          </a:p>
+          <a:p>
+            <a:pPr algn="l" marL="342900" indent="-342900">
+              <a:lnSpc>
+                <a:spcPts val="1620"/>
+              </a:lnSpc>
+              <a:spcAft>
+                <a:spcPts val="300"/>
+              </a:spcAft>
+              <a:buSzPct val="100000"/>
+              <a:buChar char="•"/>
+            </a:pPr>
+            <a:r>
+              <a:rPr lang="en-US" sz="1200" dirty="0">
+                <a:solidFill>
+                  <a:srgbClr val="1C2833"/>
+                </a:solidFill>
+                <a:latin typeface="Arial" pitchFamily="34" charset="0"/>
+                <a:ea typeface="Arial" pitchFamily="34" charset="-122"/>
+                <a:cs typeface="Arial" pitchFamily="34" charset="-120"/>
+              </a:rPr>
+              <a:t>Record what made them distinguishable — sharpness? Sweetness? Cooling intensity?</a:t>
+            </a:r>
+            <a:endParaRPr lang="en-US" sz="1200" dirty="0"/>
+          </a:p>
+        </p:txBody>
+      </p:sp>
+      <p:sp>
+        <p:nvSpPr>
           <p:cNvPr id="6" name="Text 4"/>
+          <p:cNvSpPr/>
+          <p:nvPr/>
+        </p:nvSpPr>
+        <p:spPr>
+          <a:xfrm>
+            <a:off x="406301" y="4434929"/>
+            <a:ext cx="8498026" cy="213271"/>
+          </a:xfrm>
+          <a:prstGeom prst="rect">
+            <a:avLst/>
+          </a:prstGeom>
+          <a:noFill/>
+          <a:ln/>
+        </p:spPr>
+        <p:txBody>
+          <a:bodyPr wrap="square" lIns="0" tIns="0" rIns="0" bIns="0" rtlCol="0" anchor="t"/>
+          <a:lstStyle/>
+          <a:p>
+            <a:pPr algn="l" indent="0" marL="0">
+              <a:lnSpc>
+                <a:spcPts val="1680"/>
+              </a:lnSpc>
+              <a:spcBef>
+                <a:spcPts val="300"/>
+              </a:spcBef>
+              <a:spcAft>
+                <a:spcPts val="300"/>
+              </a:spcAft>
+              <a:buNone/>
+            </a:pPr>
+            <a:r>
+              <a:rPr lang="en-US" sz="1200" dirty="0">
+                <a:solidFill>
+                  <a:srgbClr val="1C2833"/>
+                </a:solidFill>
+                <a:latin typeface="Arial" pitchFamily="34" charset="0"/>
+                <a:ea typeface="Arial" pitchFamily="34" charset="-122"/>
+                <a:cs typeface="Arial" pitchFamily="34" charset="-120"/>
+              </a:rPr>
+              <a:t>Middle ·  · IKS Curriculum</a:t>
+            </a:r>
+            <a:endParaRPr lang="en-US" sz="1200" dirty="0"/>
+          </a:p>
+        </p:txBody>
+      </p:sp>
+    </p:spTree>
+  </p:cSld>
+  <p:clrMapOvr>
+    <a:masterClrMapping/>
+  </p:clrMapOvr>
+</p:sld>
+</file>
+
+<file path=ppt/slides/slide15.xml><?xml version="1.0" encoding="utf-8"?>
+<p:sld xmlns:a="http://schemas.openxmlformats.org/drawingml/2006/main" xmlns:r="http://schemas.openxmlformats.org/officeDocument/2006/relationships" xmlns:p="http://schemas.openxmlformats.org/presentationml/2006/main">
+  <p:cSld name="Slide 15">
+    <p:bg>
+      <p:bgPr>
+        <a:solidFill>
+          <a:srgbClr val="FFFFFF"/>
+        </a:solidFill>
+      </p:bgPr>
+    </p:bg>
+    <p:spTree>
+      <p:nvGrpSpPr>
+        <p:cNvPr id="1" name=""/>
+        <p:cNvGrpSpPr/>
+        <p:nvPr/>
+      </p:nvGrpSpPr>
+      <p:grpSpPr>
+        <a:xfrm>
+          <a:off x="0" y="0"/>
+          <a:ext cx="0" cy="0"/>
+          <a:chOff x="0" y="0"/>
+          <a:chExt cx="0" cy="0"/>
+        </a:xfrm>
+      </p:grpSpPr>
+      <p:sp>
+        <p:nvSpPr>
+          <p:cNvPr id="2" name="Text 0"/>
+          <p:cNvSpPr/>
+          <p:nvPr/>
+        </p:nvSpPr>
+        <p:spPr>
+          <a:xfrm>
+            <a:off x="0" y="0"/>
+            <a:ext cx="9144000" cy="101501"/>
+          </a:xfrm>
+          <a:prstGeom prst="rect">
+            <a:avLst/>
+          </a:prstGeom>
+          <a:solidFill>
+            <a:srgbClr val="277884"/>
+          </a:solidFill>
+          <a:ln/>
+        </p:spPr>
+        <p:txBody>
+          <a:bodyPr wrap="square" rtlCol="0" anchor="ctr"/>
+          <a:lstStyle/>
+          <a:p>
+            <a:pPr indent="0" marL="0">
+              <a:buNone/>
+            </a:pPr>
+            <a:endParaRPr lang="en-US" dirty="0"/>
+          </a:p>
+        </p:txBody>
+      </p:sp>
+      <p:sp>
+        <p:nvSpPr>
+          <p:cNvPr id="3" name="Text 1"/>
+          <p:cNvSpPr/>
+          <p:nvPr/>
+        </p:nvSpPr>
+        <p:spPr>
+          <a:xfrm>
+            <a:off x="406301" y="457051"/>
+            <a:ext cx="8498026" cy="274290"/>
+          </a:xfrm>
+          <a:prstGeom prst="rect">
+            <a:avLst/>
+          </a:prstGeom>
+          <a:noFill/>
+          <a:ln/>
+        </p:spPr>
+        <p:txBody>
+          <a:bodyPr wrap="square" lIns="0" tIns="0" rIns="0" bIns="0" rtlCol="0" anchor="t"/>
+          <a:lstStyle/>
+          <a:p>
+            <a:pPr algn="l" indent="0" marL="0">
+              <a:lnSpc>
+                <a:spcPts val="2160"/>
+              </a:lnSpc>
+              <a:spcBef>
+                <a:spcPts val="600"/>
+              </a:spcBef>
+              <a:spcAft>
+                <a:spcPts val="800"/>
+              </a:spcAft>
+              <a:buNone/>
+            </a:pPr>
+            <a:r>
+              <a:rPr lang="en-US" sz="1800" b="1" dirty="0">
+                <a:solidFill>
+                  <a:srgbClr val="FE4447"/>
+                </a:solidFill>
+                <a:latin typeface="Georgia" pitchFamily="34" charset="0"/>
+                <a:ea typeface="Georgia" pitchFamily="34" charset="-122"/>
+                <a:cs typeface="Georgia" pitchFamily="34" charset="-120"/>
+              </a:rPr>
+              <a:t>Activity (15 min) — Variety taste-id challenge (cont.)</a:t>
+            </a:r>
+            <a:endParaRPr lang="en-US" sz="1800" dirty="0"/>
+          </a:p>
+        </p:txBody>
+      </p:sp>
+      <p:sp>
+        <p:nvSpPr>
+          <p:cNvPr id="4" name="Text 2"/>
+          <p:cNvSpPr/>
+          <p:nvPr/>
+        </p:nvSpPr>
+        <p:spPr>
+          <a:xfrm>
+            <a:off x="406301" y="870942"/>
+            <a:ext cx="8498026" cy="213271"/>
+          </a:xfrm>
+          <a:prstGeom prst="rect">
+            <a:avLst/>
+          </a:prstGeom>
+          <a:noFill/>
+          <a:ln/>
+        </p:spPr>
+        <p:txBody>
+          <a:bodyPr wrap="square" lIns="0" tIns="0" rIns="0" bIns="0" rtlCol="0" anchor="t"/>
+          <a:lstStyle/>
+          <a:p>
+            <a:pPr algn="l" indent="0" marL="0">
+              <a:lnSpc>
+                <a:spcPts val="1680"/>
+              </a:lnSpc>
+              <a:spcBef>
+                <a:spcPts val="300"/>
+              </a:spcBef>
+              <a:spcAft>
+                <a:spcPts val="300"/>
+              </a:spcAft>
+              <a:buNone/>
+            </a:pPr>
+            <a:r>
+              <a:rPr lang="en-US" sz="1200" b="1" dirty="0">
+                <a:solidFill>
+                  <a:srgbClr val="1C2833"/>
+                </a:solidFill>
+                <a:latin typeface="Arial" pitchFamily="34" charset="0"/>
+                <a:ea typeface="Arial" pitchFamily="34" charset="-122"/>
+                <a:cs typeface="Arial" pitchFamily="34" charset="-120"/>
+              </a:rPr>
+              <a:t>Final 5 min — group discussion:</a:t>
+            </a:r>
+            <a:endParaRPr lang="en-US" sz="1200" dirty="0"/>
+          </a:p>
+        </p:txBody>
+      </p:sp>
+      <p:sp>
+        <p:nvSpPr>
+          <p:cNvPr id="5" name="Text 3"/>
+          <p:cNvSpPr/>
+          <p:nvPr/>
+        </p:nvSpPr>
+        <p:spPr>
+          <a:xfrm>
+            <a:off x="634901" y="1173063"/>
+            <a:ext cx="8102798" cy="731341"/>
+          </a:xfrm>
+          <a:prstGeom prst="rect">
+            <a:avLst/>
+          </a:prstGeom>
+          <a:noFill/>
+          <a:ln/>
+        </p:spPr>
+        <p:txBody>
+          <a:bodyPr wrap="square" lIns="0" tIns="0" rIns="0" bIns="0" rtlCol="0" anchor="t"/>
+          <a:lstStyle/>
+          <a:p>
+            <a:pPr algn="l" marL="342900" indent="-342900">
+              <a:lnSpc>
+                <a:spcPts val="1620"/>
+              </a:lnSpc>
+              <a:spcAft>
+                <a:spcPts val="300"/>
+              </a:spcAft>
+              <a:buSzPct val="100000"/>
+              <a:buChar char="•"/>
+            </a:pPr>
+            <a:r>
+              <a:rPr lang="en-US" sz="1200" i="1" dirty="0">
+                <a:solidFill>
+                  <a:srgbClr val="1C2833"/>
+                </a:solidFill>
+                <a:latin typeface="Arial" pitchFamily="34" charset="0"/>
+                <a:ea typeface="Arial" pitchFamily="34" charset="-122"/>
+                <a:cs typeface="Arial" pitchFamily="34" charset="-120"/>
+              </a:rPr>
+              <a:t>"Why does mint feel cool when it isn't actually cold?"</a:t>
+            </a:r>
+            <a:pPr algn="l" indent="0" marL="0">
+              <a:lnSpc>
+                <a:spcPts val="1620"/>
+              </a:lnSpc>
+              <a:spcAft>
+                <a:spcPts val="300"/>
+              </a:spcAft>
+              <a:buNone/>
+            </a:pPr>
+            <a:r>
+              <a:rPr lang="en-US" sz="1200" dirty="0">
+                <a:solidFill>
+                  <a:srgbClr val="1C2833"/>
+                </a:solidFill>
+                <a:latin typeface="Arial" pitchFamily="34" charset="0"/>
+                <a:ea typeface="Arial" pitchFamily="34" charset="-122"/>
+                <a:cs typeface="Arial" pitchFamily="34" charset="-120"/>
+              </a:rPr>
+              <a:t> (TRPM8 activation — students should be able to explain this back.)</a:t>
+            </a:r>
+            <a:endParaRPr lang="en-US" sz="1200" dirty="0"/>
+          </a:p>
+          <a:p>
+            <a:pPr algn="l" marL="342900" indent="-342900">
+              <a:lnSpc>
+                <a:spcPts val="1620"/>
+              </a:lnSpc>
+              <a:spcAft>
+                <a:spcPts val="300"/>
+              </a:spcAft>
+              <a:buSzPct val="100000"/>
+              <a:buChar char="•"/>
+            </a:pPr>
+            <a:r>
+              <a:rPr lang="en-US" sz="1200" i="1" dirty="0">
+                <a:solidFill>
+                  <a:srgbClr val="1C2833"/>
+                </a:solidFill>
+                <a:latin typeface="Arial" pitchFamily="34" charset="0"/>
+                <a:ea typeface="Arial" pitchFamily="34" charset="-122"/>
+                <a:cs typeface="Arial" pitchFamily="34" charset="-120"/>
+              </a:rPr>
+              <a:t>"What's the connection between the Ayurvedic word</a:t>
+            </a:r>
+            <a:pPr algn="l" indent="0" marL="0">
+              <a:lnSpc>
+                <a:spcPts val="1620"/>
+              </a:lnSpc>
+              <a:spcAft>
+                <a:spcPts val="300"/>
+              </a:spcAft>
+              <a:buNone/>
+            </a:pPr>
+            <a:r>
+              <a:rPr lang="en-US" sz="1200" dirty="0">
+                <a:solidFill>
+                  <a:srgbClr val="1C2833"/>
+                </a:solidFill>
+                <a:latin typeface="Arial" pitchFamily="34" charset="0"/>
+                <a:ea typeface="Arial" pitchFamily="34" charset="-122"/>
+                <a:cs typeface="Arial" pitchFamily="34" charset="-120"/>
+              </a:rPr>
+              <a:t>śīta</a:t>
+            </a:r>
+            <a:pPr algn="l" indent="0" marL="0">
+              <a:lnSpc>
+                <a:spcPts val="1620"/>
+              </a:lnSpc>
+              <a:spcAft>
+                <a:spcPts val="300"/>
+              </a:spcAft>
+              <a:buNone/>
+            </a:pPr>
+            <a:r>
+              <a:rPr lang="en-US" sz="1200" i="1" dirty="0">
+                <a:solidFill>
+                  <a:srgbClr val="1C2833"/>
+                </a:solidFill>
+                <a:latin typeface="Arial" pitchFamily="34" charset="0"/>
+                <a:ea typeface="Arial" pitchFamily="34" charset="-122"/>
+                <a:cs typeface="Arial" pitchFamily="34" charset="-120"/>
+              </a:rPr>
+              <a:t> and this molecular trick?"</a:t>
+            </a:r>
+            <a:pPr algn="l" indent="0" marL="0">
+              <a:lnSpc>
+                <a:spcPts val="1620"/>
+              </a:lnSpc>
+              <a:spcAft>
+                <a:spcPts val="300"/>
+              </a:spcAft>
+              <a:buNone/>
+            </a:pPr>
+            <a:r>
+              <a:rPr lang="en-US" sz="1200" dirty="0">
+                <a:solidFill>
+                  <a:srgbClr val="1C2833"/>
+                </a:solidFill>
+                <a:latin typeface="Arial" pitchFamily="34" charset="0"/>
+                <a:ea typeface="Arial" pitchFamily="34" charset="-122"/>
+                <a:cs typeface="Arial" pitchFamily="34" charset="-120"/>
+              </a:rPr>
+              <a:t> (The tradition was tracking the effect; the science explains the cause.)</a:t>
+            </a:r>
+            <a:endParaRPr lang="en-US" sz="1200" dirty="0"/>
+          </a:p>
+        </p:txBody>
+      </p:sp>
+      <p:sp>
+        <p:nvSpPr>
+          <p:cNvPr id="6" name="Text 4"/>
+          <p:cNvSpPr/>
+          <p:nvPr/>
+        </p:nvSpPr>
+        <p:spPr>
+          <a:xfrm>
+            <a:off x="406301" y="4434929"/>
+            <a:ext cx="8498026" cy="213271"/>
+          </a:xfrm>
+          <a:prstGeom prst="rect">
+            <a:avLst/>
+          </a:prstGeom>
+          <a:noFill/>
+          <a:ln/>
+        </p:spPr>
+        <p:txBody>
+          <a:bodyPr wrap="square" lIns="0" tIns="0" rIns="0" bIns="0" rtlCol="0" anchor="t"/>
+          <a:lstStyle/>
+          <a:p>
+            <a:pPr algn="l" indent="0" marL="0">
+              <a:lnSpc>
+                <a:spcPts val="1680"/>
+              </a:lnSpc>
+              <a:spcBef>
+                <a:spcPts val="300"/>
+              </a:spcBef>
+              <a:spcAft>
+                <a:spcPts val="300"/>
+              </a:spcAft>
+              <a:buNone/>
+            </a:pPr>
+            <a:r>
+              <a:rPr lang="en-US" sz="1200" dirty="0">
+                <a:solidFill>
+                  <a:srgbClr val="1C2833"/>
+                </a:solidFill>
+                <a:latin typeface="Arial" pitchFamily="34" charset="0"/>
+                <a:ea typeface="Arial" pitchFamily="34" charset="-122"/>
+                <a:cs typeface="Arial" pitchFamily="34" charset="-120"/>
+              </a:rPr>
+              <a:t>Middle ·  · IKS Curriculum</a:t>
+            </a:r>
+            <a:endParaRPr lang="en-US" sz="1200" dirty="0"/>
+          </a:p>
+        </p:txBody>
+      </p:sp>
+    </p:spTree>
+  </p:cSld>
+  <p:clrMapOvr>
+    <a:masterClrMapping/>
+  </p:clrMapOvr>
+</p:sld>
+</file>
+
+<file path=ppt/slides/slide16.xml><?xml version="1.0" encoding="utf-8"?>
+<p:sld xmlns:a="http://schemas.openxmlformats.org/drawingml/2006/main" xmlns:r="http://schemas.openxmlformats.org/officeDocument/2006/relationships" xmlns:p="http://schemas.openxmlformats.org/presentationml/2006/main">
+  <p:cSld name="Slide 16">
+    <p:bg>
+      <p:bgPr>
+        <a:solidFill>
+          <a:srgbClr val="FFFFFF"/>
+        </a:solidFill>
+      </p:bgPr>
+    </p:bg>
+    <p:spTree>
+      <p:nvGrpSpPr>
+        <p:cNvPr id="1" name=""/>
+        <p:cNvGrpSpPr/>
+        <p:nvPr/>
+      </p:nvGrpSpPr>
+      <p:grpSpPr>
+        <a:xfrm>
+          <a:off x="0" y="0"/>
+          <a:ext cx="0" cy="0"/>
+          <a:chOff x="0" y="0"/>
+          <a:chExt cx="0" cy="0"/>
+        </a:xfrm>
+      </p:grpSpPr>
+      <p:sp>
+        <p:nvSpPr>
+          <p:cNvPr id="2" name="Text 0"/>
+          <p:cNvSpPr/>
+          <p:nvPr/>
+        </p:nvSpPr>
+        <p:spPr>
+          <a:xfrm>
+            <a:off x="0" y="0"/>
+            <a:ext cx="9144000" cy="101501"/>
+          </a:xfrm>
+          <a:prstGeom prst="rect">
+            <a:avLst/>
+          </a:prstGeom>
+          <a:solidFill>
+            <a:srgbClr val="277884"/>
+          </a:solidFill>
+          <a:ln/>
+        </p:spPr>
+        <p:txBody>
+          <a:bodyPr wrap="square" rtlCol="0" anchor="ctr"/>
+          <a:lstStyle/>
+          <a:p>
+            <a:pPr indent="0" marL="0">
+              <a:buNone/>
+            </a:pPr>
+            <a:endParaRPr lang="en-US" dirty="0"/>
+          </a:p>
+        </p:txBody>
+      </p:sp>
+      <p:sp>
+        <p:nvSpPr>
+          <p:cNvPr id="3" name="Text 1"/>
+          <p:cNvSpPr/>
+          <p:nvPr/>
+        </p:nvSpPr>
+        <p:spPr>
+          <a:xfrm>
+            <a:off x="406301" y="457051"/>
+            <a:ext cx="8498026" cy="274290"/>
+          </a:xfrm>
+          <a:prstGeom prst="rect">
+            <a:avLst/>
+          </a:prstGeom>
+          <a:noFill/>
+          <a:ln/>
+        </p:spPr>
+        <p:txBody>
+          <a:bodyPr wrap="square" lIns="0" tIns="0" rIns="0" bIns="0" rtlCol="0" anchor="t"/>
+          <a:lstStyle/>
+          <a:p>
+            <a:pPr algn="l" indent="0" marL="0">
+              <a:lnSpc>
+                <a:spcPts val="2160"/>
+              </a:lnSpc>
+              <a:spcBef>
+                <a:spcPts val="600"/>
+              </a:spcBef>
+              <a:spcAft>
+                <a:spcPts val="800"/>
+              </a:spcAft>
+              <a:buNone/>
+            </a:pPr>
+            <a:r>
+              <a:rPr lang="en-US" sz="1800" b="1" dirty="0">
+                <a:solidFill>
+                  <a:srgbClr val="FE4447"/>
+                </a:solidFill>
+                <a:latin typeface="Georgia" pitchFamily="34" charset="0"/>
+                <a:ea typeface="Georgia" pitchFamily="34" charset="-122"/>
+                <a:cs typeface="Georgia" pitchFamily="34" charset="-120"/>
+              </a:rPr>
+              <a:t>Wrap-up (5 min)</a:t>
+            </a:r>
+            <a:endParaRPr lang="en-US" sz="1800" dirty="0"/>
+          </a:p>
+        </p:txBody>
+      </p:sp>
+      <p:sp>
+        <p:nvSpPr>
+          <p:cNvPr id="4" name="Text 2"/>
+          <p:cNvSpPr/>
+          <p:nvPr/>
+        </p:nvSpPr>
+        <p:spPr>
+          <a:xfrm>
+            <a:off x="634901" y="883593"/>
+            <a:ext cx="8102798" cy="731341"/>
+          </a:xfrm>
+          <a:prstGeom prst="rect">
+            <a:avLst/>
+          </a:prstGeom>
+          <a:noFill/>
+          <a:ln/>
+        </p:spPr>
+        <p:txBody>
+          <a:bodyPr wrap="square" lIns="0" tIns="0" rIns="0" bIns="0" rtlCol="0" anchor="t"/>
+          <a:lstStyle/>
+          <a:p>
+            <a:pPr algn="l" marL="342900" indent="-342900">
+              <a:lnSpc>
+                <a:spcPts val="1620"/>
+              </a:lnSpc>
+              <a:spcAft>
+                <a:spcPts val="300"/>
+              </a:spcAft>
+              <a:buSzPct val="100000"/>
+              <a:buChar char="•"/>
+            </a:pPr>
+            <a:r>
+              <a:rPr lang="en-US" sz="1200" dirty="0">
+                <a:solidFill>
+                  <a:srgbClr val="1C2833"/>
+                </a:solidFill>
+                <a:latin typeface="Arial" pitchFamily="34" charset="0"/>
+                <a:ea typeface="Arial" pitchFamily="34" charset="-122"/>
+                <a:cs typeface="Arial" pitchFamily="34" charset="-120"/>
+              </a:rPr>
+              <a:t>Restate the safety rule.</a:t>
+            </a:r>
+            <a:endParaRPr lang="en-US" sz="1200" dirty="0"/>
+          </a:p>
+          <a:p>
+            <a:pPr algn="l" marL="342900" indent="-342900">
+              <a:lnSpc>
+                <a:spcPts val="1620"/>
+              </a:lnSpc>
+              <a:spcAft>
+                <a:spcPts val="300"/>
+              </a:spcAft>
+              <a:buSzPct val="100000"/>
+              <a:buChar char="•"/>
+            </a:pPr>
+            <a:r>
+              <a:rPr lang="en-US" sz="1200" dirty="0">
+                <a:solidFill>
+                  <a:srgbClr val="1C2833"/>
+                </a:solidFill>
+                <a:latin typeface="Arial" pitchFamily="34" charset="0"/>
+                <a:ea typeface="Arial" pitchFamily="34" charset="-122"/>
+                <a:cs typeface="Arial" pitchFamily="34" charset="-120"/>
+              </a:rPr>
+              <a:t>Preview Day 8: </a:t>
+            </a:r>
+            <a:pPr algn="l" indent="0" marL="0">
+              <a:lnSpc>
+                <a:spcPts val="1620"/>
+              </a:lnSpc>
+              <a:spcAft>
+                <a:spcPts val="300"/>
+              </a:spcAft>
+              <a:buNone/>
+            </a:pPr>
+            <a:r>
+              <a:rPr lang="en-US" sz="1200" i="1" dirty="0">
+                <a:solidFill>
+                  <a:srgbClr val="1C2833"/>
+                </a:solidFill>
+                <a:latin typeface="Arial" pitchFamily="34" charset="0"/>
+                <a:ea typeface="Arial" pitchFamily="34" charset="-122"/>
+                <a:cs typeface="Arial" pitchFamily="34" charset="-120"/>
+              </a:rPr>
+              <a:t>"Tomorrow we put all six herbs together — and look at them through the doṣa lens. Heating, cooling, what goes with what."</a:t>
+            </a:r>
+            <a:endParaRPr lang="en-US" sz="1200" dirty="0"/>
+          </a:p>
+        </p:txBody>
+      </p:sp>
+      <p:sp>
+        <p:nvSpPr>
+          <p:cNvPr id="5" name="Text 3"/>
+          <p:cNvSpPr/>
+          <p:nvPr/>
+        </p:nvSpPr>
+        <p:spPr>
+          <a:xfrm>
+            <a:off x="406301" y="4434929"/>
+            <a:ext cx="8498026" cy="213271"/>
+          </a:xfrm>
+          <a:prstGeom prst="rect">
+            <a:avLst/>
+          </a:prstGeom>
+          <a:noFill/>
+          <a:ln/>
+        </p:spPr>
+        <p:txBody>
+          <a:bodyPr wrap="square" lIns="0" tIns="0" rIns="0" bIns="0" rtlCol="0" anchor="t"/>
+          <a:lstStyle/>
+          <a:p>
+            <a:pPr algn="l" indent="0" marL="0">
+              <a:lnSpc>
+                <a:spcPts val="1680"/>
+              </a:lnSpc>
+              <a:spcBef>
+                <a:spcPts val="300"/>
+              </a:spcBef>
+              <a:spcAft>
+                <a:spcPts val="300"/>
+              </a:spcAft>
+              <a:buNone/>
+            </a:pPr>
+            <a:r>
+              <a:rPr lang="en-US" sz="1200" dirty="0">
+                <a:solidFill>
+                  <a:srgbClr val="1C2833"/>
+                </a:solidFill>
+                <a:latin typeface="Arial" pitchFamily="34" charset="0"/>
+                <a:ea typeface="Arial" pitchFamily="34" charset="-122"/>
+                <a:cs typeface="Arial" pitchFamily="34" charset="-120"/>
+              </a:rPr>
+              <a:t>Middle ·  · IKS Curriculum</a:t>
+            </a:r>
+            <a:endParaRPr lang="en-US" sz="1200" dirty="0"/>
+          </a:p>
+        </p:txBody>
+      </p:sp>
+    </p:spTree>
+  </p:cSld>
+  <p:clrMapOvr>
+    <a:masterClrMapping/>
+  </p:clrMapOvr>
+</p:sld>
+</file>
+
+<file path=ppt/slides/slide17.xml><?xml version="1.0" encoding="utf-8"?>
+<p:sld xmlns:a="http://schemas.openxmlformats.org/drawingml/2006/main" xmlns:r="http://schemas.openxmlformats.org/officeDocument/2006/relationships" xmlns:p="http://schemas.openxmlformats.org/presentationml/2006/main">
+  <p:cSld name="Slide 17">
+    <p:bg>
+      <p:bgPr>
+        <a:solidFill>
+          <a:srgbClr val="FFFFFF"/>
+        </a:solidFill>
+      </p:bgPr>
+    </p:bg>
+    <p:spTree>
+      <p:nvGrpSpPr>
+        <p:cNvPr id="1" name=""/>
+        <p:cNvGrpSpPr/>
+        <p:nvPr/>
+      </p:nvGrpSpPr>
+      <p:grpSpPr>
+        <a:xfrm>
+          <a:off x="0" y="0"/>
+          <a:ext cx="0" cy="0"/>
+          <a:chOff x="0" y="0"/>
+          <a:chExt cx="0" cy="0"/>
+        </a:xfrm>
+      </p:grpSpPr>
+      <p:sp>
+        <p:nvSpPr>
+          <p:cNvPr id="2" name="Text 0"/>
+          <p:cNvSpPr/>
+          <p:nvPr/>
+        </p:nvSpPr>
+        <p:spPr>
+          <a:xfrm>
+            <a:off x="0" y="0"/>
+            <a:ext cx="9144000" cy="101501"/>
+          </a:xfrm>
+          <a:prstGeom prst="rect">
+            <a:avLst/>
+          </a:prstGeom>
+          <a:solidFill>
+            <a:srgbClr val="277884"/>
+          </a:solidFill>
+          <a:ln/>
+        </p:spPr>
+        <p:txBody>
+          <a:bodyPr wrap="square" rtlCol="0" anchor="ctr"/>
+          <a:lstStyle/>
+          <a:p>
+            <a:pPr indent="0" marL="0">
+              <a:buNone/>
+            </a:pPr>
+            <a:endParaRPr lang="en-US" dirty="0"/>
+          </a:p>
+        </p:txBody>
+      </p:sp>
+      <p:sp>
+        <p:nvSpPr>
+          <p:cNvPr id="3" name="Text 1"/>
+          <p:cNvSpPr/>
+          <p:nvPr/>
+        </p:nvSpPr>
+        <p:spPr>
+          <a:xfrm>
+            <a:off x="406301" y="457051"/>
+            <a:ext cx="8498026" cy="274290"/>
+          </a:xfrm>
+          <a:prstGeom prst="rect">
+            <a:avLst/>
+          </a:prstGeom>
+          <a:noFill/>
+          <a:ln/>
+        </p:spPr>
+        <p:txBody>
+          <a:bodyPr wrap="square" lIns="0" tIns="0" rIns="0" bIns="0" rtlCol="0" anchor="t"/>
+          <a:lstStyle/>
+          <a:p>
+            <a:pPr algn="l" indent="0" marL="0">
+              <a:lnSpc>
+                <a:spcPts val="2160"/>
+              </a:lnSpc>
+              <a:spcBef>
+                <a:spcPts val="600"/>
+              </a:spcBef>
+              <a:spcAft>
+                <a:spcPts val="800"/>
+              </a:spcAft>
+              <a:buNone/>
+            </a:pPr>
+            <a:r>
+              <a:rPr lang="en-US" sz="1800" b="1" dirty="0">
+                <a:solidFill>
+                  <a:srgbClr val="FE4447"/>
+                </a:solidFill>
+                <a:latin typeface="Georgia" pitchFamily="34" charset="0"/>
+                <a:ea typeface="Georgia" pitchFamily="34" charset="-122"/>
+                <a:cs typeface="Georgia" pitchFamily="34" charset="-120"/>
+              </a:rPr>
+              <a:t>Homework</a:t>
+            </a:r>
+            <a:endParaRPr lang="en-US" sz="1800" dirty="0"/>
+          </a:p>
+        </p:txBody>
+      </p:sp>
+      <p:sp>
+        <p:nvSpPr>
+          <p:cNvPr id="4" name="Text 2"/>
+          <p:cNvSpPr/>
+          <p:nvPr/>
+        </p:nvSpPr>
+        <p:spPr>
+          <a:xfrm>
+            <a:off x="634901" y="883593"/>
+            <a:ext cx="8102798" cy="487561"/>
+          </a:xfrm>
+          <a:prstGeom prst="rect">
+            <a:avLst/>
+          </a:prstGeom>
+          <a:noFill/>
+          <a:ln/>
+        </p:spPr>
+        <p:txBody>
+          <a:bodyPr wrap="square" lIns="0" tIns="0" rIns="0" bIns="0" rtlCol="0" anchor="t"/>
+          <a:lstStyle/>
+          <a:p>
+            <a:pPr algn="l" marL="342900" indent="-342900">
+              <a:lnSpc>
+                <a:spcPts val="1620"/>
+              </a:lnSpc>
+              <a:spcAft>
+                <a:spcPts val="300"/>
+              </a:spcAft>
+              <a:buSzPct val="100000"/>
+              <a:buChar char="•"/>
+            </a:pPr>
+            <a:r>
+              <a:rPr lang="en-US" sz="1200" dirty="0">
+                <a:solidFill>
+                  <a:srgbClr val="1C2833"/>
+                </a:solidFill>
+                <a:latin typeface="Arial" pitchFamily="34" charset="0"/>
+                <a:ea typeface="Arial" pitchFamily="34" charset="-122"/>
+                <a:cs typeface="Arial" pitchFamily="34" charset="-120"/>
+              </a:rPr>
+              <a:t>Find pudina (or any mint) in your home or near it. Sketch the leaf. Identify which variety if you can. Note: where do you encounter mint most often in your week?</a:t>
+            </a:r>
+            <a:endParaRPr lang="en-US" sz="1200" dirty="0"/>
+          </a:p>
+        </p:txBody>
+      </p:sp>
+      <p:sp>
+        <p:nvSpPr>
+          <p:cNvPr id="5" name="Text 3"/>
+          <p:cNvSpPr/>
+          <p:nvPr/>
+        </p:nvSpPr>
+        <p:spPr>
+          <a:xfrm>
+            <a:off x="406301" y="4434929"/>
+            <a:ext cx="8498026" cy="213271"/>
+          </a:xfrm>
+          <a:prstGeom prst="rect">
+            <a:avLst/>
+          </a:prstGeom>
+          <a:noFill/>
+          <a:ln/>
+        </p:spPr>
+        <p:txBody>
+          <a:bodyPr wrap="square" lIns="0" tIns="0" rIns="0" bIns="0" rtlCol="0" anchor="t"/>
+          <a:lstStyle/>
+          <a:p>
+            <a:pPr algn="l" indent="0" marL="0">
+              <a:lnSpc>
+                <a:spcPts val="1680"/>
+              </a:lnSpc>
+              <a:spcBef>
+                <a:spcPts val="300"/>
+              </a:spcBef>
+              <a:spcAft>
+                <a:spcPts val="300"/>
+              </a:spcAft>
+              <a:buNone/>
+            </a:pPr>
+            <a:r>
+              <a:rPr lang="en-US" sz="1200" dirty="0">
+                <a:solidFill>
+                  <a:srgbClr val="1C2833"/>
+                </a:solidFill>
+                <a:latin typeface="Arial" pitchFamily="34" charset="0"/>
+                <a:ea typeface="Arial" pitchFamily="34" charset="-122"/>
+                <a:cs typeface="Arial" pitchFamily="34" charset="-120"/>
+              </a:rPr>
+              <a:t>Middle ·  · IKS Curriculum</a:t>
+            </a:r>
+            <a:endParaRPr lang="en-US" sz="1200" dirty="0"/>
+          </a:p>
+        </p:txBody>
+      </p:sp>
+    </p:spTree>
+  </p:cSld>
+  <p:clrMapOvr>
+    <a:masterClrMapping/>
+  </p:clrMapOvr>
+</p:sld>
+</file>
+
+<file path=ppt/slides/slide18.xml><?xml version="1.0" encoding="utf-8"?>
+<p:sld xmlns:a="http://schemas.openxmlformats.org/drawingml/2006/main" xmlns:r="http://schemas.openxmlformats.org/officeDocument/2006/relationships" xmlns:p="http://schemas.openxmlformats.org/presentationml/2006/main">
+  <p:cSld name="Slide 18">
+    <p:bg>
+      <p:bgPr>
+        <a:solidFill>
+          <a:srgbClr val="FFFFFF"/>
+        </a:solidFill>
+      </p:bgPr>
+    </p:bg>
+    <p:spTree>
+      <p:nvGrpSpPr>
+        <p:cNvPr id="1" name=""/>
+        <p:cNvGrpSpPr/>
+        <p:nvPr/>
+      </p:nvGrpSpPr>
+      <p:grpSpPr>
+        <a:xfrm>
+          <a:off x="0" y="0"/>
+          <a:ext cx="0" cy="0"/>
+          <a:chOff x="0" y="0"/>
+          <a:chExt cx="0" cy="0"/>
+        </a:xfrm>
+      </p:grpSpPr>
+      <p:sp>
+        <p:nvSpPr>
+          <p:cNvPr id="2" name="Text 0"/>
+          <p:cNvSpPr/>
+          <p:nvPr/>
+        </p:nvSpPr>
+        <p:spPr>
+          <a:xfrm>
+            <a:off x="0" y="0"/>
+            <a:ext cx="9144000" cy="101501"/>
+          </a:xfrm>
+          <a:prstGeom prst="rect">
+            <a:avLst/>
+          </a:prstGeom>
+          <a:solidFill>
+            <a:srgbClr val="277884"/>
+          </a:solidFill>
+          <a:ln/>
+        </p:spPr>
+        <p:txBody>
+          <a:bodyPr wrap="square" rtlCol="0" anchor="ctr"/>
+          <a:lstStyle/>
+          <a:p>
+            <a:pPr indent="0" marL="0">
+              <a:buNone/>
+            </a:pPr>
+            <a:endParaRPr lang="en-US" dirty="0"/>
+          </a:p>
+        </p:txBody>
+      </p:sp>
+      <p:sp>
+        <p:nvSpPr>
+          <p:cNvPr id="3" name="Text 1"/>
+          <p:cNvSpPr/>
+          <p:nvPr/>
+        </p:nvSpPr>
+        <p:spPr>
+          <a:xfrm>
+            <a:off x="406301" y="457051"/>
+            <a:ext cx="8498026" cy="274290"/>
+          </a:xfrm>
+          <a:prstGeom prst="rect">
+            <a:avLst/>
+          </a:prstGeom>
+          <a:noFill/>
+          <a:ln/>
+        </p:spPr>
+        <p:txBody>
+          <a:bodyPr wrap="square" lIns="0" tIns="0" rIns="0" bIns="0" rtlCol="0" anchor="t"/>
+          <a:lstStyle/>
+          <a:p>
+            <a:pPr algn="l" indent="0" marL="0">
+              <a:lnSpc>
+                <a:spcPts val="2160"/>
+              </a:lnSpc>
+              <a:spcBef>
+                <a:spcPts val="600"/>
+              </a:spcBef>
+              <a:spcAft>
+                <a:spcPts val="800"/>
+              </a:spcAft>
+              <a:buNone/>
+            </a:pPr>
+            <a:r>
+              <a:rPr lang="en-US" sz="1800" b="1" dirty="0">
+                <a:solidFill>
+                  <a:srgbClr val="FE4447"/>
+                </a:solidFill>
+                <a:latin typeface="Georgia" pitchFamily="34" charset="0"/>
+                <a:ea typeface="Georgia" pitchFamily="34" charset="-122"/>
+                <a:cs typeface="Georgia" pitchFamily="34" charset="-120"/>
+              </a:rPr>
+              <a:t>Differentiation</a:t>
+            </a:r>
+            <a:endParaRPr lang="en-US" sz="1800" dirty="0"/>
+          </a:p>
+        </p:txBody>
+      </p:sp>
+      <p:sp>
+        <p:nvSpPr>
+          <p:cNvPr id="4" name="Text 2"/>
+          <p:cNvSpPr/>
+          <p:nvPr/>
+        </p:nvSpPr>
+        <p:spPr>
+          <a:xfrm>
+            <a:off x="634901" y="883593"/>
+            <a:ext cx="8102798" cy="731341"/>
+          </a:xfrm>
+          <a:prstGeom prst="rect">
+            <a:avLst/>
+          </a:prstGeom>
+          <a:noFill/>
+          <a:ln/>
+        </p:spPr>
+        <p:txBody>
+          <a:bodyPr wrap="square" lIns="0" tIns="0" rIns="0" bIns="0" rtlCol="0" anchor="t"/>
+          <a:lstStyle/>
+          <a:p>
+            <a:pPr algn="l" marL="342900" indent="-342900">
+              <a:lnSpc>
+                <a:spcPts val="1620"/>
+              </a:lnSpc>
+              <a:spcAft>
+                <a:spcPts val="300"/>
+              </a:spcAft>
+              <a:buSzPct val="100000"/>
+              <a:buChar char="•"/>
+            </a:pPr>
+            <a:r>
+              <a:rPr lang="en-US" sz="1200" b="1" dirty="0">
+                <a:solidFill>
+                  <a:srgbClr val="1C2833"/>
+                </a:solidFill>
+                <a:latin typeface="Arial" pitchFamily="34" charset="0"/>
+                <a:ea typeface="Arial" pitchFamily="34" charset="-122"/>
+                <a:cs typeface="Arial" pitchFamily="34" charset="-120"/>
+              </a:rPr>
+              <a:t>One tier up:</a:t>
+            </a:r>
+            <a:pPr algn="l" indent="0" marL="0">
+              <a:lnSpc>
+                <a:spcPts val="1620"/>
+              </a:lnSpc>
+              <a:spcAft>
+                <a:spcPts val="300"/>
+              </a:spcAft>
+              <a:buNone/>
+            </a:pPr>
+            <a:r>
+              <a:rPr lang="en-US" sz="1200" dirty="0">
+                <a:solidFill>
+                  <a:srgbClr val="1C2833"/>
+                </a:solidFill>
+                <a:latin typeface="Arial" pitchFamily="34" charset="0"/>
+                <a:ea typeface="Arial" pitchFamily="34" charset="-122"/>
+                <a:cs typeface="Arial" pitchFamily="34" charset="-120"/>
+              </a:rPr>
+              <a:t> TRPM8 was identified as the cold receptor in 2002. Look up the David Julius lab work on TRP channels (2021 Nobel Prize in Physiology or Medicine). Be ready to share one finding next class.</a:t>
+            </a:r>
+            <a:endParaRPr lang="en-US" sz="1200" dirty="0"/>
+          </a:p>
+          <a:p>
+            <a:pPr algn="l" marL="342900" indent="-342900">
+              <a:lnSpc>
+                <a:spcPts val="1620"/>
+              </a:lnSpc>
+              <a:spcAft>
+                <a:spcPts val="300"/>
+              </a:spcAft>
+              <a:buSzPct val="100000"/>
+              <a:buChar char="•"/>
+            </a:pPr>
+            <a:r>
+              <a:rPr lang="en-US" sz="1200" b="1" dirty="0">
+                <a:solidFill>
+                  <a:srgbClr val="1C2833"/>
+                </a:solidFill>
+                <a:latin typeface="Arial" pitchFamily="34" charset="0"/>
+                <a:ea typeface="Arial" pitchFamily="34" charset="-122"/>
+                <a:cs typeface="Arial" pitchFamily="34" charset="-120"/>
+              </a:rPr>
+              <a:t>One tier down:</a:t>
+            </a:r>
+            <a:pPr algn="l" indent="0" marL="0">
+              <a:lnSpc>
+                <a:spcPts val="1620"/>
+              </a:lnSpc>
+              <a:spcAft>
+                <a:spcPts val="300"/>
+              </a:spcAft>
+              <a:buNone/>
+            </a:pPr>
+            <a:r>
+              <a:rPr lang="en-US" sz="1200" dirty="0">
+                <a:solidFill>
+                  <a:srgbClr val="1C2833"/>
+                </a:solidFill>
+                <a:latin typeface="Arial" pitchFamily="34" charset="0"/>
+                <a:ea typeface="Arial" pitchFamily="34" charset="-122"/>
+                <a:cs typeface="Arial" pitchFamily="34" charset="-120"/>
+              </a:rPr>
+              <a:t> Focus on identifying mint by smell and remembering "menthol = cool feeling."</a:t>
+            </a:r>
+            <a:endParaRPr lang="en-US" sz="1200" dirty="0"/>
+          </a:p>
+        </p:txBody>
+      </p:sp>
+      <p:sp>
+        <p:nvSpPr>
+          <p:cNvPr id="5" name="Text 3"/>
+          <p:cNvSpPr/>
+          <p:nvPr/>
+        </p:nvSpPr>
+        <p:spPr>
+          <a:xfrm>
+            <a:off x="406301" y="4434929"/>
+            <a:ext cx="8498026" cy="213271"/>
+          </a:xfrm>
+          <a:prstGeom prst="rect">
+            <a:avLst/>
+          </a:prstGeom>
+          <a:noFill/>
+          <a:ln/>
+        </p:spPr>
+        <p:txBody>
+          <a:bodyPr wrap="square" lIns="0" tIns="0" rIns="0" bIns="0" rtlCol="0" anchor="t"/>
+          <a:lstStyle/>
+          <a:p>
+            <a:pPr algn="l" indent="0" marL="0">
+              <a:lnSpc>
+                <a:spcPts val="1680"/>
+              </a:lnSpc>
+              <a:spcBef>
+                <a:spcPts val="300"/>
+              </a:spcBef>
+              <a:spcAft>
+                <a:spcPts val="300"/>
+              </a:spcAft>
+              <a:buNone/>
+            </a:pPr>
+            <a:r>
+              <a:rPr lang="en-US" sz="1200" dirty="0">
+                <a:solidFill>
+                  <a:srgbClr val="1C2833"/>
+                </a:solidFill>
+                <a:latin typeface="Arial" pitchFamily="34" charset="0"/>
+                <a:ea typeface="Arial" pitchFamily="34" charset="-122"/>
+                <a:cs typeface="Arial" pitchFamily="34" charset="-120"/>
+              </a:rPr>
+              <a:t>Middle ·  · IKS Curriculum</a:t>
+            </a:r>
+            <a:endParaRPr lang="en-US" sz="1200" dirty="0"/>
+          </a:p>
+        </p:txBody>
+      </p:sp>
+    </p:spTree>
+  </p:cSld>
+  <p:clrMapOvr>
+    <a:masterClrMapping/>
+  </p:clrMapOvr>
+</p:sld>
+</file>
+
+<file path=ppt/slides/slide19.xml><?xml version="1.0" encoding="utf-8"?>
+<p:sld xmlns:a="http://schemas.openxmlformats.org/drawingml/2006/main" xmlns:r="http://schemas.openxmlformats.org/officeDocument/2006/relationships" xmlns:p="http://schemas.openxmlformats.org/presentationml/2006/main">
+  <p:cSld name="Slide 19">
+    <p:bg>
+      <p:bgPr>
+        <a:solidFill>
+          <a:srgbClr val="FFFFFF"/>
+        </a:solidFill>
+      </p:bgPr>
+    </p:bg>
+    <p:spTree>
+      <p:nvGrpSpPr>
+        <p:cNvPr id="1" name=""/>
+        <p:cNvGrpSpPr/>
+        <p:nvPr/>
+      </p:nvGrpSpPr>
+      <p:grpSpPr>
+        <a:xfrm>
+          <a:off x="0" y="0"/>
+          <a:ext cx="0" cy="0"/>
+          <a:chOff x="0" y="0"/>
+          <a:chExt cx="0" cy="0"/>
+        </a:xfrm>
+      </p:grpSpPr>
+      <p:sp>
+        <p:nvSpPr>
+          <p:cNvPr id="2" name="Text 0"/>
+          <p:cNvSpPr/>
+          <p:nvPr/>
+        </p:nvSpPr>
+        <p:spPr>
+          <a:xfrm>
+            <a:off x="0" y="0"/>
+            <a:ext cx="9144000" cy="101501"/>
+          </a:xfrm>
+          <a:prstGeom prst="rect">
+            <a:avLst/>
+          </a:prstGeom>
+          <a:solidFill>
+            <a:srgbClr val="277884"/>
+          </a:solidFill>
+          <a:ln/>
+        </p:spPr>
+        <p:txBody>
+          <a:bodyPr wrap="square" rtlCol="0" anchor="ctr"/>
+          <a:lstStyle/>
+          <a:p>
+            <a:pPr indent="0" marL="0">
+              <a:buNone/>
+            </a:pPr>
+            <a:endParaRPr lang="en-US" dirty="0"/>
+          </a:p>
+        </p:txBody>
+      </p:sp>
+      <p:sp>
+        <p:nvSpPr>
+          <p:cNvPr id="3" name="Text 1"/>
+          <p:cNvSpPr/>
+          <p:nvPr/>
+        </p:nvSpPr>
+        <p:spPr>
+          <a:xfrm>
+            <a:off x="406301" y="457051"/>
+            <a:ext cx="8498026" cy="274290"/>
+          </a:xfrm>
+          <a:prstGeom prst="rect">
+            <a:avLst/>
+          </a:prstGeom>
+          <a:noFill/>
+          <a:ln/>
+        </p:spPr>
+        <p:txBody>
+          <a:bodyPr wrap="square" lIns="0" tIns="0" rIns="0" bIns="0" rtlCol="0" anchor="t"/>
+          <a:lstStyle/>
+          <a:p>
+            <a:pPr algn="l" indent="0" marL="0">
+              <a:lnSpc>
+                <a:spcPts val="2160"/>
+              </a:lnSpc>
+              <a:spcBef>
+                <a:spcPts val="600"/>
+              </a:spcBef>
+              <a:spcAft>
+                <a:spcPts val="800"/>
+              </a:spcAft>
+              <a:buNone/>
+            </a:pPr>
+            <a:r>
+              <a:rPr lang="en-US" sz="1800" b="1" dirty="0">
+                <a:solidFill>
+                  <a:srgbClr val="FE4447"/>
+                </a:solidFill>
+                <a:latin typeface="Georgia" pitchFamily="34" charset="0"/>
+                <a:ea typeface="Georgia" pitchFamily="34" charset="-122"/>
+                <a:cs typeface="Georgia" pitchFamily="34" charset="-120"/>
+              </a:rPr>
+              <a:t>Teacher notes</a:t>
+            </a:r>
+            <a:endParaRPr lang="en-US" sz="1800" dirty="0"/>
+          </a:p>
+        </p:txBody>
+      </p:sp>
+      <p:sp>
+        <p:nvSpPr>
+          <p:cNvPr id="4" name="Text 2"/>
+          <p:cNvSpPr/>
+          <p:nvPr/>
+        </p:nvSpPr>
+        <p:spPr>
+          <a:xfrm>
+            <a:off x="634901" y="883593"/>
+            <a:ext cx="8102798" cy="1592163"/>
+          </a:xfrm>
+          <a:prstGeom prst="rect">
+            <a:avLst/>
+          </a:prstGeom>
+          <a:noFill/>
+          <a:ln/>
+        </p:spPr>
+        <p:txBody>
+          <a:bodyPr wrap="square" lIns="0" tIns="0" rIns="0" bIns="0" rtlCol="0" anchor="t"/>
+          <a:lstStyle/>
+          <a:p>
+            <a:pPr algn="l" marL="342900" indent="-342900">
+              <a:lnSpc>
+                <a:spcPts val="1620"/>
+              </a:lnSpc>
+              <a:spcAft>
+                <a:spcPts val="300"/>
+              </a:spcAft>
+              <a:buSzPct val="100000"/>
+              <a:buChar char="•"/>
+            </a:pPr>
+            <a:r>
+              <a:rPr lang="en-US" sz="1200" dirty="0">
+                <a:solidFill>
+                  <a:srgbClr val="1C2833"/>
+                </a:solidFill>
+                <a:latin typeface="Arial" pitchFamily="34" charset="0"/>
+                <a:ea typeface="Arial" pitchFamily="34" charset="-122"/>
+                <a:cs typeface="Arial" pitchFamily="34" charset="-120"/>
+              </a:rPr>
+              <a:t>The </a:t>
+            </a:r>
+            <a:pPr algn="l" indent="0" marL="0">
+              <a:lnSpc>
+                <a:spcPts val="1620"/>
+              </a:lnSpc>
+              <a:spcAft>
+                <a:spcPts val="300"/>
+              </a:spcAft>
+              <a:buNone/>
+            </a:pPr>
+            <a:r>
+              <a:rPr lang="en-US" sz="1200" b="1" dirty="0">
+                <a:solidFill>
+                  <a:srgbClr val="1C2833"/>
+                </a:solidFill>
+                <a:latin typeface="Arial" pitchFamily="34" charset="0"/>
+                <a:ea typeface="Arial" pitchFamily="34" charset="-122"/>
+                <a:cs typeface="Arial" pitchFamily="34" charset="-120"/>
+              </a:rPr>
+              <a:t>TRPM8 mechanism</a:t>
+            </a:r>
+            <a:pPr algn="l" indent="0" marL="0">
+              <a:lnSpc>
+                <a:spcPts val="1620"/>
+              </a:lnSpc>
+              <a:spcAft>
+                <a:spcPts val="300"/>
+              </a:spcAft>
+              <a:buNone/>
+            </a:pPr>
+            <a:r>
+              <a:rPr lang="en-US" sz="1200" dirty="0">
+                <a:solidFill>
+                  <a:srgbClr val="1C2833"/>
+                </a:solidFill>
+                <a:latin typeface="Arial" pitchFamily="34" charset="0"/>
+                <a:ea typeface="Arial" pitchFamily="34" charset="-122"/>
+                <a:cs typeface="Arial" pitchFamily="34" charset="-120"/>
+              </a:rPr>
+              <a:t> is the single most rewarding teaching moment of this module for a science-leaning student. The bridge from "cooling herb" (tradition) to "TRPM8 activation" (Nobel-winning science) is satisfying and intellectually honest.</a:t>
+            </a:r>
+            <a:endParaRPr lang="en-US" sz="1200" dirty="0"/>
+          </a:p>
+          <a:p>
+            <a:pPr algn="l" marL="342900" indent="-342900">
+              <a:lnSpc>
+                <a:spcPts val="1620"/>
+              </a:lnSpc>
+              <a:spcAft>
+                <a:spcPts val="300"/>
+              </a:spcAft>
+              <a:buSzPct val="100000"/>
+              <a:buChar char="•"/>
+            </a:pPr>
+            <a:r>
+              <a:rPr lang="en-US" sz="1200" dirty="0">
+                <a:solidFill>
+                  <a:srgbClr val="1C2833"/>
+                </a:solidFill>
+                <a:latin typeface="Arial" pitchFamily="34" charset="0"/>
+                <a:ea typeface="Arial" pitchFamily="34" charset="-122"/>
+                <a:cs typeface="Arial" pitchFamily="34" charset="-120"/>
+              </a:rPr>
+              <a:t>If anyone in your class connects "menthol cooling = chilli burning = same kind of receptor trick," that's the inferential leap to highlight publicly. Praise it.</a:t>
+            </a:r>
+            <a:endParaRPr lang="en-US" sz="1200" dirty="0"/>
+          </a:p>
+          <a:p>
+            <a:pPr algn="l" marL="342900" indent="-342900">
+              <a:lnSpc>
+                <a:spcPts val="1620"/>
+              </a:lnSpc>
+              <a:spcAft>
+                <a:spcPts val="300"/>
+              </a:spcAft>
+              <a:buSzPct val="100000"/>
+              <a:buChar char="•"/>
+            </a:pPr>
+            <a:r>
+              <a:rPr lang="en-US" sz="1200" dirty="0">
+                <a:solidFill>
+                  <a:srgbClr val="1C2833"/>
+                </a:solidFill>
+                <a:latin typeface="Arial" pitchFamily="34" charset="0"/>
+                <a:ea typeface="Arial" pitchFamily="34" charset="-122"/>
+                <a:cs typeface="Arial" pitchFamily="34" charset="-120"/>
+              </a:rPr>
+              <a:t>A few students may bring up vapour rubs / chest balms used in childhood. Acknowledge the use; note the infant caution; don't sermonise.</a:t>
+            </a:r>
+            <a:endParaRPr lang="en-US" sz="1200" dirty="0"/>
+          </a:p>
+        </p:txBody>
+      </p:sp>
+      <p:sp>
+        <p:nvSpPr>
+          <p:cNvPr id="5" name="Text 3"/>
           <p:cNvSpPr/>
           <p:nvPr/>
         </p:nvSpPr>
@@ -3039,7 +6404,7 @@
                 <a:ea typeface="Georgia" pitchFamily="34" charset="-122"/>
                 <a:cs typeface="Georgia" pitchFamily="34" charset="-120"/>
               </a:rPr>
-              <a:t>Materials</a:t>
+              <a:t>Learning objective</a:t>
             </a:r>
             <a:endParaRPr lang="en-US" sz="1800" dirty="0"/>
           </a:p>
@@ -3087,7 +6452,503 @@
                 <a:ea typeface="Arial" pitchFamily="34" charset="-122"/>
                 <a:cs typeface="Arial" pitchFamily="34" charset="-120"/>
               </a:rPr>
-              <a:t>– Two sprigs of mint, ideally from two different varieties (spearmint and peppermint are easiest to source) – A small jar of dried mint leaves – A few peppermint candies or a small tube of menthol-containing balm — for the smell bridge (do not let students apply balm to their skin in class) – Ice cube + a small bowl (for the demo on cooling sensation) – Whiteboard</a:t>
+              <a:t>By the end of this lesson, students can identify </a:t>
+            </a:r>
+            <a:pPr algn="l" indent="0" marL="0">
+              <a:lnSpc>
+                <a:spcPts val="1680"/>
+              </a:lnSpc>
+              <a:spcBef>
+                <a:spcPts val="300"/>
+              </a:spcBef>
+              <a:spcAft>
+                <a:spcPts val="300"/>
+              </a:spcAft>
+              <a:buNone/>
+            </a:pPr>
+            <a:r>
+              <a:rPr lang="en-US" sz="1200" i="1" dirty="0">
+                <a:solidFill>
+                  <a:srgbClr val="1C2833"/>
+                </a:solidFill>
+                <a:latin typeface="Arial" pitchFamily="34" charset="0"/>
+                <a:ea typeface="Arial" pitchFamily="34" charset="-122"/>
+                <a:cs typeface="Arial" pitchFamily="34" charset="-120"/>
+              </a:rPr>
+              <a:t>pudīnā</a:t>
+            </a:r>
+            <a:pPr algn="l" indent="0" marL="0">
+              <a:lnSpc>
+                <a:spcPts val="1680"/>
+              </a:lnSpc>
+              <a:spcBef>
+                <a:spcPts val="300"/>
+              </a:spcBef>
+              <a:spcAft>
+                <a:spcPts val="300"/>
+              </a:spcAft>
+              <a:buNone/>
+            </a:pPr>
+            <a:r>
+              <a:rPr lang="en-US" sz="1200" dirty="0">
+                <a:solidFill>
+                  <a:srgbClr val="1C2833"/>
+                </a:solidFill>
+                <a:latin typeface="Arial" pitchFamily="34" charset="0"/>
+                <a:ea typeface="Arial" pitchFamily="34" charset="-122"/>
+                <a:cs typeface="Arial" pitchFamily="34" charset="-120"/>
+              </a:rPr>
+              <a:t> (</a:t>
+            </a:r>
+            <a:pPr algn="l" indent="0" marL="0">
+              <a:lnSpc>
+                <a:spcPts val="1680"/>
+              </a:lnSpc>
+              <a:spcBef>
+                <a:spcPts val="300"/>
+              </a:spcBef>
+              <a:spcAft>
+                <a:spcPts val="300"/>
+              </a:spcAft>
+              <a:buNone/>
+            </a:pPr>
+            <a:r>
+              <a:rPr lang="en-US" sz="1200" i="1" dirty="0">
+                <a:solidFill>
+                  <a:srgbClr val="1C2833"/>
+                </a:solidFill>
+                <a:latin typeface="Arial" pitchFamily="34" charset="0"/>
+                <a:ea typeface="Arial" pitchFamily="34" charset="-122"/>
+                <a:cs typeface="Arial" pitchFamily="34" charset="-120"/>
+              </a:rPr>
+              <a:t>Mentha</a:t>
+            </a:r>
+            <a:pPr algn="l" indent="0" marL="0">
+              <a:lnSpc>
+                <a:spcPts val="1680"/>
+              </a:lnSpc>
+              <a:spcBef>
+                <a:spcPts val="300"/>
+              </a:spcBef>
+              <a:spcAft>
+                <a:spcPts val="300"/>
+              </a:spcAft>
+              <a:buNone/>
+            </a:pPr>
+            <a:r>
+              <a:rPr lang="en-US" sz="1200" dirty="0">
+                <a:solidFill>
+                  <a:srgbClr val="1C2833"/>
+                </a:solidFill>
+                <a:latin typeface="Arial" pitchFamily="34" charset="0"/>
+                <a:ea typeface="Arial" pitchFamily="34" charset="-122"/>
+                <a:cs typeface="Arial" pitchFamily="34" charset="-120"/>
+              </a:rPr>
+              <a:t> species) by leaf shape and the characteristic cooling smell, name </a:t>
+            </a:r>
+            <a:pPr algn="l" indent="0" marL="0">
+              <a:lnSpc>
+                <a:spcPts val="1680"/>
+              </a:lnSpc>
+              <a:spcBef>
+                <a:spcPts val="300"/>
+              </a:spcBef>
+              <a:spcAft>
+                <a:spcPts val="300"/>
+              </a:spcAft>
+              <a:buNone/>
+            </a:pPr>
+            <a:r>
+              <a:rPr lang="en-US" sz="1200" b="1" dirty="0">
+                <a:solidFill>
+                  <a:srgbClr val="1C2833"/>
+                </a:solidFill>
+                <a:latin typeface="Arial" pitchFamily="34" charset="0"/>
+                <a:ea typeface="Arial" pitchFamily="34" charset="-122"/>
+                <a:cs typeface="Arial" pitchFamily="34" charset="-120"/>
+              </a:rPr>
+              <a:t>menthol</a:t>
+            </a:r>
+            <a:pPr algn="l" indent="0" marL="0">
+              <a:lnSpc>
+                <a:spcPts val="1680"/>
+              </a:lnSpc>
+              <a:spcBef>
+                <a:spcPts val="300"/>
+              </a:spcBef>
+              <a:spcAft>
+                <a:spcPts val="300"/>
+              </a:spcAft>
+              <a:buNone/>
+            </a:pPr>
+            <a:r>
+              <a:rPr lang="en-US" sz="1200" dirty="0">
+                <a:solidFill>
+                  <a:srgbClr val="1C2833"/>
+                </a:solidFill>
+                <a:latin typeface="Arial" pitchFamily="34" charset="0"/>
+                <a:ea typeface="Arial" pitchFamily="34" charset="-122"/>
+                <a:cs typeface="Arial" pitchFamily="34" charset="-120"/>
+              </a:rPr>
+              <a:t> as the principal volatile, distinguish two common varieties (spearmint vs peppermint), and explain that mint is classified as </a:t>
+            </a:r>
+            <a:pPr algn="l" indent="0" marL="0">
+              <a:lnSpc>
+                <a:spcPts val="1680"/>
+              </a:lnSpc>
+              <a:spcBef>
+                <a:spcPts val="300"/>
+              </a:spcBef>
+              <a:spcAft>
+                <a:spcPts val="300"/>
+              </a:spcAft>
+              <a:buNone/>
+            </a:pPr>
+            <a:r>
+              <a:rPr lang="en-US" sz="1200" i="1" dirty="0">
+                <a:solidFill>
+                  <a:srgbClr val="1C2833"/>
+                </a:solidFill>
+                <a:latin typeface="Arial" pitchFamily="34" charset="0"/>
+                <a:ea typeface="Arial" pitchFamily="34" charset="-122"/>
+                <a:cs typeface="Arial" pitchFamily="34" charset="-120"/>
+              </a:rPr>
+              <a:t>śīta</a:t>
+            </a:r>
+            <a:pPr algn="l" indent="0" marL="0">
+              <a:lnSpc>
+                <a:spcPts val="1680"/>
+              </a:lnSpc>
+              <a:spcBef>
+                <a:spcPts val="300"/>
+              </a:spcBef>
+              <a:spcAft>
+                <a:spcPts val="300"/>
+              </a:spcAft>
+              <a:buNone/>
+            </a:pPr>
+            <a:r>
+              <a:rPr lang="en-US" sz="1200" dirty="0">
+                <a:solidFill>
+                  <a:srgbClr val="1C2833"/>
+                </a:solidFill>
+                <a:latin typeface="Arial" pitchFamily="34" charset="0"/>
+                <a:ea typeface="Arial" pitchFamily="34" charset="-122"/>
+                <a:cs typeface="Arial" pitchFamily="34" charset="-120"/>
+              </a:rPr>
+              <a:t> (cooling) in Ayurveda — a classification that aligns with its measurable physiological effect.</a:t>
+            </a:r>
+            <a:endParaRPr lang="en-US" sz="1200" dirty="0"/>
+          </a:p>
+        </p:txBody>
+      </p:sp>
+      <p:sp>
+        <p:nvSpPr>
+          <p:cNvPr id="5" name="Text 3"/>
+          <p:cNvSpPr/>
+          <p:nvPr/>
+        </p:nvSpPr>
+        <p:spPr>
+          <a:xfrm>
+            <a:off x="406301" y="4434929"/>
+            <a:ext cx="8498026" cy="213271"/>
+          </a:xfrm>
+          <a:prstGeom prst="rect">
+            <a:avLst/>
+          </a:prstGeom>
+          <a:noFill/>
+          <a:ln/>
+        </p:spPr>
+        <p:txBody>
+          <a:bodyPr wrap="square" lIns="0" tIns="0" rIns="0" bIns="0" rtlCol="0" anchor="t"/>
+          <a:lstStyle/>
+          <a:p>
+            <a:pPr algn="l" indent="0" marL="0">
+              <a:lnSpc>
+                <a:spcPts val="1680"/>
+              </a:lnSpc>
+              <a:spcBef>
+                <a:spcPts val="300"/>
+              </a:spcBef>
+              <a:spcAft>
+                <a:spcPts val="300"/>
+              </a:spcAft>
+              <a:buNone/>
+            </a:pPr>
+            <a:r>
+              <a:rPr lang="en-US" sz="1200" dirty="0">
+                <a:solidFill>
+                  <a:srgbClr val="1C2833"/>
+                </a:solidFill>
+                <a:latin typeface="Arial" pitchFamily="34" charset="0"/>
+                <a:ea typeface="Arial" pitchFamily="34" charset="-122"/>
+                <a:cs typeface="Arial" pitchFamily="34" charset="-120"/>
+              </a:rPr>
+              <a:t>Middle ·  · IKS Curriculum</a:t>
+            </a:r>
+            <a:endParaRPr lang="en-US" sz="1200" dirty="0"/>
+          </a:p>
+        </p:txBody>
+      </p:sp>
+    </p:spTree>
+  </p:cSld>
+  <p:clrMapOvr>
+    <a:masterClrMapping/>
+  </p:clrMapOvr>
+</p:sld>
+</file>
+
+<file path=ppt/slides/slide20.xml><?xml version="1.0" encoding="utf-8"?>
+<p:sld xmlns:a="http://schemas.openxmlformats.org/drawingml/2006/main" xmlns:r="http://schemas.openxmlformats.org/officeDocument/2006/relationships" xmlns:p="http://schemas.openxmlformats.org/presentationml/2006/main">
+  <p:cSld name="Slide 20">
+    <p:bg>
+      <p:bgPr>
+        <a:solidFill>
+          <a:srgbClr val="FFFFFF"/>
+        </a:solidFill>
+      </p:bgPr>
+    </p:bg>
+    <p:spTree>
+      <p:nvGrpSpPr>
+        <p:cNvPr id="1" name=""/>
+        <p:cNvGrpSpPr/>
+        <p:nvPr/>
+      </p:nvGrpSpPr>
+      <p:grpSpPr>
+        <a:xfrm>
+          <a:off x="0" y="0"/>
+          <a:ext cx="0" cy="0"/>
+          <a:chOff x="0" y="0"/>
+          <a:chExt cx="0" cy="0"/>
+        </a:xfrm>
+      </p:grpSpPr>
+      <p:sp>
+        <p:nvSpPr>
+          <p:cNvPr id="2" name="Text 0"/>
+          <p:cNvSpPr/>
+          <p:nvPr/>
+        </p:nvSpPr>
+        <p:spPr>
+          <a:xfrm>
+            <a:off x="0" y="0"/>
+            <a:ext cx="9144000" cy="101501"/>
+          </a:xfrm>
+          <a:prstGeom prst="rect">
+            <a:avLst/>
+          </a:prstGeom>
+          <a:solidFill>
+            <a:srgbClr val="277884"/>
+          </a:solidFill>
+          <a:ln/>
+        </p:spPr>
+        <p:txBody>
+          <a:bodyPr wrap="square" rtlCol="0" anchor="ctr"/>
+          <a:lstStyle/>
+          <a:p>
+            <a:pPr indent="0" marL="0">
+              <a:buNone/>
+            </a:pPr>
+            <a:endParaRPr lang="en-US" dirty="0"/>
+          </a:p>
+        </p:txBody>
+      </p:sp>
+      <p:sp>
+        <p:nvSpPr>
+          <p:cNvPr id="3" name="Text 1"/>
+          <p:cNvSpPr/>
+          <p:nvPr/>
+        </p:nvSpPr>
+        <p:spPr>
+          <a:xfrm>
+            <a:off x="406301" y="457051"/>
+            <a:ext cx="8498026" cy="274290"/>
+          </a:xfrm>
+          <a:prstGeom prst="rect">
+            <a:avLst/>
+          </a:prstGeom>
+          <a:noFill/>
+          <a:ln/>
+        </p:spPr>
+        <p:txBody>
+          <a:bodyPr wrap="square" lIns="0" tIns="0" rIns="0" bIns="0" rtlCol="0" anchor="t"/>
+          <a:lstStyle/>
+          <a:p>
+            <a:pPr algn="l" indent="0" marL="0">
+              <a:lnSpc>
+                <a:spcPts val="2160"/>
+              </a:lnSpc>
+              <a:spcBef>
+                <a:spcPts val="600"/>
+              </a:spcBef>
+              <a:spcAft>
+                <a:spcPts val="800"/>
+              </a:spcAft>
+              <a:buNone/>
+            </a:pPr>
+            <a:r>
+              <a:rPr lang="en-US" sz="1800" b="1" dirty="0">
+                <a:solidFill>
+                  <a:srgbClr val="FE4447"/>
+                </a:solidFill>
+                <a:latin typeface="Georgia" pitchFamily="34" charset="0"/>
+                <a:ea typeface="Georgia" pitchFamily="34" charset="-122"/>
+                <a:cs typeface="Georgia" pitchFamily="34" charset="-120"/>
+              </a:rPr>
+              <a:t>Citation(s) used in this lesson</a:t>
+            </a:r>
+            <a:endParaRPr lang="en-US" sz="1800" dirty="0"/>
+          </a:p>
+        </p:txBody>
+      </p:sp>
+      <p:sp>
+        <p:nvSpPr>
+          <p:cNvPr id="4" name="Text 2"/>
+          <p:cNvSpPr/>
+          <p:nvPr/>
+        </p:nvSpPr>
+        <p:spPr>
+          <a:xfrm>
+            <a:off x="634901" y="883593"/>
+            <a:ext cx="8102798" cy="1386483"/>
+          </a:xfrm>
+          <a:prstGeom prst="rect">
+            <a:avLst/>
+          </a:prstGeom>
+          <a:noFill/>
+          <a:ln/>
+        </p:spPr>
+        <p:txBody>
+          <a:bodyPr wrap="square" lIns="0" tIns="0" rIns="0" bIns="0" rtlCol="0" anchor="t"/>
+          <a:lstStyle/>
+          <a:p>
+            <a:pPr algn="l" marL="342900" indent="-342900">
+              <a:lnSpc>
+                <a:spcPts val="1620"/>
+              </a:lnSpc>
+              <a:spcAft>
+                <a:spcPts val="300"/>
+              </a:spcAft>
+              <a:buSzPct val="100000"/>
+              <a:buChar char="•"/>
+            </a:pPr>
+            <a:r>
+              <a:rPr lang="en-US" sz="1200" dirty="0">
+                <a:solidFill>
+                  <a:srgbClr val="1C2833"/>
+                </a:solidFill>
+                <a:latin typeface="Arial" pitchFamily="34" charset="0"/>
+                <a:ea typeface="Arial" pitchFamily="34" charset="-122"/>
+                <a:cs typeface="Arial" pitchFamily="34" charset="-120"/>
+              </a:rPr>
+              <a:t>Menthol activation of TRPM8: established in molecular pharmacology. David Julius and colleagues identified TRPM8 as the cold/menthol receptor (Julius lab, UCSF; 2021 Nobel Prize work). Reference is at the lab level only; specific paper not cited.</a:t>
+            </a:r>
+            <a:endParaRPr lang="en-US" sz="1200" dirty="0"/>
+          </a:p>
+          <a:p>
+            <a:pPr algn="l" marL="342900" indent="-342900">
+              <a:lnSpc>
+                <a:spcPts val="1620"/>
+              </a:lnSpc>
+              <a:spcAft>
+                <a:spcPts val="300"/>
+              </a:spcAft>
+              <a:buSzPct val="100000"/>
+              <a:buChar char="•"/>
+            </a:pPr>
+            <a:r>
+              <a:rPr lang="en-US" sz="1200" dirty="0">
+                <a:solidFill>
+                  <a:srgbClr val="1C2833"/>
+                </a:solidFill>
+                <a:latin typeface="Arial" pitchFamily="34" charset="0"/>
+                <a:ea typeface="Arial" pitchFamily="34" charset="-122"/>
+                <a:cs typeface="Arial" pitchFamily="34" charset="-120"/>
+              </a:rPr>
+              <a:t>Peppermint oil for IBS: multiple systematic reviews exist. Teachers can search "peppermint oil IBS systematic review" in PubMed.</a:t>
+            </a:r>
+            <a:endParaRPr lang="en-US" sz="1200" dirty="0"/>
+          </a:p>
+          <a:p>
+            <a:pPr algn="l" marL="342900" indent="-342900">
+              <a:lnSpc>
+                <a:spcPts val="1620"/>
+              </a:lnSpc>
+              <a:spcAft>
+                <a:spcPts val="300"/>
+              </a:spcAft>
+              <a:buSzPct val="100000"/>
+              <a:buChar char="•"/>
+            </a:pPr>
+            <a:r>
+              <a:rPr lang="en-US" sz="1200" i="1" dirty="0">
+                <a:solidFill>
+                  <a:srgbClr val="1C2833"/>
+                </a:solidFill>
+                <a:latin typeface="Arial" pitchFamily="34" charset="0"/>
+                <a:ea typeface="Arial" pitchFamily="34" charset="-122"/>
+                <a:cs typeface="Arial" pitchFamily="34" charset="-120"/>
+              </a:rPr>
+              <a:t>Pudīnā</a:t>
+            </a:r>
+            <a:pPr algn="l" indent="0" marL="0">
+              <a:lnSpc>
+                <a:spcPts val="1620"/>
+              </a:lnSpc>
+              <a:spcAft>
+                <a:spcPts val="300"/>
+              </a:spcAft>
+              <a:buNone/>
+            </a:pPr>
+            <a:r>
+              <a:rPr lang="en-US" sz="1200" dirty="0">
+                <a:solidFill>
+                  <a:srgbClr val="1C2833"/>
+                </a:solidFill>
+                <a:latin typeface="Arial" pitchFamily="34" charset="0"/>
+                <a:ea typeface="Arial" pitchFamily="34" charset="-122"/>
+                <a:cs typeface="Arial" pitchFamily="34" charset="-120"/>
+              </a:rPr>
+              <a:t> as </a:t>
+            </a:r>
+            <a:pPr algn="l" indent="0" marL="0">
+              <a:lnSpc>
+                <a:spcPts val="1620"/>
+              </a:lnSpc>
+              <a:spcAft>
+                <a:spcPts val="300"/>
+              </a:spcAft>
+              <a:buNone/>
+            </a:pPr>
+            <a:r>
+              <a:rPr lang="en-US" sz="1200" i="1" dirty="0">
+                <a:solidFill>
+                  <a:srgbClr val="1C2833"/>
+                </a:solidFill>
+                <a:latin typeface="Arial" pitchFamily="34" charset="0"/>
+                <a:ea typeface="Arial" pitchFamily="34" charset="-122"/>
+                <a:cs typeface="Arial" pitchFamily="34" charset="-120"/>
+              </a:rPr>
+              <a:t>śīta</a:t>
+            </a:r>
+            <a:pPr algn="l" indent="0" marL="0">
+              <a:lnSpc>
+                <a:spcPts val="1620"/>
+              </a:lnSpc>
+              <a:spcAft>
+                <a:spcPts val="300"/>
+              </a:spcAft>
+              <a:buNone/>
+            </a:pPr>
+            <a:r>
+              <a:rPr lang="en-US" sz="1200" dirty="0">
+                <a:solidFill>
+                  <a:srgbClr val="1C2833"/>
+                </a:solidFill>
+                <a:latin typeface="Arial" pitchFamily="34" charset="0"/>
+                <a:ea typeface="Arial" pitchFamily="34" charset="-122"/>
+                <a:cs typeface="Arial" pitchFamily="34" charset="-120"/>
+              </a:rPr>
+              <a:t> — standard Ayurvedic nighantu reference; chapter-level only.</a:t>
             </a:r>
             <a:endParaRPr lang="en-US" sz="1200" dirty="0"/>
           </a:p>
@@ -3245,7 +7106,7 @@
                 <a:ea typeface="Georgia" pitchFamily="34" charset="-122"/>
                 <a:cs typeface="Georgia" pitchFamily="34" charset="-120"/>
               </a:rPr>
-              <a:t>Vocabulary introduced today</a:t>
+              <a:t>Materials</a:t>
             </a:r>
             <a:endParaRPr lang="en-US" sz="1800" dirty="0"/>
           </a:p>
@@ -3260,7 +7121,7 @@
         <p:spPr>
           <a:xfrm>
             <a:off x="634901" y="883593"/>
-            <a:ext cx="8102798" cy="975122"/>
+            <a:ext cx="8102798" cy="1462683"/>
           </a:xfrm>
           <a:prstGeom prst="rect">
             <a:avLst/>
@@ -3283,75 +7144,15 @@
               <a:buChar char="•"/>
             </a:pPr>
             <a:r>
-              <a:rPr lang="en-US" sz="1200" i="1" dirty="0">
-                <a:solidFill>
-                  <a:srgbClr val="1C2833"/>
-                </a:solidFill>
-                <a:latin typeface="Arial" pitchFamily="34" charset="0"/>
-                <a:ea typeface="Arial" pitchFamily="34" charset="-122"/>
-                <a:cs typeface="Arial" pitchFamily="34" charset="-120"/>
-              </a:rPr>
-              <a:t>pudīnā</a:t>
-            </a:r>
-            <a:pPr algn="l" indent="0" marL="0">
-              <a:lnSpc>
-                <a:spcPts val="1620"/>
-              </a:lnSpc>
-              <a:spcAft>
-                <a:spcPts val="300"/>
-              </a:spcAft>
-              <a:buNone/>
-            </a:pPr>
-            <a:r>
-              <a:rPr lang="en-US" sz="1200" dirty="0">
-                <a:solidFill>
-                  <a:srgbClr val="1C2833"/>
-                </a:solidFill>
-                <a:latin typeface="Arial" pitchFamily="34" charset="0"/>
-                <a:ea typeface="Arial" pitchFamily="34" charset="-122"/>
-                <a:cs typeface="Arial" pitchFamily="34" charset="-120"/>
-              </a:rPr>
-              <a:t> (IAST: pudīnā) — mint. Commonly refers to </a:t>
-            </a:r>
-            <a:pPr algn="l" indent="0" marL="0">
-              <a:lnSpc>
-                <a:spcPts val="1620"/>
-              </a:lnSpc>
-              <a:spcAft>
-                <a:spcPts val="300"/>
-              </a:spcAft>
-              <a:buNone/>
-            </a:pPr>
-            <a:r>
-              <a:rPr lang="en-US" sz="1200" i="1" dirty="0">
-                <a:solidFill>
-                  <a:srgbClr val="1C2833"/>
-                </a:solidFill>
-                <a:latin typeface="Arial" pitchFamily="34" charset="0"/>
-                <a:ea typeface="Arial" pitchFamily="34" charset="-122"/>
-                <a:cs typeface="Arial" pitchFamily="34" charset="-120"/>
-              </a:rPr>
-              <a:t>Mentha spicata</a:t>
-            </a:r>
-            <a:pPr algn="l" indent="0" marL="0">
-              <a:lnSpc>
-                <a:spcPts val="1620"/>
-              </a:lnSpc>
-              <a:spcAft>
-                <a:spcPts val="300"/>
-              </a:spcAft>
-              <a:buNone/>
-            </a:pPr>
-            <a:r>
-              <a:rPr lang="en-US" sz="1200" dirty="0">
-                <a:solidFill>
-                  <a:srgbClr val="1C2833"/>
-                </a:solidFill>
-                <a:latin typeface="Arial" pitchFamily="34" charset="0"/>
-                <a:ea typeface="Arial" pitchFamily="34" charset="-122"/>
-                <a:cs typeface="Arial" pitchFamily="34" charset="-120"/>
-              </a:rPr>
-              <a:t> (spearmint) in Indian kitchens.</a:t>
+              <a:rPr lang="en-US" sz="1200" dirty="0">
+                <a:solidFill>
+                  <a:srgbClr val="1C2833"/>
+                </a:solidFill>
+                <a:latin typeface="Arial" pitchFamily="34" charset="0"/>
+                <a:ea typeface="Arial" pitchFamily="34" charset="-122"/>
+                <a:cs typeface="Arial" pitchFamily="34" charset="-120"/>
+              </a:rPr>
+              <a:t>Two sprigs of mint, ideally from two different varieties (spearmint and peppermint are easiest to source)</a:t>
             </a:r>
             <a:endParaRPr lang="en-US" sz="1200" dirty="0"/>
           </a:p>
@@ -3367,75 +7168,15 @@
               <a:buChar char="•"/>
             </a:pPr>
             <a:r>
-              <a:rPr lang="en-US" sz="1200" b="1" dirty="0">
-                <a:solidFill>
-                  <a:srgbClr val="1C2833"/>
-                </a:solidFill>
-                <a:latin typeface="Arial" pitchFamily="34" charset="0"/>
-                <a:ea typeface="Arial" pitchFamily="34" charset="-122"/>
-                <a:cs typeface="Arial" pitchFamily="34" charset="-120"/>
-              </a:rPr>
-              <a:t>Menthol</a:t>
-            </a:r>
-            <a:pPr algn="l" indent="0" marL="0">
-              <a:lnSpc>
-                <a:spcPts val="1620"/>
-              </a:lnSpc>
-              <a:spcAft>
-                <a:spcPts val="300"/>
-              </a:spcAft>
-              <a:buNone/>
-            </a:pPr>
-            <a:r>
-              <a:rPr lang="en-US" sz="1200" dirty="0">
-                <a:solidFill>
-                  <a:srgbClr val="1C2833"/>
-                </a:solidFill>
-                <a:latin typeface="Arial" pitchFamily="34" charset="0"/>
-                <a:ea typeface="Arial" pitchFamily="34" charset="-122"/>
-                <a:cs typeface="Arial" pitchFamily="34" charset="-120"/>
-              </a:rPr>
-              <a:t> — the principal volatile cooling compound. Most concentrated in peppermint (</a:t>
-            </a:r>
-            <a:pPr algn="l" indent="0" marL="0">
-              <a:lnSpc>
-                <a:spcPts val="1620"/>
-              </a:lnSpc>
-              <a:spcAft>
-                <a:spcPts val="300"/>
-              </a:spcAft>
-              <a:buNone/>
-            </a:pPr>
-            <a:r>
-              <a:rPr lang="en-US" sz="1200" i="1" dirty="0">
-                <a:solidFill>
-                  <a:srgbClr val="1C2833"/>
-                </a:solidFill>
-                <a:latin typeface="Arial" pitchFamily="34" charset="0"/>
-                <a:ea typeface="Arial" pitchFamily="34" charset="-122"/>
-                <a:cs typeface="Arial" pitchFamily="34" charset="-120"/>
-              </a:rPr>
-              <a:t>Mentha × piperita</a:t>
-            </a:r>
-            <a:pPr algn="l" indent="0" marL="0">
-              <a:lnSpc>
-                <a:spcPts val="1620"/>
-              </a:lnSpc>
-              <a:spcAft>
-                <a:spcPts val="300"/>
-              </a:spcAft>
-              <a:buNone/>
-            </a:pPr>
-            <a:r>
-              <a:rPr lang="en-US" sz="1200" dirty="0">
-                <a:solidFill>
-                  <a:srgbClr val="1C2833"/>
-                </a:solidFill>
-                <a:latin typeface="Arial" pitchFamily="34" charset="0"/>
-                <a:ea typeface="Arial" pitchFamily="34" charset="-122"/>
-                <a:cs typeface="Arial" pitchFamily="34" charset="-120"/>
-              </a:rPr>
-              <a:t>); also present in smaller amounts in spearmint.</a:t>
+              <a:rPr lang="en-US" sz="1200" dirty="0">
+                <a:solidFill>
+                  <a:srgbClr val="1C2833"/>
+                </a:solidFill>
+                <a:latin typeface="Arial" pitchFamily="34" charset="0"/>
+                <a:ea typeface="Arial" pitchFamily="34" charset="-122"/>
+                <a:cs typeface="Arial" pitchFamily="34" charset="-120"/>
+              </a:rPr>
+              <a:t>A small jar of dried mint leaves</a:t>
             </a:r>
             <a:endParaRPr lang="en-US" sz="1200" dirty="0"/>
           </a:p>
@@ -3451,115 +7192,63 @@
               <a:buChar char="•"/>
             </a:pPr>
             <a:r>
-              <a:rPr lang="en-US" sz="1200" i="1" dirty="0">
-                <a:solidFill>
-                  <a:srgbClr val="1C2833"/>
-                </a:solidFill>
-                <a:latin typeface="Arial" pitchFamily="34" charset="0"/>
-                <a:ea typeface="Arial" pitchFamily="34" charset="-122"/>
-                <a:cs typeface="Arial" pitchFamily="34" charset="-120"/>
-              </a:rPr>
-              <a:t>śīta</a:t>
-            </a:r>
-            <a:pPr algn="l" indent="0" marL="0">
-              <a:lnSpc>
-                <a:spcPts val="1620"/>
-              </a:lnSpc>
-              <a:spcAft>
-                <a:spcPts val="300"/>
-              </a:spcAft>
-              <a:buNone/>
-            </a:pPr>
-            <a:r>
-              <a:rPr lang="en-US" sz="1200" dirty="0">
-                <a:solidFill>
-                  <a:srgbClr val="1C2833"/>
-                </a:solidFill>
-                <a:latin typeface="Arial" pitchFamily="34" charset="0"/>
-                <a:ea typeface="Arial" pitchFamily="34" charset="-122"/>
-                <a:cs typeface="Arial" pitchFamily="34" charset="-120"/>
-              </a:rPr>
-              <a:t> (IAST: śīta; lit. "cool, cooling") — the cooling potency (</a:t>
-            </a:r>
-            <a:pPr algn="l" indent="0" marL="0">
-              <a:lnSpc>
-                <a:spcPts val="1620"/>
-              </a:lnSpc>
-              <a:spcAft>
-                <a:spcPts val="300"/>
-              </a:spcAft>
-              <a:buNone/>
-            </a:pPr>
-            <a:r>
-              <a:rPr lang="en-US" sz="1200" i="1" dirty="0">
-                <a:solidFill>
-                  <a:srgbClr val="1C2833"/>
-                </a:solidFill>
-                <a:latin typeface="Arial" pitchFamily="34" charset="0"/>
-                <a:ea typeface="Arial" pitchFamily="34" charset="-122"/>
-                <a:cs typeface="Arial" pitchFamily="34" charset="-120"/>
-              </a:rPr>
-              <a:t>vīrya</a:t>
-            </a:r>
-            <a:pPr algn="l" indent="0" marL="0">
-              <a:lnSpc>
-                <a:spcPts val="1620"/>
-              </a:lnSpc>
-              <a:spcAft>
-                <a:spcPts val="300"/>
-              </a:spcAft>
-              <a:buNone/>
-            </a:pPr>
-            <a:r>
-              <a:rPr lang="en-US" sz="1200" dirty="0">
-                <a:solidFill>
-                  <a:srgbClr val="1C2833"/>
-                </a:solidFill>
-                <a:latin typeface="Arial" pitchFamily="34" charset="0"/>
-                <a:ea typeface="Arial" pitchFamily="34" charset="-122"/>
-                <a:cs typeface="Arial" pitchFamily="34" charset="-120"/>
-              </a:rPr>
-              <a:t>) in Ayurveda. Contrasts with </a:t>
-            </a:r>
-            <a:pPr algn="l" indent="0" marL="0">
-              <a:lnSpc>
-                <a:spcPts val="1620"/>
-              </a:lnSpc>
-              <a:spcAft>
-                <a:spcPts val="300"/>
-              </a:spcAft>
-              <a:buNone/>
-            </a:pPr>
-            <a:r>
-              <a:rPr lang="en-US" sz="1200" i="1" dirty="0">
-                <a:solidFill>
-                  <a:srgbClr val="1C2833"/>
-                </a:solidFill>
-                <a:latin typeface="Arial" pitchFamily="34" charset="0"/>
-                <a:ea typeface="Arial" pitchFamily="34" charset="-122"/>
-                <a:cs typeface="Arial" pitchFamily="34" charset="-120"/>
-              </a:rPr>
-              <a:t>uṣṇa</a:t>
-            </a:r>
-            <a:pPr algn="l" indent="0" marL="0">
-              <a:lnSpc>
-                <a:spcPts val="1620"/>
-              </a:lnSpc>
-              <a:spcAft>
-                <a:spcPts val="300"/>
-              </a:spcAft>
-              <a:buNone/>
-            </a:pPr>
-            <a:r>
-              <a:rPr lang="en-US" sz="1200" dirty="0">
-                <a:solidFill>
-                  <a:srgbClr val="1C2833"/>
-                </a:solidFill>
-                <a:latin typeface="Arial" pitchFamily="34" charset="0"/>
-                <a:ea typeface="Arial" pitchFamily="34" charset="-122"/>
-                <a:cs typeface="Arial" pitchFamily="34" charset="-120"/>
-              </a:rPr>
-              <a:t> (heating).</a:t>
+              <a:rPr lang="en-US" sz="1200" dirty="0">
+                <a:solidFill>
+                  <a:srgbClr val="1C2833"/>
+                </a:solidFill>
+                <a:latin typeface="Arial" pitchFamily="34" charset="0"/>
+                <a:ea typeface="Arial" pitchFamily="34" charset="-122"/>
+                <a:cs typeface="Arial" pitchFamily="34" charset="-120"/>
+              </a:rPr>
+              <a:t>A few peppermint candies or a small tube of menthol-containing balm — for the smell bridge (do not let students apply balm to their skin in class)</a:t>
+            </a:r>
+            <a:endParaRPr lang="en-US" sz="1200" dirty="0"/>
+          </a:p>
+          <a:p>
+            <a:pPr algn="l" marL="342900" indent="-342900">
+              <a:lnSpc>
+                <a:spcPts val="1620"/>
+              </a:lnSpc>
+              <a:spcAft>
+                <a:spcPts val="300"/>
+              </a:spcAft>
+              <a:buSzPct val="100000"/>
+              <a:buChar char="•"/>
+            </a:pPr>
+            <a:r>
+              <a:rPr lang="en-US" sz="1200" dirty="0">
+                <a:solidFill>
+                  <a:srgbClr val="1C2833"/>
+                </a:solidFill>
+                <a:latin typeface="Arial" pitchFamily="34" charset="0"/>
+                <a:ea typeface="Arial" pitchFamily="34" charset="-122"/>
+                <a:cs typeface="Arial" pitchFamily="34" charset="-120"/>
+              </a:rPr>
+              <a:t>Ice cube + a small bowl (for the demo on cooling sensation)</a:t>
+            </a:r>
+            <a:endParaRPr lang="en-US" sz="1200" dirty="0"/>
+          </a:p>
+          <a:p>
+            <a:pPr algn="l" marL="342900" indent="-342900">
+              <a:lnSpc>
+                <a:spcPts val="1620"/>
+              </a:lnSpc>
+              <a:spcAft>
+                <a:spcPts val="300"/>
+              </a:spcAft>
+              <a:buSzPct val="100000"/>
+              <a:buChar char="•"/>
+            </a:pPr>
+            <a:r>
+              <a:rPr lang="en-US" sz="1200" dirty="0">
+                <a:solidFill>
+                  <a:srgbClr val="1C2833"/>
+                </a:solidFill>
+                <a:latin typeface="Arial" pitchFamily="34" charset="0"/>
+                <a:ea typeface="Arial" pitchFamily="34" charset="-122"/>
+                <a:cs typeface="Arial" pitchFamily="34" charset="-120"/>
+              </a:rPr>
+              <a:t>Whiteboard</a:t>
             </a:r>
             <a:endParaRPr lang="en-US" sz="1200" dirty="0"/>
           </a:p>
@@ -3717,7 +7406,7 @@
                 <a:ea typeface="Georgia" pitchFamily="34" charset="-122"/>
                 <a:cs typeface="Georgia" pitchFamily="34" charset="-120"/>
               </a:rPr>
-              <a:t>Lesson flow</a:t>
+              <a:t>Vocabulary introduced today</a:t>
             </a:r>
             <a:endParaRPr lang="en-US" sz="1800" dirty="0"/>
           </a:p>
@@ -3726,6 +7415,320 @@
       <p:sp>
         <p:nvSpPr>
           <p:cNvPr id="4" name="Text 2"/>
+          <p:cNvSpPr/>
+          <p:nvPr/>
+        </p:nvSpPr>
+        <p:spPr>
+          <a:xfrm>
+            <a:off x="634901" y="883593"/>
+            <a:ext cx="8102798" cy="975122"/>
+          </a:xfrm>
+          <a:prstGeom prst="rect">
+            <a:avLst/>
+          </a:prstGeom>
+          <a:noFill/>
+          <a:ln/>
+        </p:spPr>
+        <p:txBody>
+          <a:bodyPr wrap="square" lIns="0" tIns="0" rIns="0" bIns="0" rtlCol="0" anchor="t"/>
+          <a:lstStyle/>
+          <a:p>
+            <a:pPr algn="l" marL="342900" indent="-342900">
+              <a:lnSpc>
+                <a:spcPts val="1620"/>
+              </a:lnSpc>
+              <a:spcAft>
+                <a:spcPts val="300"/>
+              </a:spcAft>
+              <a:buSzPct val="100000"/>
+              <a:buChar char="•"/>
+            </a:pPr>
+            <a:r>
+              <a:rPr lang="en-US" sz="1200" i="1" dirty="0">
+                <a:solidFill>
+                  <a:srgbClr val="1C2833"/>
+                </a:solidFill>
+                <a:latin typeface="Arial" pitchFamily="34" charset="0"/>
+                <a:ea typeface="Arial" pitchFamily="34" charset="-122"/>
+                <a:cs typeface="Arial" pitchFamily="34" charset="-120"/>
+              </a:rPr>
+              <a:t>pudīnā</a:t>
+            </a:r>
+            <a:pPr algn="l" indent="0" marL="0">
+              <a:lnSpc>
+                <a:spcPts val="1620"/>
+              </a:lnSpc>
+              <a:spcAft>
+                <a:spcPts val="300"/>
+              </a:spcAft>
+              <a:buNone/>
+            </a:pPr>
+            <a:r>
+              <a:rPr lang="en-US" sz="1200" dirty="0">
+                <a:solidFill>
+                  <a:srgbClr val="1C2833"/>
+                </a:solidFill>
+                <a:latin typeface="Arial" pitchFamily="34" charset="0"/>
+                <a:ea typeface="Arial" pitchFamily="34" charset="-122"/>
+                <a:cs typeface="Arial" pitchFamily="34" charset="-120"/>
+              </a:rPr>
+              <a:t> (IAST: pudīnā) — mint. Commonly refers to </a:t>
+            </a:r>
+            <a:pPr algn="l" indent="0" marL="0">
+              <a:lnSpc>
+                <a:spcPts val="1620"/>
+              </a:lnSpc>
+              <a:spcAft>
+                <a:spcPts val="300"/>
+              </a:spcAft>
+              <a:buNone/>
+            </a:pPr>
+            <a:r>
+              <a:rPr lang="en-US" sz="1200" i="1" dirty="0">
+                <a:solidFill>
+                  <a:srgbClr val="1C2833"/>
+                </a:solidFill>
+                <a:latin typeface="Arial" pitchFamily="34" charset="0"/>
+                <a:ea typeface="Arial" pitchFamily="34" charset="-122"/>
+                <a:cs typeface="Arial" pitchFamily="34" charset="-120"/>
+              </a:rPr>
+              <a:t>Mentha spicata</a:t>
+            </a:r>
+            <a:pPr algn="l" indent="0" marL="0">
+              <a:lnSpc>
+                <a:spcPts val="1620"/>
+              </a:lnSpc>
+              <a:spcAft>
+                <a:spcPts val="300"/>
+              </a:spcAft>
+              <a:buNone/>
+            </a:pPr>
+            <a:r>
+              <a:rPr lang="en-US" sz="1200" dirty="0">
+                <a:solidFill>
+                  <a:srgbClr val="1C2833"/>
+                </a:solidFill>
+                <a:latin typeface="Arial" pitchFamily="34" charset="0"/>
+                <a:ea typeface="Arial" pitchFamily="34" charset="-122"/>
+                <a:cs typeface="Arial" pitchFamily="34" charset="-120"/>
+              </a:rPr>
+              <a:t> (spearmint) in Indian kitchens.</a:t>
+            </a:r>
+            <a:endParaRPr lang="en-US" sz="1200" dirty="0"/>
+          </a:p>
+          <a:p>
+            <a:pPr algn="l" marL="342900" indent="-342900">
+              <a:lnSpc>
+                <a:spcPts val="1620"/>
+              </a:lnSpc>
+              <a:spcAft>
+                <a:spcPts val="300"/>
+              </a:spcAft>
+              <a:buSzPct val="100000"/>
+              <a:buChar char="•"/>
+            </a:pPr>
+            <a:r>
+              <a:rPr lang="en-US" sz="1200" b="1" dirty="0">
+                <a:solidFill>
+                  <a:srgbClr val="1C2833"/>
+                </a:solidFill>
+                <a:latin typeface="Arial" pitchFamily="34" charset="0"/>
+                <a:ea typeface="Arial" pitchFamily="34" charset="-122"/>
+                <a:cs typeface="Arial" pitchFamily="34" charset="-120"/>
+              </a:rPr>
+              <a:t>Menthol</a:t>
+            </a:r>
+            <a:pPr algn="l" indent="0" marL="0">
+              <a:lnSpc>
+                <a:spcPts val="1620"/>
+              </a:lnSpc>
+              <a:spcAft>
+                <a:spcPts val="300"/>
+              </a:spcAft>
+              <a:buNone/>
+            </a:pPr>
+            <a:r>
+              <a:rPr lang="en-US" sz="1200" dirty="0">
+                <a:solidFill>
+                  <a:srgbClr val="1C2833"/>
+                </a:solidFill>
+                <a:latin typeface="Arial" pitchFamily="34" charset="0"/>
+                <a:ea typeface="Arial" pitchFamily="34" charset="-122"/>
+                <a:cs typeface="Arial" pitchFamily="34" charset="-120"/>
+              </a:rPr>
+              <a:t> — the principal volatile cooling compound. Most concentrated in peppermint (</a:t>
+            </a:r>
+            <a:pPr algn="l" indent="0" marL="0">
+              <a:lnSpc>
+                <a:spcPts val="1620"/>
+              </a:lnSpc>
+              <a:spcAft>
+                <a:spcPts val="300"/>
+              </a:spcAft>
+              <a:buNone/>
+            </a:pPr>
+            <a:r>
+              <a:rPr lang="en-US" sz="1200" i="1" dirty="0">
+                <a:solidFill>
+                  <a:srgbClr val="1C2833"/>
+                </a:solidFill>
+                <a:latin typeface="Arial" pitchFamily="34" charset="0"/>
+                <a:ea typeface="Arial" pitchFamily="34" charset="-122"/>
+                <a:cs typeface="Arial" pitchFamily="34" charset="-120"/>
+              </a:rPr>
+              <a:t>Mentha × piperita</a:t>
+            </a:r>
+            <a:pPr algn="l" indent="0" marL="0">
+              <a:lnSpc>
+                <a:spcPts val="1620"/>
+              </a:lnSpc>
+              <a:spcAft>
+                <a:spcPts val="300"/>
+              </a:spcAft>
+              <a:buNone/>
+            </a:pPr>
+            <a:r>
+              <a:rPr lang="en-US" sz="1200" dirty="0">
+                <a:solidFill>
+                  <a:srgbClr val="1C2833"/>
+                </a:solidFill>
+                <a:latin typeface="Arial" pitchFamily="34" charset="0"/>
+                <a:ea typeface="Arial" pitchFamily="34" charset="-122"/>
+                <a:cs typeface="Arial" pitchFamily="34" charset="-120"/>
+              </a:rPr>
+              <a:t>); also present in smaller amounts in spearmint.</a:t>
+            </a:r>
+            <a:endParaRPr lang="en-US" sz="1200" dirty="0"/>
+          </a:p>
+          <a:p>
+            <a:pPr algn="l" marL="342900" indent="-342900">
+              <a:lnSpc>
+                <a:spcPts val="1620"/>
+              </a:lnSpc>
+              <a:spcAft>
+                <a:spcPts val="300"/>
+              </a:spcAft>
+              <a:buSzPct val="100000"/>
+              <a:buChar char="•"/>
+            </a:pPr>
+            <a:r>
+              <a:rPr lang="en-US" sz="1200" i="1" dirty="0">
+                <a:solidFill>
+                  <a:srgbClr val="1C2833"/>
+                </a:solidFill>
+                <a:latin typeface="Arial" pitchFamily="34" charset="0"/>
+                <a:ea typeface="Arial" pitchFamily="34" charset="-122"/>
+                <a:cs typeface="Arial" pitchFamily="34" charset="-120"/>
+              </a:rPr>
+              <a:t>śīta</a:t>
+            </a:r>
+            <a:pPr algn="l" indent="0" marL="0">
+              <a:lnSpc>
+                <a:spcPts val="1620"/>
+              </a:lnSpc>
+              <a:spcAft>
+                <a:spcPts val="300"/>
+              </a:spcAft>
+              <a:buNone/>
+            </a:pPr>
+            <a:r>
+              <a:rPr lang="en-US" sz="1200" dirty="0">
+                <a:solidFill>
+                  <a:srgbClr val="1C2833"/>
+                </a:solidFill>
+                <a:latin typeface="Arial" pitchFamily="34" charset="0"/>
+                <a:ea typeface="Arial" pitchFamily="34" charset="-122"/>
+                <a:cs typeface="Arial" pitchFamily="34" charset="-120"/>
+              </a:rPr>
+              <a:t> (IAST: śīta; lit. "cool, cooling") — the cooling potency (</a:t>
+            </a:r>
+            <a:pPr algn="l" indent="0" marL="0">
+              <a:lnSpc>
+                <a:spcPts val="1620"/>
+              </a:lnSpc>
+              <a:spcAft>
+                <a:spcPts val="300"/>
+              </a:spcAft>
+              <a:buNone/>
+            </a:pPr>
+            <a:r>
+              <a:rPr lang="en-US" sz="1200" i="1" dirty="0">
+                <a:solidFill>
+                  <a:srgbClr val="1C2833"/>
+                </a:solidFill>
+                <a:latin typeface="Arial" pitchFamily="34" charset="0"/>
+                <a:ea typeface="Arial" pitchFamily="34" charset="-122"/>
+                <a:cs typeface="Arial" pitchFamily="34" charset="-120"/>
+              </a:rPr>
+              <a:t>vīrya</a:t>
+            </a:r>
+            <a:pPr algn="l" indent="0" marL="0">
+              <a:lnSpc>
+                <a:spcPts val="1620"/>
+              </a:lnSpc>
+              <a:spcAft>
+                <a:spcPts val="300"/>
+              </a:spcAft>
+              <a:buNone/>
+            </a:pPr>
+            <a:r>
+              <a:rPr lang="en-US" sz="1200" dirty="0">
+                <a:solidFill>
+                  <a:srgbClr val="1C2833"/>
+                </a:solidFill>
+                <a:latin typeface="Arial" pitchFamily="34" charset="0"/>
+                <a:ea typeface="Arial" pitchFamily="34" charset="-122"/>
+                <a:cs typeface="Arial" pitchFamily="34" charset="-120"/>
+              </a:rPr>
+              <a:t>) in Ayurveda. Contrasts with </a:t>
+            </a:r>
+            <a:pPr algn="l" indent="0" marL="0">
+              <a:lnSpc>
+                <a:spcPts val="1620"/>
+              </a:lnSpc>
+              <a:spcAft>
+                <a:spcPts val="300"/>
+              </a:spcAft>
+              <a:buNone/>
+            </a:pPr>
+            <a:r>
+              <a:rPr lang="en-US" sz="1200" i="1" dirty="0">
+                <a:solidFill>
+                  <a:srgbClr val="1C2833"/>
+                </a:solidFill>
+                <a:latin typeface="Arial" pitchFamily="34" charset="0"/>
+                <a:ea typeface="Arial" pitchFamily="34" charset="-122"/>
+                <a:cs typeface="Arial" pitchFamily="34" charset="-120"/>
+              </a:rPr>
+              <a:t>uṣṇa</a:t>
+            </a:r>
+            <a:pPr algn="l" indent="0" marL="0">
+              <a:lnSpc>
+                <a:spcPts val="1620"/>
+              </a:lnSpc>
+              <a:spcAft>
+                <a:spcPts val="300"/>
+              </a:spcAft>
+              <a:buNone/>
+            </a:pPr>
+            <a:r>
+              <a:rPr lang="en-US" sz="1200" dirty="0">
+                <a:solidFill>
+                  <a:srgbClr val="1C2833"/>
+                </a:solidFill>
+                <a:latin typeface="Arial" pitchFamily="34" charset="0"/>
+                <a:ea typeface="Arial" pitchFamily="34" charset="-122"/>
+                <a:cs typeface="Arial" pitchFamily="34" charset="-120"/>
+              </a:rPr>
+              <a:t> (heating).</a:t>
+            </a:r>
+            <a:endParaRPr lang="en-US" sz="1200" dirty="0"/>
+          </a:p>
+        </p:txBody>
+      </p:sp>
+      <p:sp>
+        <p:nvSpPr>
+          <p:cNvPr id="5" name="Text 3"/>
           <p:cNvSpPr/>
           <p:nvPr/>
         </p:nvSpPr>
@@ -3875,7 +7878,7 @@
                 <a:ea typeface="Georgia" pitchFamily="34" charset="-122"/>
                 <a:cs typeface="Georgia" pitchFamily="34" charset="-120"/>
               </a:rPr>
-              <a:t>Warm-up (5 min)</a:t>
+              <a:t>Lesson flow</a:t>
             </a:r>
             <a:endParaRPr lang="en-US" sz="1800" dirty="0"/>
           </a:p>
@@ -3884,219 +7887,6 @@
       <p:sp>
         <p:nvSpPr>
           <p:cNvPr id="4" name="Text 2"/>
-          <p:cNvSpPr/>
-          <p:nvPr/>
-        </p:nvSpPr>
-        <p:spPr>
-          <a:xfrm>
-            <a:off x="406301" y="870942"/>
-            <a:ext cx="8498026" cy="213271"/>
-          </a:xfrm>
-          <a:prstGeom prst="rect">
-            <a:avLst/>
-          </a:prstGeom>
-          <a:noFill/>
-          <a:ln/>
-        </p:spPr>
-        <p:txBody>
-          <a:bodyPr wrap="square" lIns="0" tIns="0" rIns="0" bIns="0" rtlCol="0" anchor="t"/>
-          <a:lstStyle/>
-          <a:p>
-            <a:pPr algn="l" indent="0" marL="0">
-              <a:lnSpc>
-                <a:spcPts val="1680"/>
-              </a:lnSpc>
-              <a:spcBef>
-                <a:spcPts val="300"/>
-              </a:spcBef>
-              <a:spcAft>
-                <a:spcPts val="300"/>
-              </a:spcAft>
-              <a:buNone/>
-            </a:pPr>
-            <a:r>
-              <a:rPr lang="en-US" sz="1200" dirty="0">
-                <a:solidFill>
-                  <a:srgbClr val="1C2833"/>
-                </a:solidFill>
-                <a:latin typeface="Arial" pitchFamily="34" charset="0"/>
-                <a:ea typeface="Arial" pitchFamily="34" charset="-122"/>
-                <a:cs typeface="Arial" pitchFamily="34" charset="-120"/>
-              </a:rPr>
-              <a:t>Pass the mint sprigs along the row. Each student takes a leaf, rubs gently, sniffs.</a:t>
-            </a:r>
-            <a:endParaRPr lang="en-US" sz="1200" dirty="0"/>
-          </a:p>
-        </p:txBody>
-      </p:sp>
-      <p:sp>
-        <p:nvSpPr>
-          <p:cNvPr id="5" name="Text 3"/>
-          <p:cNvSpPr/>
-          <p:nvPr/>
-        </p:nvSpPr>
-        <p:spPr>
-          <a:xfrm>
-            <a:off x="406301" y="1160413"/>
-            <a:ext cx="8498026" cy="213271"/>
-          </a:xfrm>
-          <a:prstGeom prst="rect">
-            <a:avLst/>
-          </a:prstGeom>
-          <a:noFill/>
-          <a:ln/>
-        </p:spPr>
-        <p:txBody>
-          <a:bodyPr wrap="square" lIns="0" tIns="0" rIns="0" bIns="0" rtlCol="0" anchor="t"/>
-          <a:lstStyle/>
-          <a:p>
-            <a:pPr algn="l" indent="0" marL="0">
-              <a:lnSpc>
-                <a:spcPts val="1680"/>
-              </a:lnSpc>
-              <a:spcBef>
-                <a:spcPts val="300"/>
-              </a:spcBef>
-              <a:spcAft>
-                <a:spcPts val="300"/>
-              </a:spcAft>
-              <a:buNone/>
-            </a:pPr>
-            <a:r>
-              <a:rPr lang="en-US" sz="1200" i="1" dirty="0">
-                <a:solidFill>
-                  <a:srgbClr val="1C2833"/>
-                </a:solidFill>
-                <a:latin typeface="Arial" pitchFamily="34" charset="0"/>
-                <a:ea typeface="Arial" pitchFamily="34" charset="-122"/>
-                <a:cs typeface="Arial" pitchFamily="34" charset="-120"/>
-              </a:rPr>
-              <a:t>"Three words for the smell."</a:t>
-            </a:r>
-            <a:pPr algn="l" indent="0" marL="0">
-              <a:lnSpc>
-                <a:spcPts val="1680"/>
-              </a:lnSpc>
-              <a:spcBef>
-                <a:spcPts val="300"/>
-              </a:spcBef>
-              <a:spcAft>
-                <a:spcPts val="300"/>
-              </a:spcAft>
-              <a:buNone/>
-            </a:pPr>
-            <a:r>
-              <a:rPr lang="en-US" sz="1200" dirty="0">
-                <a:solidFill>
-                  <a:srgbClr val="1C2833"/>
-                </a:solidFill>
-                <a:latin typeface="Arial" pitchFamily="34" charset="0"/>
-                <a:ea typeface="Arial" pitchFamily="34" charset="-122"/>
-                <a:cs typeface="Arial" pitchFamily="34" charset="-120"/>
-              </a:rPr>
-              <a:t> (Likely: "fresh," "cool," "toothpaste-like.")</a:t>
-            </a:r>
-            <a:endParaRPr lang="en-US" sz="1200" dirty="0"/>
-          </a:p>
-        </p:txBody>
-      </p:sp>
-      <p:sp>
-        <p:nvSpPr>
-          <p:cNvPr id="6" name="Text 4"/>
-          <p:cNvSpPr/>
-          <p:nvPr/>
-        </p:nvSpPr>
-        <p:spPr>
-          <a:xfrm>
-            <a:off x="406301" y="1449884"/>
-            <a:ext cx="8498026" cy="426541"/>
-          </a:xfrm>
-          <a:prstGeom prst="rect">
-            <a:avLst/>
-          </a:prstGeom>
-          <a:noFill/>
-          <a:ln/>
-        </p:spPr>
-        <p:txBody>
-          <a:bodyPr wrap="square" lIns="0" tIns="0" rIns="0" bIns="0" rtlCol="0" anchor="t"/>
-          <a:lstStyle/>
-          <a:p>
-            <a:pPr algn="l" indent="0" marL="0">
-              <a:lnSpc>
-                <a:spcPts val="1680"/>
-              </a:lnSpc>
-              <a:spcBef>
-                <a:spcPts val="300"/>
-              </a:spcBef>
-              <a:spcAft>
-                <a:spcPts val="300"/>
-              </a:spcAft>
-              <a:buNone/>
-            </a:pPr>
-            <a:r>
-              <a:rPr lang="en-US" sz="1200" dirty="0">
-                <a:solidFill>
-                  <a:srgbClr val="1C2833"/>
-                </a:solidFill>
-                <a:latin typeface="Arial" pitchFamily="34" charset="0"/>
-                <a:ea typeface="Arial" pitchFamily="34" charset="-122"/>
-                <a:cs typeface="Arial" pitchFamily="34" charset="-120"/>
-              </a:rPr>
-              <a:t>Hold an ice cube briefly — note how cold feels on the skin. Now ask: </a:t>
-            </a:r>
-            <a:pPr algn="l" indent="0" marL="0">
-              <a:lnSpc>
-                <a:spcPts val="1680"/>
-              </a:lnSpc>
-              <a:spcBef>
-                <a:spcPts val="300"/>
-              </a:spcBef>
-              <a:spcAft>
-                <a:spcPts val="300"/>
-              </a:spcAft>
-              <a:buNone/>
-            </a:pPr>
-            <a:r>
-              <a:rPr lang="en-US" sz="1200" i="1" dirty="0">
-                <a:solidFill>
-                  <a:srgbClr val="1C2833"/>
-                </a:solidFill>
-                <a:latin typeface="Arial" pitchFamily="34" charset="0"/>
-                <a:ea typeface="Arial" pitchFamily="34" charset="-122"/>
-                <a:cs typeface="Arial" pitchFamily="34" charset="-120"/>
-              </a:rPr>
-              <a:t>"When you smelled the mint just now, did it feel like the ice or different?"</a:t>
-            </a:r>
-            <a:pPr algn="l" indent="0" marL="0">
-              <a:lnSpc>
-                <a:spcPts val="1680"/>
-              </a:lnSpc>
-              <a:spcBef>
-                <a:spcPts val="300"/>
-              </a:spcBef>
-              <a:spcAft>
-                <a:spcPts val="300"/>
-              </a:spcAft>
-              <a:buNone/>
-            </a:pPr>
-            <a:r>
-              <a:rPr lang="en-US" sz="1200" dirty="0">
-                <a:solidFill>
-                  <a:srgbClr val="1C2833"/>
-                </a:solidFill>
-                <a:latin typeface="Arial" pitchFamily="34" charset="0"/>
-                <a:ea typeface="Arial" pitchFamily="34" charset="-122"/>
-                <a:cs typeface="Arial" pitchFamily="34" charset="-120"/>
-              </a:rPr>
-              <a:t> (Different — but related. We'll explain.)</a:t>
-            </a:r>
-            <a:endParaRPr lang="en-US" sz="1200" dirty="0"/>
-          </a:p>
-        </p:txBody>
-      </p:sp>
-      <p:sp>
-        <p:nvSpPr>
-          <p:cNvPr id="7" name="Text 5"/>
           <p:cNvSpPr/>
           <p:nvPr/>
         </p:nvSpPr>
@@ -4246,7 +8036,7 @@
                 <a:ea typeface="Georgia" pitchFamily="34" charset="-122"/>
                 <a:cs typeface="Georgia" pitchFamily="34" charset="-120"/>
               </a:rPr>
-              <a:t>Activity (15 min) — Variety taste-id challenge</a:t>
+              <a:t>Warm-up (5 min)</a:t>
             </a:r>
             <a:endParaRPr lang="en-US" sz="1800" dirty="0"/>
           </a:p>
@@ -4294,7 +8084,7 @@
                 <a:ea typeface="Arial" pitchFamily="34" charset="-122"/>
                 <a:cs typeface="Arial" pitchFamily="34" charset="-120"/>
               </a:rPr>
-              <a:t>(Skip if cooking/tasting is not permitted at your school. Replace with a sketch-by-variety exercise.)</a:t>
+              <a:t>Pass the mint sprigs along the row. Each student takes a leaf, rubs gently, sniffs.</a:t>
             </a:r>
             <a:endParaRPr lang="en-US" sz="1200" dirty="0"/>
           </a:p>
@@ -4309,54 +8099,6 @@
         <p:spPr>
           <a:xfrm>
             <a:off x="406301" y="1160413"/>
-            <a:ext cx="8498026" cy="639812"/>
-          </a:xfrm>
-          <a:prstGeom prst="rect">
-            <a:avLst/>
-          </a:prstGeom>
-          <a:noFill/>
-          <a:ln/>
-        </p:spPr>
-        <p:txBody>
-          <a:bodyPr wrap="square" lIns="0" tIns="0" rIns="0" bIns="0" rtlCol="0" anchor="t"/>
-          <a:lstStyle/>
-          <a:p>
-            <a:pPr algn="l" indent="0" marL="0">
-              <a:lnSpc>
-                <a:spcPts val="1680"/>
-              </a:lnSpc>
-              <a:spcBef>
-                <a:spcPts val="300"/>
-              </a:spcBef>
-              <a:spcAft>
-                <a:spcPts val="300"/>
-              </a:spcAft>
-              <a:buNone/>
-            </a:pPr>
-            <a:r>
-              <a:rPr lang="en-US" sz="1200" dirty="0">
-                <a:solidFill>
-                  <a:srgbClr val="1C2833"/>
-                </a:solidFill>
-                <a:latin typeface="Arial" pitchFamily="34" charset="0"/>
-                <a:ea typeface="Arial" pitchFamily="34" charset="-122"/>
-                <a:cs typeface="Arial" pitchFamily="34" charset="-120"/>
-              </a:rPr>
-              <a:t>– Set up two cups: spearmint chutney (from prepared chutney, very small portion per student) vs a peppermint candy crushed in water (tiny amount). – Each pair tries to identify which is which by taste alone. – Record what made them distinguishable — sharpness? Sweetness? Cooling intensity?</a:t>
-            </a:r>
-            <a:endParaRPr lang="en-US" sz="1200" dirty="0"/>
-          </a:p>
-        </p:txBody>
-      </p:sp>
-      <p:sp>
-        <p:nvSpPr>
-          <p:cNvPr id="6" name="Text 4"/>
-          <p:cNvSpPr/>
-          <p:nvPr/>
-        </p:nvSpPr>
-        <p:spPr>
-          <a:xfrm>
-            <a:off x="406301" y="1876425"/>
             <a:ext cx="8498026" cy="213271"/>
           </a:xfrm>
           <a:prstGeom prst="rect">
@@ -4382,15 +8124,38 @@
               <a:buNone/>
             </a:pPr>
             <a:r>
-              <a:rPr lang="en-US" sz="1200" b="1" dirty="0">
-                <a:solidFill>
-                  <a:srgbClr val="1C2833"/>
-                </a:solidFill>
-                <a:latin typeface="Arial" pitchFamily="34" charset="0"/>
-                <a:ea typeface="Arial" pitchFamily="34" charset="-122"/>
-                <a:cs typeface="Arial" pitchFamily="34" charset="-120"/>
-              </a:rPr>
-              <a:t>Final 5 min — group discussion:</a:t>
+              <a:rPr lang="en-US" sz="1200" i="1" dirty="0">
+                <a:solidFill>
+                  <a:srgbClr val="1C2833"/>
+                </a:solidFill>
+                <a:latin typeface="Arial" pitchFamily="34" charset="0"/>
+                <a:ea typeface="Arial" pitchFamily="34" charset="-122"/>
+                <a:cs typeface="Arial" pitchFamily="34" charset="-120"/>
+              </a:rPr>
+              <a:t>"Three words for the smell."</a:t>
+            </a:r>
+            <a:pPr algn="l" indent="0" marL="0">
+              <a:lnSpc>
+                <a:spcPts val="1680"/>
+              </a:lnSpc>
+              <a:spcBef>
+                <a:spcPts val="300"/>
+              </a:spcBef>
+              <a:spcAft>
+                <a:spcPts val="300"/>
+              </a:spcAft>
+              <a:buNone/>
+            </a:pPr>
+            <a:r>
+              <a:rPr lang="en-US" sz="1200" dirty="0">
+                <a:solidFill>
+                  <a:srgbClr val="1C2833"/>
+                </a:solidFill>
+                <a:latin typeface="Arial" pitchFamily="34" charset="0"/>
+                <a:ea typeface="Arial" pitchFamily="34" charset="-122"/>
+                <a:cs typeface="Arial" pitchFamily="34" charset="-120"/>
+              </a:rPr>
+              <a:t> (Likely: "fresh," "cool," "toothpaste-like.")</a:t>
             </a:r>
             <a:endParaRPr lang="en-US" sz="1200" dirty="0"/>
           </a:p>
@@ -4398,14 +8163,14 @@
       </p:sp>
       <p:sp>
         <p:nvSpPr>
-          <p:cNvPr id="7" name="Text 5"/>
+          <p:cNvPr id="6" name="Text 4"/>
           <p:cNvSpPr/>
           <p:nvPr/>
         </p:nvSpPr>
         <p:spPr>
           <a:xfrm>
-            <a:off x="634901" y="2178546"/>
-            <a:ext cx="8102798" cy="731341"/>
+            <a:off x="406301" y="1449884"/>
+            <a:ext cx="8498026" cy="426541"/>
           </a:xfrm>
           <a:prstGeom prst="rect">
             <a:avLst/>
@@ -4417,15 +8182,40 @@
           <a:bodyPr wrap="square" lIns="0" tIns="0" rIns="0" bIns="0" rtlCol="0" anchor="t"/>
           <a:lstStyle/>
           <a:p>
-            <a:pPr algn="l" marL="342900" indent="-342900">
-              <a:lnSpc>
-                <a:spcPts val="1620"/>
-              </a:lnSpc>
-              <a:spcAft>
-                <a:spcPts val="300"/>
-              </a:spcAft>
-              <a:buSzPct val="100000"/>
-              <a:buChar char="•"/>
+            <a:pPr algn="l" indent="0" marL="0">
+              <a:lnSpc>
+                <a:spcPts val="1680"/>
+              </a:lnSpc>
+              <a:spcBef>
+                <a:spcPts val="300"/>
+              </a:spcBef>
+              <a:spcAft>
+                <a:spcPts val="300"/>
+              </a:spcAft>
+              <a:buNone/>
+            </a:pPr>
+            <a:r>
+              <a:rPr lang="en-US" sz="1200" dirty="0">
+                <a:solidFill>
+                  <a:srgbClr val="1C2833"/>
+                </a:solidFill>
+                <a:latin typeface="Arial" pitchFamily="34" charset="0"/>
+                <a:ea typeface="Arial" pitchFamily="34" charset="-122"/>
+                <a:cs typeface="Arial" pitchFamily="34" charset="-120"/>
+              </a:rPr>
+              <a:t>Hold an ice cube briefly — note how cold feels on the skin. Now ask: </a:t>
+            </a:r>
+            <a:pPr algn="l" indent="0" marL="0">
+              <a:lnSpc>
+                <a:spcPts val="1680"/>
+              </a:lnSpc>
+              <a:spcBef>
+                <a:spcPts val="300"/>
+              </a:spcBef>
+              <a:spcAft>
+                <a:spcPts val="300"/>
+              </a:spcAft>
+              <a:buNone/>
             </a:pPr>
             <a:r>
               <a:rPr lang="en-US" sz="1200" i="1" dirty="0">
@@ -4436,119 +8226,38 @@
                 <a:ea typeface="Arial" pitchFamily="34" charset="-122"/>
                 <a:cs typeface="Arial" pitchFamily="34" charset="-120"/>
               </a:rPr>
-              <a:t>"Why does mint feel cool when it isn't actually cold?"</a:t>
-            </a:r>
-            <a:pPr algn="l" indent="0" marL="0">
-              <a:lnSpc>
-                <a:spcPts val="1620"/>
-              </a:lnSpc>
-              <a:spcAft>
-                <a:spcPts val="300"/>
-              </a:spcAft>
-              <a:buNone/>
-            </a:pPr>
-            <a:r>
-              <a:rPr lang="en-US" sz="1200" dirty="0">
-                <a:solidFill>
-                  <a:srgbClr val="1C2833"/>
-                </a:solidFill>
-                <a:latin typeface="Arial" pitchFamily="34" charset="0"/>
-                <a:ea typeface="Arial" pitchFamily="34" charset="-122"/>
-                <a:cs typeface="Arial" pitchFamily="34" charset="-120"/>
-              </a:rPr>
-              <a:t> (TRPM8 activation — students should be able to explain this back.)</a:t>
+              <a:t>"When you smelled the mint just now, did it feel like the ice or different?"</a:t>
+            </a:r>
+            <a:pPr algn="l" indent="0" marL="0">
+              <a:lnSpc>
+                <a:spcPts val="1680"/>
+              </a:lnSpc>
+              <a:spcBef>
+                <a:spcPts val="300"/>
+              </a:spcBef>
+              <a:spcAft>
+                <a:spcPts val="300"/>
+              </a:spcAft>
+              <a:buNone/>
+            </a:pPr>
+            <a:r>
+              <a:rPr lang="en-US" sz="1200" dirty="0">
+                <a:solidFill>
+                  <a:srgbClr val="1C2833"/>
+                </a:solidFill>
+                <a:latin typeface="Arial" pitchFamily="34" charset="0"/>
+                <a:ea typeface="Arial" pitchFamily="34" charset="-122"/>
+                <a:cs typeface="Arial" pitchFamily="34" charset="-120"/>
+              </a:rPr>
+              <a:t> (Different — but related. We'll explain.)</a:t>
             </a:r>
             <a:endParaRPr lang="en-US" sz="1200" dirty="0"/>
           </a:p>
-          <a:p>
-            <a:pPr algn="l" marL="342900" indent="-342900">
-              <a:lnSpc>
-                <a:spcPts val="1620"/>
-              </a:lnSpc>
-              <a:spcAft>
-                <a:spcPts val="300"/>
-              </a:spcAft>
-              <a:buSzPct val="100000"/>
-              <a:buChar char="•"/>
-            </a:pPr>
-            <a:r>
-              <a:rPr lang="en-US" sz="1200" i="1" dirty="0">
-                <a:solidFill>
-                  <a:srgbClr val="1C2833"/>
-                </a:solidFill>
-                <a:latin typeface="Arial" pitchFamily="34" charset="0"/>
-                <a:ea typeface="Arial" pitchFamily="34" charset="-122"/>
-                <a:cs typeface="Arial" pitchFamily="34" charset="-120"/>
-              </a:rPr>
-              <a:t>"What's the connection between the Ayurvedic word</a:t>
-            </a:r>
-            <a:pPr algn="l" indent="0" marL="0">
-              <a:lnSpc>
-                <a:spcPts val="1620"/>
-              </a:lnSpc>
-              <a:spcAft>
-                <a:spcPts val="300"/>
-              </a:spcAft>
-              <a:buNone/>
-            </a:pPr>
-            <a:r>
-              <a:rPr lang="en-US" sz="1200" dirty="0">
-                <a:solidFill>
-                  <a:srgbClr val="1C2833"/>
-                </a:solidFill>
-                <a:latin typeface="Arial" pitchFamily="34" charset="0"/>
-                <a:ea typeface="Arial" pitchFamily="34" charset="-122"/>
-                <a:cs typeface="Arial" pitchFamily="34" charset="-120"/>
-              </a:rPr>
-              <a:t>śīta</a:t>
-            </a:r>
-            <a:pPr algn="l" indent="0" marL="0">
-              <a:lnSpc>
-                <a:spcPts val="1620"/>
-              </a:lnSpc>
-              <a:spcAft>
-                <a:spcPts val="300"/>
-              </a:spcAft>
-              <a:buNone/>
-            </a:pPr>
-            <a:r>
-              <a:rPr lang="en-US" sz="1200" i="1" dirty="0">
-                <a:solidFill>
-                  <a:srgbClr val="1C2833"/>
-                </a:solidFill>
-                <a:latin typeface="Arial" pitchFamily="34" charset="0"/>
-                <a:ea typeface="Arial" pitchFamily="34" charset="-122"/>
-                <a:cs typeface="Arial" pitchFamily="34" charset="-120"/>
-              </a:rPr>
-              <a:t> and this molecular trick?"</a:t>
-            </a:r>
-            <a:pPr algn="l" indent="0" marL="0">
-              <a:lnSpc>
-                <a:spcPts val="1620"/>
-              </a:lnSpc>
-              <a:spcAft>
-                <a:spcPts val="300"/>
-              </a:spcAft>
-              <a:buNone/>
-            </a:pPr>
-            <a:r>
-              <a:rPr lang="en-US" sz="1200" dirty="0">
-                <a:solidFill>
-                  <a:srgbClr val="1C2833"/>
-                </a:solidFill>
-                <a:latin typeface="Arial" pitchFamily="34" charset="0"/>
-                <a:ea typeface="Arial" pitchFamily="34" charset="-122"/>
-                <a:cs typeface="Arial" pitchFamily="34" charset="-120"/>
-              </a:rPr>
-              <a:t> (The tradition was tracking the effect; the science explains the cause.)</a:t>
-            </a:r>
-            <a:endParaRPr lang="en-US" sz="1200" dirty="0"/>
-          </a:p>
-        </p:txBody>
-      </p:sp>
-      <p:sp>
-        <p:nvSpPr>
-          <p:cNvPr id="8" name="Text 6"/>
+        </p:txBody>
+      </p:sp>
+      <p:sp>
+        <p:nvSpPr>
+          <p:cNvPr id="7" name="Text 5"/>
           <p:cNvSpPr/>
           <p:nvPr/>
         </p:nvSpPr>
@@ -4698,7 +8407,7 @@
                 <a:ea typeface="Georgia" pitchFamily="34" charset="-122"/>
                 <a:cs typeface="Georgia" pitchFamily="34" charset="-120"/>
               </a:rPr>
-              <a:t>Wrap-up (5 min)</a:t>
+              <a:t>Core (20 min)</a:t>
             </a:r>
             <a:endParaRPr lang="en-US" sz="1800" dirty="0"/>
           </a:p>
@@ -4712,8 +8421,8 @@
         </p:nvSpPr>
         <p:spPr>
           <a:xfrm>
-            <a:off x="406301" y="870942"/>
-            <a:ext cx="8498026" cy="426541"/>
+            <a:off x="634901" y="883593"/>
+            <a:ext cx="8102798" cy="281880"/>
           </a:xfrm>
           <a:prstGeom prst="rect">
             <a:avLst/>
@@ -4725,40 +8434,217 @@
           <a:bodyPr wrap="square" lIns="0" tIns="0" rIns="0" bIns="0" rtlCol="0" anchor="t"/>
           <a:lstStyle/>
           <a:p>
-            <a:pPr algn="l" indent="0" marL="0">
-              <a:lnSpc>
-                <a:spcPts val="1680"/>
-              </a:lnSpc>
-              <a:spcBef>
-                <a:spcPts val="300"/>
-              </a:spcBef>
-              <a:spcAft>
-                <a:spcPts val="300"/>
-              </a:spcAft>
-              <a:buNone/>
-            </a:pPr>
-            <a:r>
-              <a:rPr lang="en-US" sz="1200" dirty="0">
-                <a:solidFill>
-                  <a:srgbClr val="1C2833"/>
-                </a:solidFill>
-                <a:latin typeface="Arial" pitchFamily="34" charset="0"/>
-                <a:ea typeface="Arial" pitchFamily="34" charset="-122"/>
-                <a:cs typeface="Arial" pitchFamily="34" charset="-120"/>
-              </a:rPr>
-              <a:t>– Restate the safety rule. – Preview Day 8: </a:t>
-            </a:r>
-            <a:pPr algn="l" indent="0" marL="0">
-              <a:lnSpc>
-                <a:spcPts val="1680"/>
-              </a:lnSpc>
-              <a:spcBef>
-                <a:spcPts val="300"/>
-              </a:spcBef>
-              <a:spcAft>
-                <a:spcPts val="300"/>
-              </a:spcAft>
-              <a:buNone/>
+            <a:pPr algn="l" marL="342900" indent="-342900">
+              <a:lnSpc>
+                <a:spcPts val="1620"/>
+              </a:lnSpc>
+              <a:spcAft>
+                <a:spcPts val="300"/>
+              </a:spcAft>
+              <a:buSzPct val="100000"/>
+              <a:buChar char="•"/>
+            </a:pPr>
+            <a:r>
+              <a:rPr lang="en-US" sz="1200" b="1" dirty="0">
+                <a:solidFill>
+                  <a:srgbClr val="1C2833"/>
+                </a:solidFill>
+                <a:latin typeface="Arial" pitchFamily="34" charset="0"/>
+                <a:ea typeface="Arial" pitchFamily="34" charset="-122"/>
+                <a:cs typeface="Arial" pitchFamily="34" charset="-120"/>
+              </a:rPr>
+              <a:t>Identify it.</a:t>
+            </a:r>
+            <a:endParaRPr lang="en-US" sz="1200" dirty="0"/>
+          </a:p>
+        </p:txBody>
+      </p:sp>
+      <p:sp>
+        <p:nvSpPr>
+          <p:cNvPr id="5" name="Text 3"/>
+          <p:cNvSpPr/>
+          <p:nvPr/>
+        </p:nvSpPr>
+        <p:spPr>
+          <a:xfrm>
+            <a:off x="634901" y="1266974"/>
+            <a:ext cx="8102798" cy="1462683"/>
+          </a:xfrm>
+          <a:prstGeom prst="rect">
+            <a:avLst/>
+          </a:prstGeom>
+          <a:noFill/>
+          <a:ln/>
+        </p:spPr>
+        <p:txBody>
+          <a:bodyPr wrap="square" lIns="0" tIns="0" rIns="0" bIns="0" rtlCol="0" anchor="t"/>
+          <a:lstStyle/>
+          <a:p>
+            <a:pPr algn="l" marL="342900" indent="-342900">
+              <a:lnSpc>
+                <a:spcPts val="1620"/>
+              </a:lnSpc>
+              <a:spcAft>
+                <a:spcPts val="300"/>
+              </a:spcAft>
+              <a:buSzPct val="100000"/>
+              <a:buChar char="•"/>
+            </a:pPr>
+            <a:r>
+              <a:rPr lang="en-US" sz="1200" b="1" dirty="0">
+                <a:solidFill>
+                  <a:srgbClr val="1C2833"/>
+                </a:solidFill>
+                <a:latin typeface="Arial" pitchFamily="34" charset="0"/>
+                <a:ea typeface="Arial" pitchFamily="34" charset="-122"/>
+                <a:cs typeface="Arial" pitchFamily="34" charset="-120"/>
+              </a:rPr>
+              <a:t>Mint family (Lamiaceae)</a:t>
+            </a:r>
+            <a:pPr algn="l" indent="0" marL="0">
+              <a:lnSpc>
+                <a:spcPts val="1620"/>
+              </a:lnSpc>
+              <a:spcAft>
+                <a:spcPts val="300"/>
+              </a:spcAft>
+              <a:buNone/>
+            </a:pPr>
+            <a:r>
+              <a:rPr lang="en-US" sz="1200" dirty="0">
+                <a:solidFill>
+                  <a:srgbClr val="1C2833"/>
+                </a:solidFill>
+                <a:latin typeface="Arial" pitchFamily="34" charset="0"/>
+                <a:ea typeface="Arial" pitchFamily="34" charset="-122"/>
+                <a:cs typeface="Arial" pitchFamily="34" charset="-120"/>
+              </a:rPr>
+              <a:t> — same family as tulsi (square stems!). Make students check: press the mint stem between thumb and finger. Four flat sides.</a:t>
+            </a:r>
+            <a:endParaRPr lang="en-US" sz="1200" dirty="0"/>
+          </a:p>
+          <a:p>
+            <a:pPr algn="l" marL="342900" indent="-342900">
+              <a:lnSpc>
+                <a:spcPts val="1620"/>
+              </a:lnSpc>
+              <a:spcAft>
+                <a:spcPts val="300"/>
+              </a:spcAft>
+              <a:buSzPct val="100000"/>
+              <a:buChar char="•"/>
+            </a:pPr>
+            <a:r>
+              <a:rPr lang="en-US" sz="1200" b="1" dirty="0">
+                <a:solidFill>
+                  <a:srgbClr val="1C2833"/>
+                </a:solidFill>
+                <a:latin typeface="Arial" pitchFamily="34" charset="0"/>
+                <a:ea typeface="Arial" pitchFamily="34" charset="-122"/>
+                <a:cs typeface="Arial" pitchFamily="34" charset="-120"/>
+              </a:rPr>
+              <a:t>Leaf shape:</a:t>
+            </a:r>
+            <a:pPr algn="l" indent="0" marL="0">
+              <a:lnSpc>
+                <a:spcPts val="1620"/>
+              </a:lnSpc>
+              <a:spcAft>
+                <a:spcPts val="300"/>
+              </a:spcAft>
+              <a:buNone/>
+            </a:pPr>
+            <a:r>
+              <a:rPr lang="en-US" sz="1200" dirty="0">
+                <a:solidFill>
+                  <a:srgbClr val="1C2833"/>
+                </a:solidFill>
+                <a:latin typeface="Arial" pitchFamily="34" charset="0"/>
+                <a:ea typeface="Arial" pitchFamily="34" charset="-122"/>
+                <a:cs typeface="Arial" pitchFamily="34" charset="-120"/>
+              </a:rPr>
+              <a:t> oval-pointed, serrate (jagged) edges. Larger than tulsi leaves. Bright green.</a:t>
+            </a:r>
+            <a:endParaRPr lang="en-US" sz="1200" dirty="0"/>
+          </a:p>
+          <a:p>
+            <a:pPr algn="l" marL="342900" indent="-342900">
+              <a:lnSpc>
+                <a:spcPts val="1620"/>
+              </a:lnSpc>
+              <a:spcAft>
+                <a:spcPts val="300"/>
+              </a:spcAft>
+              <a:buSzPct val="100000"/>
+              <a:buChar char="•"/>
+            </a:pPr>
+            <a:r>
+              <a:rPr lang="en-US" sz="1200" b="1" dirty="0">
+                <a:solidFill>
+                  <a:srgbClr val="1C2833"/>
+                </a:solidFill>
+                <a:latin typeface="Arial" pitchFamily="34" charset="0"/>
+                <a:ea typeface="Arial" pitchFamily="34" charset="-122"/>
+                <a:cs typeface="Arial" pitchFamily="34" charset="-120"/>
+              </a:rPr>
+              <a:t>Smell:</a:t>
+            </a:r>
+            <a:pPr algn="l" indent="0" marL="0">
+              <a:lnSpc>
+                <a:spcPts val="1620"/>
+              </a:lnSpc>
+              <a:spcAft>
+                <a:spcPts val="300"/>
+              </a:spcAft>
+              <a:buNone/>
+            </a:pPr>
+            <a:r>
+              <a:rPr lang="en-US" sz="1200" dirty="0">
+                <a:solidFill>
+                  <a:srgbClr val="1C2833"/>
+                </a:solidFill>
+                <a:latin typeface="Arial" pitchFamily="34" charset="0"/>
+                <a:ea typeface="Arial" pitchFamily="34" charset="-122"/>
+                <a:cs typeface="Arial" pitchFamily="34" charset="-120"/>
+              </a:rPr>
+              <a:t> the unmistakable cooling-fresh aroma. Different varieties smell slightly different.</a:t>
+            </a:r>
+            <a:endParaRPr lang="en-US" sz="1200" dirty="0"/>
+          </a:p>
+          <a:p>
+            <a:pPr algn="l" marL="342900" indent="-342900">
+              <a:lnSpc>
+                <a:spcPts val="1620"/>
+              </a:lnSpc>
+              <a:spcAft>
+                <a:spcPts val="300"/>
+              </a:spcAft>
+              <a:buSzPct val="100000"/>
+              <a:buChar char="•"/>
+            </a:pPr>
+            <a:r>
+              <a:rPr lang="en-US" sz="1200" b="1" dirty="0">
+                <a:solidFill>
+                  <a:srgbClr val="1C2833"/>
+                </a:solidFill>
+                <a:latin typeface="Arial" pitchFamily="34" charset="0"/>
+                <a:ea typeface="Arial" pitchFamily="34" charset="-122"/>
+                <a:cs typeface="Arial" pitchFamily="34" charset="-120"/>
+              </a:rPr>
+              <a:t>Common varieties in India:</a:t>
+            </a:r>
+            <a:endParaRPr lang="en-US" sz="1200" dirty="0"/>
+          </a:p>
+          <a:p>
+            <a:pPr algn="l" marL="342900" indent="-342900">
+              <a:lnSpc>
+                <a:spcPts val="1620"/>
+              </a:lnSpc>
+              <a:spcAft>
+                <a:spcPts val="300"/>
+              </a:spcAft>
+              <a:buSzPct val="100000"/>
+              <a:buChar char="•"/>
             </a:pPr>
             <a:r>
               <a:rPr lang="en-US" sz="1200" i="1" dirty="0">
@@ -4769,7 +8655,27 @@
                 <a:ea typeface="Arial" pitchFamily="34" charset="-122"/>
                 <a:cs typeface="Arial" pitchFamily="34" charset="-120"/>
               </a:rPr>
-              <a:t>"Tomorrow we put all six herbs together — and look at them through the doṣa lens. Heating, cooling, what goes with what."</a:t>
+              <a:t>Mentha spicata</a:t>
+            </a:r>
+            <a:pPr algn="l" indent="0" marL="0">
+              <a:lnSpc>
+                <a:spcPts val="1620"/>
+              </a:lnSpc>
+              <a:spcAft>
+                <a:spcPts val="300"/>
+              </a:spcAft>
+              <a:buNone/>
+            </a:pPr>
+            <a:r>
+              <a:rPr lang="en-US" sz="1200" dirty="0">
+                <a:solidFill>
+                  <a:srgbClr val="1C2833"/>
+                </a:solidFill>
+                <a:latin typeface="Arial" pitchFamily="34" charset="0"/>
+                <a:ea typeface="Arial" pitchFamily="34" charset="-122"/>
+                <a:cs typeface="Arial" pitchFamily="34" charset="-120"/>
+              </a:rPr>
+              <a:t> — spearmint. The everyday "pudina" in chutney, raita.</a:t>
             </a:r>
             <a:endParaRPr lang="en-US" sz="1200" dirty="0"/>
           </a:p>
@@ -4777,7 +8683,7 @@
       </p:sp>
       <p:sp>
         <p:nvSpPr>
-          <p:cNvPr id="5" name="Text 3"/>
+          <p:cNvPr id="6" name="Text 4"/>
           <p:cNvSpPr/>
           <p:nvPr/>
         </p:nvSpPr>
@@ -4927,7 +8833,7 @@
                 <a:ea typeface="Georgia" pitchFamily="34" charset="-122"/>
                 <a:cs typeface="Georgia" pitchFamily="34" charset="-120"/>
               </a:rPr>
-              <a:t>Homework</a:t>
+              <a:t>Core (20 min) (cont.)</a:t>
             </a:r>
             <a:endParaRPr lang="en-US" sz="1800" dirty="0"/>
           </a:p>
@@ -4941,8 +8847,8 @@
         </p:nvSpPr>
         <p:spPr>
           <a:xfrm>
-            <a:off x="406301" y="870942"/>
-            <a:ext cx="8498026" cy="426541"/>
+            <a:off x="634901" y="883593"/>
+            <a:ext cx="8102798" cy="525661"/>
           </a:xfrm>
           <a:prstGeom prst="rect">
             <a:avLst/>
@@ -4954,28 +8860,90 @@
           <a:bodyPr wrap="square" lIns="0" tIns="0" rIns="0" bIns="0" rtlCol="0" anchor="t"/>
           <a:lstStyle/>
           <a:p>
-            <a:pPr algn="l" indent="0" marL="0">
-              <a:lnSpc>
-                <a:spcPts val="1680"/>
-              </a:lnSpc>
-              <a:spcBef>
-                <a:spcPts val="300"/>
-              </a:spcBef>
-              <a:spcAft>
-                <a:spcPts val="300"/>
-              </a:spcAft>
-              <a:buNone/>
-            </a:pPr>
-            <a:r>
-              <a:rPr lang="en-US" sz="1200" dirty="0">
-                <a:solidFill>
-                  <a:srgbClr val="1C2833"/>
-                </a:solidFill>
-                <a:latin typeface="Arial" pitchFamily="34" charset="0"/>
-                <a:ea typeface="Arial" pitchFamily="34" charset="-122"/>
-                <a:cs typeface="Arial" pitchFamily="34" charset="-120"/>
-              </a:rPr>
-              <a:t>– Find pudina (or any mint) in your home or near it. Sketch the leaf. Identify which variety if you can. Note: where do you encounter mint most often in your week?</a:t>
+            <a:pPr algn="l" marL="342900" indent="-342900">
+              <a:lnSpc>
+                <a:spcPts val="1620"/>
+              </a:lnSpc>
+              <a:spcAft>
+                <a:spcPts val="300"/>
+              </a:spcAft>
+              <a:buSzPct val="100000"/>
+              <a:buChar char="•"/>
+            </a:pPr>
+            <a:r>
+              <a:rPr lang="en-US" sz="1200" i="1" dirty="0">
+                <a:solidFill>
+                  <a:srgbClr val="1C2833"/>
+                </a:solidFill>
+                <a:latin typeface="Arial" pitchFamily="34" charset="0"/>
+                <a:ea typeface="Arial" pitchFamily="34" charset="-122"/>
+                <a:cs typeface="Arial" pitchFamily="34" charset="-120"/>
+              </a:rPr>
+              <a:t>Mentha × piperita</a:t>
+            </a:r>
+            <a:pPr algn="l" indent="0" marL="0">
+              <a:lnSpc>
+                <a:spcPts val="1620"/>
+              </a:lnSpc>
+              <a:spcAft>
+                <a:spcPts val="300"/>
+              </a:spcAft>
+              <a:buNone/>
+            </a:pPr>
+            <a:r>
+              <a:rPr lang="en-US" sz="1200" dirty="0">
+                <a:solidFill>
+                  <a:srgbClr val="1C2833"/>
+                </a:solidFill>
+                <a:latin typeface="Arial" pitchFamily="34" charset="0"/>
+                <a:ea typeface="Arial" pitchFamily="34" charset="-122"/>
+                <a:cs typeface="Arial" pitchFamily="34" charset="-120"/>
+              </a:rPr>
+              <a:t> — peppermint. More concentrated menthol; sharper, "tooth-paste" smell.</a:t>
+            </a:r>
+            <a:endParaRPr lang="en-US" sz="1200" dirty="0"/>
+          </a:p>
+          <a:p>
+            <a:pPr algn="l" marL="342900" indent="-342900">
+              <a:lnSpc>
+                <a:spcPts val="1620"/>
+              </a:lnSpc>
+              <a:spcAft>
+                <a:spcPts val="300"/>
+              </a:spcAft>
+              <a:buSzPct val="100000"/>
+              <a:buChar char="•"/>
+            </a:pPr>
+            <a:r>
+              <a:rPr lang="en-US" sz="1200" i="1" dirty="0">
+                <a:solidFill>
+                  <a:srgbClr val="1C2833"/>
+                </a:solidFill>
+                <a:latin typeface="Arial" pitchFamily="34" charset="0"/>
+                <a:ea typeface="Arial" pitchFamily="34" charset="-122"/>
+                <a:cs typeface="Arial" pitchFamily="34" charset="-120"/>
+              </a:rPr>
+              <a:t>Mentha arvensis</a:t>
+            </a:r>
+            <a:pPr algn="l" indent="0" marL="0">
+              <a:lnSpc>
+                <a:spcPts val="1620"/>
+              </a:lnSpc>
+              <a:spcAft>
+                <a:spcPts val="300"/>
+              </a:spcAft>
+              <a:buNone/>
+            </a:pPr>
+            <a:r>
+              <a:rPr lang="en-US" sz="1200" dirty="0">
+                <a:solidFill>
+                  <a:srgbClr val="1C2833"/>
+                </a:solidFill>
+                <a:latin typeface="Arial" pitchFamily="34" charset="0"/>
+                <a:ea typeface="Arial" pitchFamily="34" charset="-122"/>
+                <a:cs typeface="Arial" pitchFamily="34" charset="-120"/>
+              </a:rPr>
+              <a:t> — corn mint / Japanese mint — grown commercially in India for menthol extraction.</a:t>
             </a:r>
             <a:endParaRPr lang="en-US" sz="1200" dirty="0"/>
           </a:p>
@@ -5133,7 +9101,7 @@
                 <a:ea typeface="Georgia" pitchFamily="34" charset="-122"/>
                 <a:cs typeface="Georgia" pitchFamily="34" charset="-120"/>
               </a:rPr>
-              <a:t>Differentiation</a:t>
+              <a:t>Core (20 min) (cont.)</a:t>
             </a:r>
             <a:endParaRPr lang="en-US" sz="1800" dirty="0"/>
           </a:p>
@@ -5148,7 +9116,7 @@
         <p:spPr>
           <a:xfrm>
             <a:off x="634901" y="883593"/>
-            <a:ext cx="8102798" cy="731341"/>
+            <a:ext cx="8102798" cy="281880"/>
           </a:xfrm>
           <a:prstGeom prst="rect">
             <a:avLst/>
@@ -5179,30 +9147,52 @@
                 <a:ea typeface="Arial" pitchFamily="34" charset="-122"/>
                 <a:cs typeface="Arial" pitchFamily="34" charset="-120"/>
               </a:rPr>
-              <a:t>One tier up:</a:t>
-            </a:r>
-            <a:pPr algn="l" indent="0" marL="0">
-              <a:lnSpc>
-                <a:spcPts val="1620"/>
-              </a:lnSpc>
-              <a:spcAft>
-                <a:spcPts val="300"/>
-              </a:spcAft>
-              <a:buNone/>
-            </a:pPr>
-            <a:r>
-              <a:rPr lang="en-US" sz="1200" dirty="0">
-                <a:solidFill>
-                  <a:srgbClr val="1C2833"/>
-                </a:solidFill>
-                <a:latin typeface="Arial" pitchFamily="34" charset="0"/>
-                <a:ea typeface="Arial" pitchFamily="34" charset="-122"/>
-                <a:cs typeface="Arial" pitchFamily="34" charset="-120"/>
-              </a:rPr>
-              <a:t> TRPM8 was identified as the cold receptor in 2002. Look up the David Julius lab work on TRP channels (2021 Nobel Prize in Physiology or Medicine). Be ready to share one finding next class.</a:t>
+              <a:t>The cooling trick — explained.</a:t>
+            </a:r>
+            <a:pPr algn="l" indent="0" marL="0">
+              <a:lnSpc>
+                <a:spcPts val="1620"/>
+              </a:lnSpc>
+              <a:spcAft>
+                <a:spcPts val="300"/>
+              </a:spcAft>
+              <a:buNone/>
+            </a:pPr>
+            <a:r>
+              <a:rPr lang="en-US" sz="1200" dirty="0">
+                <a:solidFill>
+                  <a:srgbClr val="1C2833"/>
+                </a:solidFill>
+                <a:latin typeface="Arial" pitchFamily="34" charset="0"/>
+                <a:ea typeface="Arial" pitchFamily="34" charset="-122"/>
+                <a:cs typeface="Arial" pitchFamily="34" charset="-120"/>
+              </a:rPr>
+              <a:t> This is the headline.</a:t>
             </a:r>
             <a:endParaRPr lang="en-US" sz="1200" dirty="0"/>
           </a:p>
+        </p:txBody>
+      </p:sp>
+      <p:sp>
+        <p:nvSpPr>
+          <p:cNvPr id="5" name="Text 3"/>
+          <p:cNvSpPr/>
+          <p:nvPr/>
+        </p:nvSpPr>
+        <p:spPr>
+          <a:xfrm>
+            <a:off x="634901" y="1266974"/>
+            <a:ext cx="8102798" cy="1835944"/>
+          </a:xfrm>
+          <a:prstGeom prst="rect">
+            <a:avLst/>
+          </a:prstGeom>
+          <a:noFill/>
+          <a:ln/>
+        </p:spPr>
+        <p:txBody>
+          <a:bodyPr wrap="square" lIns="0" tIns="0" rIns="0" bIns="0" rtlCol="0" anchor="t"/>
+          <a:lstStyle/>
           <a:p>
             <a:pPr algn="l" marL="342900" indent="-342900">
               <a:lnSpc>
@@ -5215,6 +9205,26 @@
               <a:buChar char="•"/>
             </a:pPr>
             <a:r>
+              <a:rPr lang="en-US" sz="1200" dirty="0">
+                <a:solidFill>
+                  <a:srgbClr val="1C2833"/>
+                </a:solidFill>
+                <a:latin typeface="Arial" pitchFamily="34" charset="0"/>
+                <a:ea typeface="Arial" pitchFamily="34" charset="-122"/>
+                <a:cs typeface="Arial" pitchFamily="34" charset="-120"/>
+              </a:rPr>
+              <a:t>Menthol activates a receptor in your skin called </a:t>
+            </a:r>
+            <a:pPr algn="l" indent="0" marL="0">
+              <a:lnSpc>
+                <a:spcPts val="1620"/>
+              </a:lnSpc>
+              <a:spcAft>
+                <a:spcPts val="300"/>
+              </a:spcAft>
+              <a:buNone/>
+            </a:pPr>
+            <a:r>
               <a:rPr lang="en-US" sz="1200" b="1" dirty="0">
                 <a:solidFill>
                   <a:srgbClr val="1C2833"/>
@@ -5223,35 +9233,147 @@
                 <a:ea typeface="Arial" pitchFamily="34" charset="-122"/>
                 <a:cs typeface="Arial" pitchFamily="34" charset="-120"/>
               </a:rPr>
-              <a:t>One tier down:</a:t>
-            </a:r>
-            <a:pPr algn="l" indent="0" marL="0">
-              <a:lnSpc>
-                <a:spcPts val="1620"/>
-              </a:lnSpc>
-              <a:spcAft>
-                <a:spcPts val="300"/>
-              </a:spcAft>
-              <a:buNone/>
-            </a:pPr>
-            <a:r>
-              <a:rPr lang="en-US" sz="1200" dirty="0">
-                <a:solidFill>
-                  <a:srgbClr val="1C2833"/>
-                </a:solidFill>
-                <a:latin typeface="Arial" pitchFamily="34" charset="0"/>
-                <a:ea typeface="Arial" pitchFamily="34" charset="-122"/>
-                <a:cs typeface="Arial" pitchFamily="34" charset="-120"/>
-              </a:rPr>
-              <a:t> Focus on identifying mint by smell and remembering "menthol = cool feeling."</a:t>
+              <a:t>TRPM8</a:t>
+            </a:r>
+            <a:pPr algn="l" indent="0" marL="0">
+              <a:lnSpc>
+                <a:spcPts val="1620"/>
+              </a:lnSpc>
+              <a:spcAft>
+                <a:spcPts val="300"/>
+              </a:spcAft>
+              <a:buNone/>
+            </a:pPr>
+            <a:r>
+              <a:rPr lang="en-US" sz="1200" dirty="0">
+                <a:solidFill>
+                  <a:srgbClr val="1C2833"/>
+                </a:solidFill>
+                <a:latin typeface="Arial" pitchFamily="34" charset="0"/>
+                <a:ea typeface="Arial" pitchFamily="34" charset="-122"/>
+                <a:cs typeface="Arial" pitchFamily="34" charset="-120"/>
+              </a:rPr>
+              <a:t> — the same receptor that activates when your skin actually gets cold.</a:t>
             </a:r>
             <a:endParaRPr lang="en-US" sz="1200" dirty="0"/>
           </a:p>
-        </p:txBody>
-      </p:sp>
-      <p:sp>
-        <p:nvSpPr>
-          <p:cNvPr id="5" name="Text 3"/>
+          <a:p>
+            <a:pPr algn="l" marL="342900" indent="-342900">
+              <a:lnSpc>
+                <a:spcPts val="1620"/>
+              </a:lnSpc>
+              <a:spcAft>
+                <a:spcPts val="300"/>
+              </a:spcAft>
+              <a:buSzPct val="100000"/>
+              <a:buChar char="•"/>
+            </a:pPr>
+            <a:r>
+              <a:rPr lang="en-US" sz="1200" dirty="0">
+                <a:solidFill>
+                  <a:srgbClr val="1C2833"/>
+                </a:solidFill>
+                <a:latin typeface="Arial" pitchFamily="34" charset="0"/>
+                <a:ea typeface="Arial" pitchFamily="34" charset="-122"/>
+                <a:cs typeface="Arial" pitchFamily="34" charset="-120"/>
+              </a:rPr>
+              <a:t>The receptor doesn't know whether the signal is from real cold or from a menthol molecule. It sends "cold!" to your brain either way.</a:t>
+            </a:r>
+            <a:endParaRPr lang="en-US" sz="1200" dirty="0"/>
+          </a:p>
+          <a:p>
+            <a:pPr algn="l" marL="342900" indent="-342900">
+              <a:lnSpc>
+                <a:spcPts val="1620"/>
+              </a:lnSpc>
+              <a:spcAft>
+                <a:spcPts val="300"/>
+              </a:spcAft>
+              <a:buSzPct val="100000"/>
+              <a:buChar char="•"/>
+            </a:pPr>
+            <a:r>
+              <a:rPr lang="en-US" sz="1200" dirty="0">
+                <a:solidFill>
+                  <a:srgbClr val="1C2833"/>
+                </a:solidFill>
+                <a:latin typeface="Arial" pitchFamily="34" charset="0"/>
+                <a:ea typeface="Arial" pitchFamily="34" charset="-122"/>
+                <a:cs typeface="Arial" pitchFamily="34" charset="-120"/>
+              </a:rPr>
+              <a:t>The result: </a:t>
+            </a:r>
+            <a:pPr algn="l" indent="0" marL="0">
+              <a:lnSpc>
+                <a:spcPts val="1620"/>
+              </a:lnSpc>
+              <a:spcAft>
+                <a:spcPts val="300"/>
+              </a:spcAft>
+              <a:buNone/>
+            </a:pPr>
+            <a:r>
+              <a:rPr lang="en-US" sz="1200" b="1" dirty="0">
+                <a:solidFill>
+                  <a:srgbClr val="1C2833"/>
+                </a:solidFill>
+                <a:latin typeface="Arial" pitchFamily="34" charset="0"/>
+                <a:ea typeface="Arial" pitchFamily="34" charset="-122"/>
+                <a:cs typeface="Arial" pitchFamily="34" charset="-120"/>
+              </a:rPr>
+              <a:t>you feel cool without your temperature actually dropping</a:t>
+            </a:r>
+            <a:pPr algn="l" indent="0" marL="0">
+              <a:lnSpc>
+                <a:spcPts val="1620"/>
+              </a:lnSpc>
+              <a:spcAft>
+                <a:spcPts val="300"/>
+              </a:spcAft>
+              <a:buNone/>
+            </a:pPr>
+            <a:r>
+              <a:rPr lang="en-US" sz="1200" dirty="0">
+                <a:solidFill>
+                  <a:srgbClr val="1C2833"/>
+                </a:solidFill>
+                <a:latin typeface="Arial" pitchFamily="34" charset="0"/>
+                <a:ea typeface="Arial" pitchFamily="34" charset="-122"/>
+                <a:cs typeface="Arial" pitchFamily="34" charset="-120"/>
+              </a:rPr>
+              <a:t>. Your skin temperature is unchanged. Your perception of coolness is real.</a:t>
+            </a:r>
+            <a:endParaRPr lang="en-US" sz="1200" dirty="0"/>
+          </a:p>
+          <a:p>
+            <a:pPr algn="l" marL="342900" indent="-342900">
+              <a:lnSpc>
+                <a:spcPts val="1620"/>
+              </a:lnSpc>
+              <a:spcAft>
+                <a:spcPts val="300"/>
+              </a:spcAft>
+              <a:buSzPct val="100000"/>
+              <a:buChar char="•"/>
+            </a:pPr>
+            <a:r>
+              <a:rPr lang="en-US" sz="1200" dirty="0">
+                <a:solidFill>
+                  <a:srgbClr val="1C2833"/>
+                </a:solidFill>
+                <a:latin typeface="Arial" pitchFamily="34" charset="0"/>
+                <a:ea typeface="Arial" pitchFamily="34" charset="-122"/>
+                <a:cs typeface="Arial" pitchFamily="34" charset="-120"/>
+              </a:rPr>
+              <a:t>This is the same trick that capsaicin (chilli) plays in reverse — capsaicin activates TRPV1, the "heat" receptor, and your brain feels heat even though your skin isn't hot.</a:t>
+            </a:r>
+            <a:endParaRPr lang="en-US" sz="1200" dirty="0"/>
+          </a:p>
+        </p:txBody>
+      </p:sp>
+      <p:sp>
+        <p:nvSpPr>
+          <p:cNvPr id="6" name="Text 4"/>
           <p:cNvSpPr/>
           <p:nvPr/>
         </p:nvSpPr>
